--- a/output/wordlabs-pathy-suffix-3day.pptx
+++ b/output/wordlabs-pathy-suffix-3day.pptx
@@ -6040,7 +6040,7 @@
                 <a:ea typeface="Calibri" pitchFamily="34" charset="-122"/>
                 <a:cs typeface="Calibri" pitchFamily="34" charset="-120"/>
               </a:rPr>
-              <a:t>Showing </a:t>
+              <a:t>The teacher praised the student for showing </a:t>
             </a:r>
             <a:pPr algn="l" indent="0" marL="0">
               <a:buNone/>
@@ -6071,7 +6071,7 @@
                 <a:ea typeface="Calibri" pitchFamily="34" charset="-122"/>
                 <a:cs typeface="Calibri" pitchFamily="34" charset="-120"/>
               </a:rPr>
-              <a:t> towards others is just as important as showing </a:t>
+              <a:t>, and later explained that </a:t>
             </a:r>
             <a:pPr algn="l" indent="0" marL="0">
               <a:buNone/>
@@ -6088,7 +6088,7 @@
                 <a:ea typeface="Calibri" pitchFamily="34" charset="-122"/>
                 <a:cs typeface="Calibri" pitchFamily="34" charset="-120"/>
               </a:rPr>
-              <a:t>sympathy</a:t>
+              <a:t>apathy</a:t>
             </a:r>
             <a:pPr algn="l" indent="0" marL="0">
               <a:buNone/>
@@ -6102,7 +6102,7 @@
                 <a:ea typeface="Calibri" pitchFamily="34" charset="-122"/>
                 <a:cs typeface="Calibri" pitchFamily="34" charset="-120"/>
               </a:rPr>
-              <a:t> when they are sad.</a:t>
+              <a:t> can make it hard to help others.</a:t>
             </a:r>
             <a:endParaRPr lang="en-US" sz="1800" dirty="0"/>
           </a:p>
@@ -6385,7 +6385,7 @@
                 <a:ea typeface="Trebuchet MS" pitchFamily="34" charset="-122"/>
                 <a:cs typeface="Trebuchet MS" pitchFamily="34" charset="-120"/>
               </a:rPr>
-              <a:t>sympathy</a:t>
+              <a:t>apathy</a:t>
             </a:r>
             <a:endParaRPr lang="en-US" sz="1400" dirty="0"/>
           </a:p>
@@ -7860,7 +7860,7 @@
                 <a:ea typeface="Calibri" pitchFamily="34" charset="-122"/>
                 <a:cs typeface="Calibri" pitchFamily="34" charset="-120"/>
               </a:rPr>
-              <a:t>in, into</a:t>
+              <a:t>in, within</a:t>
             </a:r>
             <a:endParaRPr lang="en-US" sz="850" dirty="0"/>
           </a:p>
@@ -8011,7 +8011,7 @@
                 <a:ea typeface="Calibri" pitchFamily="34" charset="-122"/>
                 <a:cs typeface="Calibri" pitchFamily="34" charset="-120"/>
               </a:rPr>
-              <a:t>feeling, suffering</a:t>
+              <a:t>feeling</a:t>
             </a:r>
             <a:endParaRPr lang="en-US" sz="850" dirty="0"/>
           </a:p>
@@ -8123,7 +8123,7 @@
                 <a:ea typeface="Calibri" pitchFamily="34" charset="-122"/>
                 <a:cs typeface="Calibri" pitchFamily="34" charset="-120"/>
               </a:rPr>
-              <a:t>forms a noun or adjective</a:t>
+              <a:t>state or quality of</a:t>
             </a:r>
             <a:endParaRPr lang="en-US" sz="850" dirty="0"/>
           </a:p>
@@ -8996,7 +8996,7 @@
                 <a:ea typeface="Calibri" pitchFamily="34" charset="-122"/>
                 <a:cs typeface="Calibri" pitchFamily="34" charset="-120"/>
               </a:rPr>
-              <a:t>in, into</a:t>
+              <a:t>in, within</a:t>
             </a:r>
             <a:endParaRPr lang="en-US" sz="850" dirty="0"/>
           </a:p>
@@ -9147,7 +9147,7 @@
                 <a:ea typeface="Calibri" pitchFamily="34" charset="-122"/>
                 <a:cs typeface="Calibri" pitchFamily="34" charset="-120"/>
               </a:rPr>
-              <a:t>feeling, suffering</a:t>
+              <a:t>feeling</a:t>
             </a:r>
             <a:endParaRPr lang="en-US" sz="850" dirty="0"/>
           </a:p>
@@ -9259,7 +9259,7 @@
                 <a:ea typeface="Calibri" pitchFamily="34" charset="-122"/>
                 <a:cs typeface="Calibri" pitchFamily="34" charset="-120"/>
               </a:rPr>
-              <a:t>forms a noun or adjective</a:t>
+              <a:t>state or quality of</a:t>
             </a:r>
             <a:endParaRPr lang="en-US" sz="850" dirty="0"/>
           </a:p>
@@ -10369,7 +10369,7 @@
                 <a:ea typeface="Calibri" pitchFamily="34" charset="-122"/>
                 <a:cs typeface="Calibri" pitchFamily="34" charset="-120"/>
               </a:rPr>
-              <a:t>in, into</a:t>
+              <a:t>in, within</a:t>
             </a:r>
             <a:endParaRPr lang="en-US" sz="850" dirty="0"/>
           </a:p>
@@ -10520,7 +10520,7 @@
                 <a:ea typeface="Calibri" pitchFamily="34" charset="-122"/>
                 <a:cs typeface="Calibri" pitchFamily="34" charset="-120"/>
               </a:rPr>
-              <a:t>feeling, suffering</a:t>
+              <a:t>feeling</a:t>
             </a:r>
             <a:endParaRPr lang="en-US" sz="850" dirty="0"/>
           </a:p>
@@ -10632,7 +10632,7 @@
                 <a:ea typeface="Calibri" pitchFamily="34" charset="-122"/>
                 <a:cs typeface="Calibri" pitchFamily="34" charset="-120"/>
               </a:rPr>
-              <a:t>forms a noun or adjective</a:t>
+              <a:t>state or quality of</a:t>
             </a:r>
             <a:endParaRPr lang="en-US" sz="850" dirty="0"/>
           </a:p>
@@ -11960,7 +11960,7 @@
                 <a:ea typeface="Trebuchet MS" pitchFamily="34" charset="-122"/>
                 <a:cs typeface="Trebuchet MS" pitchFamily="34" charset="-120"/>
               </a:rPr>
-              <a:t>sympathy</a:t>
+              <a:t>apathy</a:t>
             </a:r>
             <a:endParaRPr lang="en-US" sz="2800" dirty="0"/>
           </a:p>
@@ -12787,7 +12787,7 @@
                 <a:ea typeface="Trebuchet MS" pitchFamily="34" charset="-122"/>
                 <a:cs typeface="Trebuchet MS" pitchFamily="34" charset="-120"/>
               </a:rPr>
-              <a:t>sympathy</a:t>
+              <a:t>apathy</a:t>
             </a:r>
             <a:endParaRPr lang="en-US" sz="2800" dirty="0"/>
           </a:p>
@@ -12926,7 +12926,7 @@
                 <a:ea typeface="Trebuchet MS" pitchFamily="34" charset="-122"/>
                 <a:cs typeface="Trebuchet MS" pitchFamily="34" charset="-120"/>
               </a:rPr>
-              <a:t>sym</a:t>
+              <a:t>a</a:t>
             </a:r>
             <a:endParaRPr lang="en-US" sz="1300" dirty="0"/>
           </a:p>
@@ -12965,7 +12965,7 @@
                 <a:ea typeface="Calibri" pitchFamily="34" charset="-122"/>
                 <a:cs typeface="Calibri" pitchFamily="34" charset="-120"/>
               </a:rPr>
-              <a:t>together, with</a:t>
+              <a:t>without, not</a:t>
             </a:r>
             <a:endParaRPr lang="en-US" sz="850" dirty="0"/>
           </a:p>
@@ -12973,46 +12973,7 @@
       </p:sp>
       <p:sp>
         <p:nvSpPr>
-          <p:cNvPr id="19" name="Text 17"/>
-          <p:cNvSpPr/>
-          <p:nvPr/>
-        </p:nvSpPr>
-        <p:spPr>
-          <a:xfrm>
-            <a:off x="2221992" y="2752344"/>
-            <a:ext cx="1828800" cy="182880"/>
-          </a:xfrm>
-          <a:prstGeom prst="rect">
-            <a:avLst/>
-          </a:prstGeom>
-          <a:noFill/>
-          <a:ln/>
-        </p:spPr>
-        <p:txBody>
-          <a:bodyPr wrap="square" lIns="0" tIns="0" rIns="0" bIns="0" rtlCol="0" anchor="t"/>
-          <a:lstStyle/>
-          <a:p>
-            <a:pPr algn="ctr" indent="0" marL="0">
-              <a:buNone/>
-            </a:pPr>
-            <a:r>
-              <a:rPr lang="en-US" sz="700" i="1" dirty="0">
-                <a:solidFill>
-                  <a:srgbClr val="94A3B8"/>
-                </a:solidFill>
-                <a:latin typeface="Calibri" pitchFamily="34" charset="0"/>
-                <a:ea typeface="Calibri" pitchFamily="34" charset="-122"/>
-                <a:cs typeface="Calibri" pitchFamily="34" charset="-120"/>
-              </a:rPr>
-              <a:t>syn → sym before 'p'</a:t>
-            </a:r>
-            <a:endParaRPr lang="en-US" sz="700" dirty="0"/>
-          </a:p>
-        </p:txBody>
-      </p:sp>
-      <p:sp>
-        <p:nvSpPr>
-          <p:cNvPr id="20" name="Shape 18"/>
+          <p:cNvPr id="19" name="Shape 17"/>
           <p:cNvSpPr/>
           <p:nvPr/>
         </p:nvSpPr>
@@ -13046,7 +13007,7 @@
       </p:sp>
       <p:sp>
         <p:nvSpPr>
-          <p:cNvPr id="21" name="Text 19"/>
+          <p:cNvPr id="20" name="Text 18"/>
           <p:cNvSpPr/>
           <p:nvPr/>
         </p:nvSpPr>
@@ -13085,7 +13046,7 @@
       </p:sp>
       <p:sp>
         <p:nvSpPr>
-          <p:cNvPr id="22" name="Text 20"/>
+          <p:cNvPr id="21" name="Text 19"/>
           <p:cNvSpPr/>
           <p:nvPr/>
         </p:nvSpPr>
@@ -13116,7 +13077,7 @@
                 <a:ea typeface="Calibri" pitchFamily="34" charset="-122"/>
                 <a:cs typeface="Calibri" pitchFamily="34" charset="-120"/>
               </a:rPr>
-              <a:t>feeling, suffering</a:t>
+              <a:t>feeling</a:t>
             </a:r>
             <a:endParaRPr lang="en-US" sz="850" dirty="0"/>
           </a:p>
@@ -13124,7 +13085,7 @@
       </p:sp>
       <p:sp>
         <p:nvSpPr>
-          <p:cNvPr id="23" name="Shape 21"/>
+          <p:cNvPr id="22" name="Shape 20"/>
           <p:cNvSpPr/>
           <p:nvPr/>
         </p:nvSpPr>
@@ -13158,7 +13119,7 @@
       </p:sp>
       <p:sp>
         <p:nvSpPr>
-          <p:cNvPr id="24" name="Text 22"/>
+          <p:cNvPr id="23" name="Text 21"/>
           <p:cNvSpPr/>
           <p:nvPr/>
         </p:nvSpPr>
@@ -13197,7 +13158,7 @@
       </p:sp>
       <p:sp>
         <p:nvSpPr>
-          <p:cNvPr id="25" name="Text 23"/>
+          <p:cNvPr id="24" name="Text 22"/>
           <p:cNvSpPr/>
           <p:nvPr/>
         </p:nvSpPr>
@@ -13228,7 +13189,7 @@
                 <a:ea typeface="Calibri" pitchFamily="34" charset="-122"/>
                 <a:cs typeface="Calibri" pitchFamily="34" charset="-120"/>
               </a:rPr>
-              <a:t>forms a noun or adjective</a:t>
+              <a:t>state or quality of</a:t>
             </a:r>
             <a:endParaRPr lang="en-US" sz="850" dirty="0"/>
           </a:p>
@@ -13236,7 +13197,7 @@
       </p:sp>
       <p:sp>
         <p:nvSpPr>
-          <p:cNvPr id="26" name="Shape 24"/>
+          <p:cNvPr id="25" name="Shape 23"/>
           <p:cNvSpPr/>
           <p:nvPr/>
         </p:nvSpPr>
@@ -13263,7 +13224,7 @@
       </p:sp>
       <p:sp>
         <p:nvSpPr>
-          <p:cNvPr id="27" name="Text 25"/>
+          <p:cNvPr id="26" name="Text 24"/>
           <p:cNvSpPr/>
           <p:nvPr/>
         </p:nvSpPr>
@@ -13302,7 +13263,7 @@
       </p:sp>
       <p:sp>
         <p:nvSpPr>
-          <p:cNvPr id="28" name="Shape 26"/>
+          <p:cNvPr id="27" name="Shape 25"/>
           <p:cNvSpPr/>
           <p:nvPr/>
         </p:nvSpPr>
@@ -13329,7 +13290,7 @@
       </p:sp>
       <p:sp>
         <p:nvSpPr>
-          <p:cNvPr id="29" name="Text 27"/>
+          <p:cNvPr id="28" name="Text 26"/>
           <p:cNvSpPr/>
           <p:nvPr/>
         </p:nvSpPr>
@@ -13368,7 +13329,7 @@
       </p:sp>
       <p:sp>
         <p:nvSpPr>
-          <p:cNvPr id="30" name="Shape 28"/>
+          <p:cNvPr id="29" name="Shape 27"/>
           <p:cNvSpPr/>
           <p:nvPr/>
         </p:nvSpPr>
@@ -13395,7 +13356,7 @@
       </p:sp>
       <p:sp>
         <p:nvSpPr>
-          <p:cNvPr id="31" name="Text 29"/>
+          <p:cNvPr id="30" name="Text 28"/>
           <p:cNvSpPr/>
           <p:nvPr/>
         </p:nvSpPr>
@@ -13434,7 +13395,7 @@
       </p:sp>
       <p:sp>
         <p:nvSpPr>
-          <p:cNvPr id="32" name="Shape 30"/>
+          <p:cNvPr id="31" name="Shape 29"/>
           <p:cNvSpPr/>
           <p:nvPr/>
         </p:nvSpPr>
@@ -13461,7 +13422,7 @@
       </p:sp>
       <p:sp>
         <p:nvSpPr>
-          <p:cNvPr id="33" name="Text 31"/>
+          <p:cNvPr id="32" name="Text 30"/>
           <p:cNvSpPr/>
           <p:nvPr/>
         </p:nvSpPr>
@@ -13923,7 +13884,7 @@
                 <a:ea typeface="Trebuchet MS" pitchFamily="34" charset="-122"/>
                 <a:cs typeface="Trebuchet MS" pitchFamily="34" charset="-120"/>
               </a:rPr>
-              <a:t>sympathy</a:t>
+              <a:t>apathy</a:t>
             </a:r>
             <a:endParaRPr lang="en-US" sz="2800" dirty="0"/>
           </a:p>
@@ -14062,7 +14023,7 @@
                 <a:ea typeface="Trebuchet MS" pitchFamily="34" charset="-122"/>
                 <a:cs typeface="Trebuchet MS" pitchFamily="34" charset="-120"/>
               </a:rPr>
-              <a:t>sym</a:t>
+              <a:t>a</a:t>
             </a:r>
             <a:endParaRPr lang="en-US" sz="1300" dirty="0"/>
           </a:p>
@@ -14101,7 +14062,7 @@
                 <a:ea typeface="Calibri" pitchFamily="34" charset="-122"/>
                 <a:cs typeface="Calibri" pitchFamily="34" charset="-120"/>
               </a:rPr>
-              <a:t>together, with</a:t>
+              <a:t>without, not</a:t>
             </a:r>
             <a:endParaRPr lang="en-US" sz="850" dirty="0"/>
           </a:p>
@@ -14109,46 +14070,7 @@
       </p:sp>
       <p:sp>
         <p:nvSpPr>
-          <p:cNvPr id="19" name="Text 17"/>
-          <p:cNvSpPr/>
-          <p:nvPr/>
-        </p:nvSpPr>
-        <p:spPr>
-          <a:xfrm>
-            <a:off x="2221992" y="2752344"/>
-            <a:ext cx="1828800" cy="182880"/>
-          </a:xfrm>
-          <a:prstGeom prst="rect">
-            <a:avLst/>
-          </a:prstGeom>
-          <a:noFill/>
-          <a:ln/>
-        </p:spPr>
-        <p:txBody>
-          <a:bodyPr wrap="square" lIns="0" tIns="0" rIns="0" bIns="0" rtlCol="0" anchor="t"/>
-          <a:lstStyle/>
-          <a:p>
-            <a:pPr algn="ctr" indent="0" marL="0">
-              <a:buNone/>
-            </a:pPr>
-            <a:r>
-              <a:rPr lang="en-US" sz="700" i="1" dirty="0">
-                <a:solidFill>
-                  <a:srgbClr val="94A3B8"/>
-                </a:solidFill>
-                <a:latin typeface="Calibri" pitchFamily="34" charset="0"/>
-                <a:ea typeface="Calibri" pitchFamily="34" charset="-122"/>
-                <a:cs typeface="Calibri" pitchFamily="34" charset="-120"/>
-              </a:rPr>
-              <a:t>syn → sym before 'p'</a:t>
-            </a:r>
-            <a:endParaRPr lang="en-US" sz="700" dirty="0"/>
-          </a:p>
-        </p:txBody>
-      </p:sp>
-      <p:sp>
-        <p:nvSpPr>
-          <p:cNvPr id="20" name="Shape 18"/>
+          <p:cNvPr id="19" name="Shape 17"/>
           <p:cNvSpPr/>
           <p:nvPr/>
         </p:nvSpPr>
@@ -14182,7 +14104,7 @@
       </p:sp>
       <p:sp>
         <p:nvSpPr>
-          <p:cNvPr id="21" name="Text 19"/>
+          <p:cNvPr id="20" name="Text 18"/>
           <p:cNvSpPr/>
           <p:nvPr/>
         </p:nvSpPr>
@@ -14221,7 +14143,7 @@
       </p:sp>
       <p:sp>
         <p:nvSpPr>
-          <p:cNvPr id="22" name="Text 20"/>
+          <p:cNvPr id="21" name="Text 19"/>
           <p:cNvSpPr/>
           <p:nvPr/>
         </p:nvSpPr>
@@ -14252,7 +14174,7 @@
                 <a:ea typeface="Calibri" pitchFamily="34" charset="-122"/>
                 <a:cs typeface="Calibri" pitchFamily="34" charset="-120"/>
               </a:rPr>
-              <a:t>feeling, suffering</a:t>
+              <a:t>feeling</a:t>
             </a:r>
             <a:endParaRPr lang="en-US" sz="850" dirty="0"/>
           </a:p>
@@ -14260,7 +14182,7 @@
       </p:sp>
       <p:sp>
         <p:nvSpPr>
-          <p:cNvPr id="23" name="Shape 21"/>
+          <p:cNvPr id="22" name="Shape 20"/>
           <p:cNvSpPr/>
           <p:nvPr/>
         </p:nvSpPr>
@@ -14294,7 +14216,7 @@
       </p:sp>
       <p:sp>
         <p:nvSpPr>
-          <p:cNvPr id="24" name="Text 22"/>
+          <p:cNvPr id="23" name="Text 21"/>
           <p:cNvSpPr/>
           <p:nvPr/>
         </p:nvSpPr>
@@ -14333,7 +14255,7 @@
       </p:sp>
       <p:sp>
         <p:nvSpPr>
-          <p:cNvPr id="25" name="Text 23"/>
+          <p:cNvPr id="24" name="Text 22"/>
           <p:cNvSpPr/>
           <p:nvPr/>
         </p:nvSpPr>
@@ -14364,7 +14286,7 @@
                 <a:ea typeface="Calibri" pitchFamily="34" charset="-122"/>
                 <a:cs typeface="Calibri" pitchFamily="34" charset="-120"/>
               </a:rPr>
-              <a:t>forms a noun or adjective</a:t>
+              <a:t>state or quality of</a:t>
             </a:r>
             <a:endParaRPr lang="en-US" sz="850" dirty="0"/>
           </a:p>
@@ -14372,7 +14294,7 @@
       </p:sp>
       <p:sp>
         <p:nvSpPr>
-          <p:cNvPr id="26" name="Shape 24"/>
+          <p:cNvPr id="25" name="Shape 23"/>
           <p:cNvSpPr/>
           <p:nvPr/>
         </p:nvSpPr>
@@ -14399,7 +14321,7 @@
       </p:sp>
       <p:sp>
         <p:nvSpPr>
-          <p:cNvPr id="27" name="Text 25"/>
+          <p:cNvPr id="26" name="Text 24"/>
           <p:cNvSpPr/>
           <p:nvPr/>
         </p:nvSpPr>
@@ -14438,7 +14360,7 @@
       </p:sp>
       <p:sp>
         <p:nvSpPr>
-          <p:cNvPr id="28" name="Shape 26"/>
+          <p:cNvPr id="27" name="Shape 25"/>
           <p:cNvSpPr/>
           <p:nvPr/>
         </p:nvSpPr>
@@ -14465,7 +14387,7 @@
       </p:sp>
       <p:sp>
         <p:nvSpPr>
-          <p:cNvPr id="29" name="Shape 27"/>
+          <p:cNvPr id="28" name="Shape 26"/>
           <p:cNvSpPr/>
           <p:nvPr/>
         </p:nvSpPr>
@@ -14492,7 +14414,7 @@
       </p:sp>
       <p:sp>
         <p:nvSpPr>
-          <p:cNvPr id="30" name="Text 28"/>
+          <p:cNvPr id="29" name="Text 27"/>
           <p:cNvSpPr/>
           <p:nvPr/>
         </p:nvSpPr>
@@ -14523,7 +14445,7 @@
                 <a:ea typeface="Trebuchet MS" pitchFamily="34" charset="-122"/>
                 <a:cs typeface="Trebuchet MS" pitchFamily="34" charset="-120"/>
               </a:rPr>
-              <a:t>sym</a:t>
+              <a:t>a</a:t>
             </a:r>
             <a:endParaRPr lang="en-US" sz="1400" dirty="0"/>
           </a:p>
@@ -14531,7 +14453,7 @@
       </p:sp>
       <p:sp>
         <p:nvSpPr>
-          <p:cNvPr id="31" name="Text 29"/>
+          <p:cNvPr id="30" name="Text 28"/>
           <p:cNvSpPr/>
           <p:nvPr/>
         </p:nvSpPr>
@@ -14570,7 +14492,7 @@
       </p:sp>
       <p:sp>
         <p:nvSpPr>
-          <p:cNvPr id="32" name="Shape 30"/>
+          <p:cNvPr id="31" name="Shape 29"/>
           <p:cNvSpPr/>
           <p:nvPr/>
         </p:nvSpPr>
@@ -14597,7 +14519,7 @@
       </p:sp>
       <p:sp>
         <p:nvSpPr>
-          <p:cNvPr id="33" name="Text 31"/>
+          <p:cNvPr id="32" name="Text 30"/>
           <p:cNvSpPr/>
           <p:nvPr/>
         </p:nvSpPr>
@@ -14636,7 +14558,7 @@
       </p:sp>
       <p:sp>
         <p:nvSpPr>
-          <p:cNvPr id="34" name="Text 32"/>
+          <p:cNvPr id="33" name="Text 31"/>
           <p:cNvSpPr/>
           <p:nvPr/>
         </p:nvSpPr>
@@ -14675,7 +14597,7 @@
       </p:sp>
       <p:sp>
         <p:nvSpPr>
-          <p:cNvPr id="35" name="Shape 33"/>
+          <p:cNvPr id="34" name="Shape 32"/>
           <p:cNvSpPr/>
           <p:nvPr/>
         </p:nvSpPr>
@@ -14702,7 +14624,7 @@
       </p:sp>
       <p:sp>
         <p:nvSpPr>
-          <p:cNvPr id="36" name="Text 34"/>
+          <p:cNvPr id="35" name="Text 33"/>
           <p:cNvSpPr/>
           <p:nvPr/>
         </p:nvSpPr>
@@ -14741,7 +14663,7 @@
       </p:sp>
       <p:sp>
         <p:nvSpPr>
-          <p:cNvPr id="37" name="Shape 35"/>
+          <p:cNvPr id="36" name="Shape 34"/>
           <p:cNvSpPr/>
           <p:nvPr/>
         </p:nvSpPr>
@@ -14768,7 +14690,7 @@
       </p:sp>
       <p:sp>
         <p:nvSpPr>
-          <p:cNvPr id="38" name="Text 36"/>
+          <p:cNvPr id="37" name="Text 35"/>
           <p:cNvSpPr/>
           <p:nvPr/>
         </p:nvSpPr>
@@ -14807,7 +14729,7 @@
       </p:sp>
       <p:sp>
         <p:nvSpPr>
-          <p:cNvPr id="39" name="Shape 37"/>
+          <p:cNvPr id="38" name="Shape 36"/>
           <p:cNvSpPr/>
           <p:nvPr/>
         </p:nvSpPr>
@@ -14834,7 +14756,7 @@
       </p:sp>
       <p:sp>
         <p:nvSpPr>
-          <p:cNvPr id="40" name="Text 38"/>
+          <p:cNvPr id="39" name="Text 37"/>
           <p:cNvSpPr/>
           <p:nvPr/>
         </p:nvSpPr>
@@ -15561,7 +15483,7 @@
                 <a:ea typeface="Trebuchet MS" pitchFamily="34" charset="-122"/>
                 <a:cs typeface="Trebuchet MS" pitchFamily="34" charset="-120"/>
               </a:rPr>
-              <a:t>sympathy</a:t>
+              <a:t>apathy</a:t>
             </a:r>
             <a:endParaRPr lang="en-US" sz="2800" dirty="0"/>
           </a:p>
@@ -15700,7 +15622,7 @@
                 <a:ea typeface="Trebuchet MS" pitchFamily="34" charset="-122"/>
                 <a:cs typeface="Trebuchet MS" pitchFamily="34" charset="-120"/>
               </a:rPr>
-              <a:t>sym</a:t>
+              <a:t>a</a:t>
             </a:r>
             <a:endParaRPr lang="en-US" sz="1300" dirty="0"/>
           </a:p>
@@ -15739,7 +15661,7 @@
                 <a:ea typeface="Calibri" pitchFamily="34" charset="-122"/>
                 <a:cs typeface="Calibri" pitchFamily="34" charset="-120"/>
               </a:rPr>
-              <a:t>together, with</a:t>
+              <a:t>without, not</a:t>
             </a:r>
             <a:endParaRPr lang="en-US" sz="850" dirty="0"/>
           </a:p>
@@ -15747,46 +15669,7 @@
       </p:sp>
       <p:sp>
         <p:nvSpPr>
-          <p:cNvPr id="19" name="Text 17"/>
-          <p:cNvSpPr/>
-          <p:nvPr/>
-        </p:nvSpPr>
-        <p:spPr>
-          <a:xfrm>
-            <a:off x="2221992" y="2752344"/>
-            <a:ext cx="1828800" cy="182880"/>
-          </a:xfrm>
-          <a:prstGeom prst="rect">
-            <a:avLst/>
-          </a:prstGeom>
-          <a:noFill/>
-          <a:ln/>
-        </p:spPr>
-        <p:txBody>
-          <a:bodyPr wrap="square" lIns="0" tIns="0" rIns="0" bIns="0" rtlCol="0" anchor="t"/>
-          <a:lstStyle/>
-          <a:p>
-            <a:pPr algn="ctr" indent="0" marL="0">
-              <a:buNone/>
-            </a:pPr>
-            <a:r>
-              <a:rPr lang="en-US" sz="700" i="1" dirty="0">
-                <a:solidFill>
-                  <a:srgbClr val="94A3B8"/>
-                </a:solidFill>
-                <a:latin typeface="Calibri" pitchFamily="34" charset="0"/>
-                <a:ea typeface="Calibri" pitchFamily="34" charset="-122"/>
-                <a:cs typeface="Calibri" pitchFamily="34" charset="-120"/>
-              </a:rPr>
-              <a:t>syn → sym before 'p'</a:t>
-            </a:r>
-            <a:endParaRPr lang="en-US" sz="700" dirty="0"/>
-          </a:p>
-        </p:txBody>
-      </p:sp>
-      <p:sp>
-        <p:nvSpPr>
-          <p:cNvPr id="20" name="Shape 18"/>
+          <p:cNvPr id="19" name="Shape 17"/>
           <p:cNvSpPr/>
           <p:nvPr/>
         </p:nvSpPr>
@@ -15820,7 +15703,7 @@
       </p:sp>
       <p:sp>
         <p:nvSpPr>
-          <p:cNvPr id="21" name="Text 19"/>
+          <p:cNvPr id="20" name="Text 18"/>
           <p:cNvSpPr/>
           <p:nvPr/>
         </p:nvSpPr>
@@ -15859,7 +15742,7 @@
       </p:sp>
       <p:sp>
         <p:nvSpPr>
-          <p:cNvPr id="22" name="Text 20"/>
+          <p:cNvPr id="21" name="Text 19"/>
           <p:cNvSpPr/>
           <p:nvPr/>
         </p:nvSpPr>
@@ -15890,7 +15773,7 @@
                 <a:ea typeface="Calibri" pitchFamily="34" charset="-122"/>
                 <a:cs typeface="Calibri" pitchFamily="34" charset="-120"/>
               </a:rPr>
-              <a:t>feeling, suffering</a:t>
+              <a:t>feeling</a:t>
             </a:r>
             <a:endParaRPr lang="en-US" sz="850" dirty="0"/>
           </a:p>
@@ -15898,7 +15781,7 @@
       </p:sp>
       <p:sp>
         <p:nvSpPr>
-          <p:cNvPr id="23" name="Shape 21"/>
+          <p:cNvPr id="22" name="Shape 20"/>
           <p:cNvSpPr/>
           <p:nvPr/>
         </p:nvSpPr>
@@ -15932,7 +15815,7 @@
       </p:sp>
       <p:sp>
         <p:nvSpPr>
-          <p:cNvPr id="24" name="Text 22"/>
+          <p:cNvPr id="23" name="Text 21"/>
           <p:cNvSpPr/>
           <p:nvPr/>
         </p:nvSpPr>
@@ -15971,7 +15854,7 @@
       </p:sp>
       <p:sp>
         <p:nvSpPr>
-          <p:cNvPr id="25" name="Text 23"/>
+          <p:cNvPr id="24" name="Text 22"/>
           <p:cNvSpPr/>
           <p:nvPr/>
         </p:nvSpPr>
@@ -16002,7 +15885,7 @@
                 <a:ea typeface="Calibri" pitchFamily="34" charset="-122"/>
                 <a:cs typeface="Calibri" pitchFamily="34" charset="-120"/>
               </a:rPr>
-              <a:t>forms a noun or adjective</a:t>
+              <a:t>state or quality of</a:t>
             </a:r>
             <a:endParaRPr lang="en-US" sz="850" dirty="0"/>
           </a:p>
@@ -16010,7 +15893,7 @@
       </p:sp>
       <p:sp>
         <p:nvSpPr>
-          <p:cNvPr id="26" name="Shape 24"/>
+          <p:cNvPr id="25" name="Shape 23"/>
           <p:cNvSpPr/>
           <p:nvPr/>
         </p:nvSpPr>
@@ -16037,7 +15920,7 @@
       </p:sp>
       <p:sp>
         <p:nvSpPr>
-          <p:cNvPr id="27" name="Text 25"/>
+          <p:cNvPr id="26" name="Text 24"/>
           <p:cNvSpPr/>
           <p:nvPr/>
         </p:nvSpPr>
@@ -16076,7 +15959,7 @@
       </p:sp>
       <p:sp>
         <p:nvSpPr>
-          <p:cNvPr id="28" name="Shape 26"/>
+          <p:cNvPr id="27" name="Shape 25"/>
           <p:cNvSpPr/>
           <p:nvPr/>
         </p:nvSpPr>
@@ -16103,7 +15986,7 @@
       </p:sp>
       <p:sp>
         <p:nvSpPr>
-          <p:cNvPr id="29" name="Shape 27"/>
+          <p:cNvPr id="28" name="Shape 26"/>
           <p:cNvSpPr/>
           <p:nvPr/>
         </p:nvSpPr>
@@ -16130,7 +16013,7 @@
       </p:sp>
       <p:sp>
         <p:nvSpPr>
-          <p:cNvPr id="30" name="Text 28"/>
+          <p:cNvPr id="29" name="Text 27"/>
           <p:cNvSpPr/>
           <p:nvPr/>
         </p:nvSpPr>
@@ -16161,7 +16044,7 @@
                 <a:ea typeface="Trebuchet MS" pitchFamily="34" charset="-122"/>
                 <a:cs typeface="Trebuchet MS" pitchFamily="34" charset="-120"/>
               </a:rPr>
-              <a:t>sym</a:t>
+              <a:t>a</a:t>
             </a:r>
             <a:endParaRPr lang="en-US" sz="1400" dirty="0"/>
           </a:p>
@@ -16169,7 +16052,7 @@
       </p:sp>
       <p:sp>
         <p:nvSpPr>
-          <p:cNvPr id="31" name="Text 29"/>
+          <p:cNvPr id="30" name="Text 28"/>
           <p:cNvSpPr/>
           <p:nvPr/>
         </p:nvSpPr>
@@ -16208,7 +16091,7 @@
       </p:sp>
       <p:sp>
         <p:nvSpPr>
-          <p:cNvPr id="32" name="Shape 30"/>
+          <p:cNvPr id="31" name="Shape 29"/>
           <p:cNvSpPr/>
           <p:nvPr/>
         </p:nvSpPr>
@@ -16235,7 +16118,7 @@
       </p:sp>
       <p:sp>
         <p:nvSpPr>
-          <p:cNvPr id="33" name="Text 31"/>
+          <p:cNvPr id="32" name="Text 30"/>
           <p:cNvSpPr/>
           <p:nvPr/>
         </p:nvSpPr>
@@ -16274,7 +16157,7 @@
       </p:sp>
       <p:sp>
         <p:nvSpPr>
-          <p:cNvPr id="34" name="Text 32"/>
+          <p:cNvPr id="33" name="Text 31"/>
           <p:cNvSpPr/>
           <p:nvPr/>
         </p:nvSpPr>
@@ -16313,7 +16196,7 @@
       </p:sp>
       <p:sp>
         <p:nvSpPr>
-          <p:cNvPr id="35" name="Shape 33"/>
+          <p:cNvPr id="34" name="Shape 32"/>
           <p:cNvSpPr/>
           <p:nvPr/>
         </p:nvSpPr>
@@ -16340,7 +16223,7 @@
       </p:sp>
       <p:sp>
         <p:nvSpPr>
-          <p:cNvPr id="36" name="Text 34"/>
+          <p:cNvPr id="35" name="Text 33"/>
           <p:cNvSpPr/>
           <p:nvPr/>
         </p:nvSpPr>
@@ -16379,7 +16262,7 @@
       </p:sp>
       <p:sp>
         <p:nvSpPr>
-          <p:cNvPr id="37" name="Shape 35"/>
+          <p:cNvPr id="36" name="Shape 34"/>
           <p:cNvSpPr/>
           <p:nvPr/>
         </p:nvSpPr>
@@ -16406,7 +16289,7 @@
       </p:sp>
       <p:sp>
         <p:nvSpPr>
-          <p:cNvPr id="38" name="Text 36"/>
+          <p:cNvPr id="37" name="Text 35"/>
           <p:cNvSpPr/>
           <p:nvPr/>
         </p:nvSpPr>
@@ -16445,7 +16328,7 @@
       </p:sp>
       <p:sp>
         <p:nvSpPr>
-          <p:cNvPr id="39" name="Shape 37"/>
+          <p:cNvPr id="38" name="Shape 36"/>
           <p:cNvSpPr/>
           <p:nvPr/>
         </p:nvSpPr>
@@ -16472,13 +16355,13 @@
       </p:sp>
       <p:sp>
         <p:nvSpPr>
-          <p:cNvPr id="40" name="Shape 38"/>
-          <p:cNvSpPr/>
-          <p:nvPr/>
-        </p:nvSpPr>
-        <p:spPr>
-          <a:xfrm>
-            <a:off x="2124837" y="4169664"/>
+          <p:cNvPr id="39" name="Shape 37"/>
+          <p:cNvSpPr/>
+          <p:nvPr/>
+        </p:nvSpPr>
+        <p:spPr>
+          <a:xfrm>
+            <a:off x="2427732" y="4169664"/>
             <a:ext cx="685800" cy="384048"/>
           </a:xfrm>
           <a:prstGeom prst="rect">
@@ -16499,13 +16382,13 @@
       </p:sp>
       <p:sp>
         <p:nvSpPr>
-          <p:cNvPr id="41" name="Text 39"/>
-          <p:cNvSpPr/>
-          <p:nvPr/>
-        </p:nvSpPr>
-        <p:spPr>
-          <a:xfrm>
-            <a:off x="2124837" y="4169664"/>
+          <p:cNvPr id="40" name="Text 38"/>
+          <p:cNvSpPr/>
+          <p:nvPr/>
+        </p:nvSpPr>
+        <p:spPr>
+          <a:xfrm>
+            <a:off x="2427732" y="4169664"/>
             <a:ext cx="685800" cy="384048"/>
           </a:xfrm>
           <a:prstGeom prst="rect">
@@ -16530,7 +16413,7 @@
                 <a:ea typeface="Trebuchet MS" pitchFamily="34" charset="-122"/>
                 <a:cs typeface="Trebuchet MS" pitchFamily="34" charset="-120"/>
               </a:rPr>
-              <a:t>s</a:t>
+              <a:t>a</a:t>
             </a:r>
             <a:endParaRPr lang="en-US" sz="900" dirty="0"/>
           </a:p>
@@ -16538,13 +16421,13 @@
       </p:sp>
       <p:sp>
         <p:nvSpPr>
-          <p:cNvPr id="42" name="Shape 40"/>
-          <p:cNvSpPr/>
-          <p:nvPr/>
-        </p:nvSpPr>
-        <p:spPr>
-          <a:xfrm>
-            <a:off x="3033522" y="4169664"/>
+          <p:cNvPr id="41" name="Shape 39"/>
+          <p:cNvSpPr/>
+          <p:nvPr/>
+        </p:nvSpPr>
+        <p:spPr>
+          <a:xfrm>
+            <a:off x="3639312" y="4169664"/>
             <a:ext cx="685800" cy="384048"/>
           </a:xfrm>
           <a:prstGeom prst="rect">
@@ -16565,13 +16448,13 @@
       </p:sp>
       <p:sp>
         <p:nvSpPr>
-          <p:cNvPr id="43" name="Text 41"/>
-          <p:cNvSpPr/>
-          <p:nvPr/>
-        </p:nvSpPr>
-        <p:spPr>
-          <a:xfrm>
-            <a:off x="3033522" y="4169664"/>
+          <p:cNvPr id="42" name="Text 40"/>
+          <p:cNvSpPr/>
+          <p:nvPr/>
+        </p:nvSpPr>
+        <p:spPr>
+          <a:xfrm>
+            <a:off x="3639312" y="4169664"/>
             <a:ext cx="685800" cy="384048"/>
           </a:xfrm>
           <a:prstGeom prst="rect">
@@ -16596,7 +16479,7 @@
                 <a:ea typeface="Trebuchet MS" pitchFamily="34" charset="-122"/>
                 <a:cs typeface="Trebuchet MS" pitchFamily="34" charset="-120"/>
               </a:rPr>
-              <a:t>y</a:t>
+              <a:t>p</a:t>
             </a:r>
             <a:endParaRPr lang="en-US" sz="900" dirty="0"/>
           </a:p>
@@ -16604,52 +16487,13 @@
       </p:sp>
       <p:sp>
         <p:nvSpPr>
-          <p:cNvPr id="44" name="Text 42"/>
-          <p:cNvSpPr/>
-          <p:nvPr/>
-        </p:nvSpPr>
-        <p:spPr>
-          <a:xfrm>
-            <a:off x="3033522" y="4572000"/>
-            <a:ext cx="685800" cy="219456"/>
-          </a:xfrm>
-          <a:prstGeom prst="rect">
-            <a:avLst/>
-          </a:prstGeom>
-          <a:noFill/>
-          <a:ln/>
-        </p:spPr>
-        <p:txBody>
-          <a:bodyPr wrap="square" lIns="0" tIns="0" rIns="0" bIns="0" rtlCol="0" anchor="t"/>
-          <a:lstStyle/>
-          <a:p>
-            <a:pPr algn="ctr" indent="0" marL="0">
-              <a:buNone/>
-            </a:pPr>
-            <a:r>
-              <a:rPr lang="en-US" sz="750" i="1" dirty="0">
-                <a:solidFill>
-                  <a:srgbClr val="94A3B8"/>
-                </a:solidFill>
-                <a:latin typeface="Calibri" pitchFamily="34" charset="0"/>
-                <a:ea typeface="Calibri" pitchFamily="34" charset="-122"/>
-                <a:cs typeface="Calibri" pitchFamily="34" charset="-120"/>
-              </a:rPr>
-              <a:t>/i/</a:t>
-            </a:r>
-            <a:endParaRPr lang="en-US" sz="750" dirty="0"/>
-          </a:p>
-        </p:txBody>
-      </p:sp>
-      <p:sp>
-        <p:nvSpPr>
-          <p:cNvPr id="45" name="Shape 43"/>
-          <p:cNvSpPr/>
-          <p:nvPr/>
-        </p:nvSpPr>
-        <p:spPr>
-          <a:xfrm>
-            <a:off x="3942207" y="4169664"/>
+          <p:cNvPr id="43" name="Shape 41"/>
+          <p:cNvSpPr/>
+          <p:nvPr/>
+        </p:nvSpPr>
+        <p:spPr>
+          <a:xfrm>
+            <a:off x="4850892" y="4169664"/>
             <a:ext cx="685800" cy="384048"/>
           </a:xfrm>
           <a:prstGeom prst="rect">
@@ -16670,13 +16514,13 @@
       </p:sp>
       <p:sp>
         <p:nvSpPr>
-          <p:cNvPr id="46" name="Text 44"/>
-          <p:cNvSpPr/>
-          <p:nvPr/>
-        </p:nvSpPr>
-        <p:spPr>
-          <a:xfrm>
-            <a:off x="3942207" y="4169664"/>
+          <p:cNvPr id="44" name="Text 42"/>
+          <p:cNvSpPr/>
+          <p:nvPr/>
+        </p:nvSpPr>
+        <p:spPr>
+          <a:xfrm>
+            <a:off x="4850892" y="4169664"/>
             <a:ext cx="685800" cy="384048"/>
           </a:xfrm>
           <a:prstGeom prst="rect">
@@ -16701,7 +16545,7 @@
                 <a:ea typeface="Trebuchet MS" pitchFamily="34" charset="-122"/>
                 <a:cs typeface="Trebuchet MS" pitchFamily="34" charset="-120"/>
               </a:rPr>
-              <a:t>m</a:t>
+              <a:t>a</a:t>
             </a:r>
             <a:endParaRPr lang="en-US" sz="900" dirty="0"/>
           </a:p>
@@ -16709,13 +16553,13 @@
       </p:sp>
       <p:sp>
         <p:nvSpPr>
-          <p:cNvPr id="47" name="Shape 45"/>
-          <p:cNvSpPr/>
-          <p:nvPr/>
-        </p:nvSpPr>
-        <p:spPr>
-          <a:xfrm>
-            <a:off x="4850892" y="4169664"/>
+          <p:cNvPr id="45" name="Shape 43"/>
+          <p:cNvSpPr/>
+          <p:nvPr/>
+        </p:nvSpPr>
+        <p:spPr>
+          <a:xfrm>
+            <a:off x="6062472" y="4169664"/>
             <a:ext cx="685800" cy="384048"/>
           </a:xfrm>
           <a:prstGeom prst="rect">
@@ -16736,13 +16580,13 @@
       </p:sp>
       <p:sp>
         <p:nvSpPr>
-          <p:cNvPr id="48" name="Text 46"/>
-          <p:cNvSpPr/>
-          <p:nvPr/>
-        </p:nvSpPr>
-        <p:spPr>
-          <a:xfrm>
-            <a:off x="4850892" y="4169664"/>
+          <p:cNvPr id="46" name="Text 44"/>
+          <p:cNvSpPr/>
+          <p:nvPr/>
+        </p:nvSpPr>
+        <p:spPr>
+          <a:xfrm>
+            <a:off x="6062472" y="4169664"/>
             <a:ext cx="685800" cy="384048"/>
           </a:xfrm>
           <a:prstGeom prst="rect">
@@ -16767,7 +16611,7 @@
                 <a:ea typeface="Trebuchet MS" pitchFamily="34" charset="-122"/>
                 <a:cs typeface="Trebuchet MS" pitchFamily="34" charset="-120"/>
               </a:rPr>
-              <a:t>p</a:t>
+              <a:t>th</a:t>
             </a:r>
             <a:endParaRPr lang="en-US" sz="900" dirty="0"/>
           </a:p>
@@ -16775,13 +16619,13 @@
       </p:sp>
       <p:sp>
         <p:nvSpPr>
-          <p:cNvPr id="49" name="Shape 47"/>
-          <p:cNvSpPr/>
-          <p:nvPr/>
-        </p:nvSpPr>
-        <p:spPr>
-          <a:xfrm>
-            <a:off x="5759577" y="4169664"/>
+          <p:cNvPr id="47" name="Shape 45"/>
+          <p:cNvSpPr/>
+          <p:nvPr/>
+        </p:nvSpPr>
+        <p:spPr>
+          <a:xfrm>
+            <a:off x="7274052" y="4169664"/>
             <a:ext cx="685800" cy="384048"/>
           </a:xfrm>
           <a:prstGeom prst="rect">
@@ -16802,13 +16646,13 @@
       </p:sp>
       <p:sp>
         <p:nvSpPr>
-          <p:cNvPr id="50" name="Text 48"/>
-          <p:cNvSpPr/>
-          <p:nvPr/>
-        </p:nvSpPr>
-        <p:spPr>
-          <a:xfrm>
-            <a:off x="5759577" y="4169664"/>
+          <p:cNvPr id="48" name="Text 46"/>
+          <p:cNvSpPr/>
+          <p:nvPr/>
+        </p:nvSpPr>
+        <p:spPr>
+          <a:xfrm>
+            <a:off x="7274052" y="4169664"/>
             <a:ext cx="685800" cy="384048"/>
           </a:xfrm>
           <a:prstGeom prst="rect">
@@ -16833,7 +16677,7 @@
                 <a:ea typeface="Trebuchet MS" pitchFamily="34" charset="-122"/>
                 <a:cs typeface="Trebuchet MS" pitchFamily="34" charset="-120"/>
               </a:rPr>
-              <a:t>a</a:t>
+              <a:t>y</a:t>
             </a:r>
             <a:endParaRPr lang="en-US" sz="900" dirty="0"/>
           </a:p>
@@ -16841,145 +16685,13 @@
       </p:sp>
       <p:sp>
         <p:nvSpPr>
-          <p:cNvPr id="51" name="Shape 49"/>
-          <p:cNvSpPr/>
-          <p:nvPr/>
-        </p:nvSpPr>
-        <p:spPr>
-          <a:xfrm>
-            <a:off x="6668262" y="4169664"/>
-            <a:ext cx="685800" cy="384048"/>
-          </a:xfrm>
-          <a:prstGeom prst="rect">
-            <a:avLst>
-              <a:gd name="adj" fmla="val 9524"/>
-            </a:avLst>
-          </a:prstGeom>
-          <a:solidFill>
-            <a:srgbClr val="FFFFFF"/>
-          </a:solidFill>
-          <a:ln w="12700">
-            <a:solidFill>
-              <a:srgbClr val="DB2777"/>
-            </a:solidFill>
-            <a:prstDash val="solid"/>
-          </a:ln>
-        </p:spPr>
-      </p:sp>
-      <p:sp>
-        <p:nvSpPr>
-          <p:cNvPr id="52" name="Text 50"/>
-          <p:cNvSpPr/>
-          <p:nvPr/>
-        </p:nvSpPr>
-        <p:spPr>
-          <a:xfrm>
-            <a:off x="6668262" y="4169664"/>
-            <a:ext cx="685800" cy="384048"/>
-          </a:xfrm>
-          <a:prstGeom prst="rect">
-            <a:avLst/>
-          </a:prstGeom>
-          <a:noFill/>
-          <a:ln/>
-        </p:spPr>
-        <p:txBody>
-          <a:bodyPr wrap="square" lIns="0" tIns="0" rIns="0" bIns="0" rtlCol="0" anchor="ctr"/>
-          <a:lstStyle/>
-          <a:p>
-            <a:pPr algn="ctr" indent="0" marL="0">
-              <a:buNone/>
-            </a:pPr>
-            <a:r>
-              <a:rPr lang="en-US" sz="900" b="1" dirty="0">
-                <a:solidFill>
-                  <a:srgbClr val="9D174D"/>
-                </a:solidFill>
-                <a:latin typeface="Trebuchet MS" pitchFamily="34" charset="0"/>
-                <a:ea typeface="Trebuchet MS" pitchFamily="34" charset="-122"/>
-                <a:cs typeface="Trebuchet MS" pitchFamily="34" charset="-120"/>
-              </a:rPr>
-              <a:t>th</a:t>
-            </a:r>
-            <a:endParaRPr lang="en-US" sz="900" dirty="0"/>
-          </a:p>
-        </p:txBody>
-      </p:sp>
-      <p:sp>
-        <p:nvSpPr>
-          <p:cNvPr id="53" name="Shape 51"/>
-          <p:cNvSpPr/>
-          <p:nvPr/>
-        </p:nvSpPr>
-        <p:spPr>
-          <a:xfrm>
-            <a:off x="7576947" y="4169664"/>
-            <a:ext cx="685800" cy="384048"/>
-          </a:xfrm>
-          <a:prstGeom prst="rect">
-            <a:avLst>
-              <a:gd name="adj" fmla="val 9524"/>
-            </a:avLst>
-          </a:prstGeom>
-          <a:solidFill>
-            <a:srgbClr val="FFFFFF"/>
-          </a:solidFill>
-          <a:ln w="12700">
-            <a:solidFill>
-              <a:srgbClr val="DB2777"/>
-            </a:solidFill>
-            <a:prstDash val="solid"/>
-          </a:ln>
-        </p:spPr>
-      </p:sp>
-      <p:sp>
-        <p:nvSpPr>
-          <p:cNvPr id="54" name="Text 52"/>
-          <p:cNvSpPr/>
-          <p:nvPr/>
-        </p:nvSpPr>
-        <p:spPr>
-          <a:xfrm>
-            <a:off x="7576947" y="4169664"/>
-            <a:ext cx="685800" cy="384048"/>
-          </a:xfrm>
-          <a:prstGeom prst="rect">
-            <a:avLst/>
-          </a:prstGeom>
-          <a:noFill/>
-          <a:ln/>
-        </p:spPr>
-        <p:txBody>
-          <a:bodyPr wrap="square" lIns="0" tIns="0" rIns="0" bIns="0" rtlCol="0" anchor="ctr"/>
-          <a:lstStyle/>
-          <a:p>
-            <a:pPr algn="ctr" indent="0" marL="0">
-              <a:buNone/>
-            </a:pPr>
-            <a:r>
-              <a:rPr lang="en-US" sz="900" b="1" dirty="0">
-                <a:solidFill>
-                  <a:srgbClr val="9D174D"/>
-                </a:solidFill>
-                <a:latin typeface="Trebuchet MS" pitchFamily="34" charset="0"/>
-                <a:ea typeface="Trebuchet MS" pitchFamily="34" charset="-122"/>
-                <a:cs typeface="Trebuchet MS" pitchFamily="34" charset="-120"/>
-              </a:rPr>
-              <a:t>y</a:t>
-            </a:r>
-            <a:endParaRPr lang="en-US" sz="900" dirty="0"/>
-          </a:p>
-        </p:txBody>
-      </p:sp>
-      <p:sp>
-        <p:nvSpPr>
-          <p:cNvPr id="55" name="Text 53"/>
-          <p:cNvSpPr/>
-          <p:nvPr/>
-        </p:nvSpPr>
-        <p:spPr>
-          <a:xfrm>
-            <a:off x="7576947" y="4572000"/>
+          <p:cNvPr id="49" name="Text 47"/>
+          <p:cNvSpPr/>
+          <p:nvPr/>
+        </p:nvSpPr>
+        <p:spPr>
+          <a:xfrm>
+            <a:off x="7274052" y="4572000"/>
             <a:ext cx="685800" cy="219456"/>
           </a:xfrm>
           <a:prstGeom prst="rect">
@@ -18330,7 +18042,7 @@
                 <a:ea typeface="Calibri" pitchFamily="34" charset="-122"/>
                 <a:cs typeface="Calibri" pitchFamily="34" charset="-120"/>
               </a:rPr>
-              <a:t>While </a:t>
+              <a:t>The doctor explained that </a:t>
             </a:r>
             <a:pPr algn="l" indent="0" marL="0">
               <a:buNone/>
@@ -18347,7 +18059,7 @@
                 <a:ea typeface="Calibri" pitchFamily="34" charset="-122"/>
                 <a:cs typeface="Calibri" pitchFamily="34" charset="-120"/>
               </a:rPr>
-              <a:t>empathy</a:t>
+              <a:t>osteopathy</a:t>
             </a:r>
             <a:pPr algn="l" indent="0" marL="0">
               <a:buNone/>
@@ -18361,7 +18073,7 @@
                 <a:ea typeface="Calibri" pitchFamily="34" charset="-122"/>
                 <a:cs typeface="Calibri" pitchFamily="34" charset="-120"/>
               </a:rPr>
-              <a:t> means truly sharing someone's feelings, </a:t>
+              <a:t> can relieve pain, and she also discussed </a:t>
             </a:r>
             <a:pPr algn="l" indent="0" marL="0">
               <a:buNone/>
@@ -18378,7 +18090,7 @@
                 <a:ea typeface="Calibri" pitchFamily="34" charset="-122"/>
                 <a:cs typeface="Calibri" pitchFamily="34" charset="-120"/>
               </a:rPr>
-              <a:t>sympathy</a:t>
+              <a:t>homeopathy</a:t>
             </a:r>
             <a:pPr algn="l" indent="0" marL="0">
               <a:buNone/>
@@ -18392,7 +18104,7 @@
                 <a:ea typeface="Calibri" pitchFamily="34" charset="-122"/>
                 <a:cs typeface="Calibri" pitchFamily="34" charset="-120"/>
               </a:rPr>
-              <a:t> means caring about them, and </a:t>
+              <a:t> and </a:t>
             </a:r>
             <a:pPr algn="l" indent="0" marL="0">
               <a:buNone/>
@@ -18409,7 +18121,7 @@
                 <a:ea typeface="Calibri" pitchFamily="34" charset="-122"/>
                 <a:cs typeface="Calibri" pitchFamily="34" charset="-120"/>
               </a:rPr>
-              <a:t>apathy</a:t>
+              <a:t>telepathy</a:t>
             </a:r>
             <a:pPr algn="l" indent="0" marL="0">
               <a:buNone/>
@@ -18423,7 +18135,7 @@
                 <a:ea typeface="Calibri" pitchFamily="34" charset="-122"/>
                 <a:cs typeface="Calibri" pitchFamily="34" charset="-120"/>
               </a:rPr>
-              <a:t> means feeling nothing at all.</a:t>
+              <a:t> with the curious class.</a:t>
             </a:r>
             <a:endParaRPr lang="en-US" sz="1800" dirty="0"/>
           </a:p>
@@ -18578,7 +18290,7 @@
                 <a:ea typeface="Trebuchet MS" pitchFamily="34" charset="-122"/>
                 <a:cs typeface="Trebuchet MS" pitchFamily="34" charset="-120"/>
               </a:rPr>
-              <a:t>empathy</a:t>
+              <a:t>osteopathy</a:t>
             </a:r>
             <a:endParaRPr lang="en-US" sz="1400" dirty="0"/>
           </a:p>
@@ -18706,7 +18418,7 @@
                 <a:ea typeface="Trebuchet MS" pitchFamily="34" charset="-122"/>
                 <a:cs typeface="Trebuchet MS" pitchFamily="34" charset="-120"/>
               </a:rPr>
-              <a:t>sympathy</a:t>
+              <a:t>homeopathy</a:t>
             </a:r>
             <a:endParaRPr lang="en-US" sz="1400" dirty="0"/>
           </a:p>
@@ -18834,7 +18546,7 @@
                 <a:ea typeface="Trebuchet MS" pitchFamily="34" charset="-122"/>
                 <a:cs typeface="Trebuchet MS" pitchFamily="34" charset="-120"/>
               </a:rPr>
-              <a:t>apathy</a:t>
+              <a:t>telepathy</a:t>
             </a:r>
             <a:endParaRPr lang="en-US" sz="1400" dirty="0"/>
           </a:p>
@@ -19304,7 +19016,7 @@
                 <a:ea typeface="Trebuchet MS" pitchFamily="34" charset="-122"/>
                 <a:cs typeface="Trebuchet MS" pitchFamily="34" charset="-120"/>
               </a:rPr>
-              <a:t>empathy</a:t>
+              <a:t>osteopathy</a:t>
             </a:r>
             <a:endParaRPr lang="en-US" sz="2800" dirty="0"/>
           </a:p>
@@ -20131,7 +19843,7 @@
                 <a:ea typeface="Trebuchet MS" pitchFamily="34" charset="-122"/>
                 <a:cs typeface="Trebuchet MS" pitchFamily="34" charset="-120"/>
               </a:rPr>
-              <a:t>empathy</a:t>
+              <a:t>osteopathy</a:t>
             </a:r>
             <a:endParaRPr lang="en-US" sz="2800" dirty="0"/>
           </a:p>
@@ -20270,7 +19982,7 @@
                 <a:ea typeface="Trebuchet MS" pitchFamily="34" charset="-122"/>
                 <a:cs typeface="Trebuchet MS" pitchFamily="34" charset="-120"/>
               </a:rPr>
-              <a:t>em</a:t>
+              <a:t>osteo</a:t>
             </a:r>
             <a:endParaRPr lang="en-US" sz="1300" dirty="0"/>
           </a:p>
@@ -20309,7 +20021,7 @@
                 <a:ea typeface="Calibri" pitchFamily="34" charset="-122"/>
                 <a:cs typeface="Calibri" pitchFamily="34" charset="-120"/>
               </a:rPr>
-              <a:t>in, into</a:t>
+              <a:t>bone</a:t>
             </a:r>
             <a:endParaRPr lang="en-US" sz="850" dirty="0"/>
           </a:p>
@@ -20317,46 +20029,7 @@
       </p:sp>
       <p:sp>
         <p:nvSpPr>
-          <p:cNvPr id="19" name="Text 17"/>
-          <p:cNvSpPr/>
-          <p:nvPr/>
-        </p:nvSpPr>
-        <p:spPr>
-          <a:xfrm>
-            <a:off x="2221992" y="2752344"/>
-            <a:ext cx="1828800" cy="182880"/>
-          </a:xfrm>
-          <a:prstGeom prst="rect">
-            <a:avLst/>
-          </a:prstGeom>
-          <a:noFill/>
-          <a:ln/>
-        </p:spPr>
-        <p:txBody>
-          <a:bodyPr wrap="square" lIns="0" tIns="0" rIns="0" bIns="0" rtlCol="0" anchor="t"/>
-          <a:lstStyle/>
-          <a:p>
-            <a:pPr algn="ctr" indent="0" marL="0">
-              <a:buNone/>
-            </a:pPr>
-            <a:r>
-              <a:rPr lang="en-US" sz="700" i="1" dirty="0">
-                <a:solidFill>
-                  <a:srgbClr val="94A3B8"/>
-                </a:solidFill>
-                <a:latin typeface="Calibri" pitchFamily="34" charset="0"/>
-                <a:ea typeface="Calibri" pitchFamily="34" charset="-122"/>
-                <a:cs typeface="Calibri" pitchFamily="34" charset="-120"/>
-              </a:rPr>
-              <a:t>en → em before 'p'</a:t>
-            </a:r>
-            <a:endParaRPr lang="en-US" sz="700" dirty="0"/>
-          </a:p>
-        </p:txBody>
-      </p:sp>
-      <p:sp>
-        <p:nvSpPr>
-          <p:cNvPr id="20" name="Shape 18"/>
+          <p:cNvPr id="19" name="Shape 17"/>
           <p:cNvSpPr/>
           <p:nvPr/>
         </p:nvSpPr>
@@ -20390,7 +20063,7 @@
       </p:sp>
       <p:sp>
         <p:nvSpPr>
-          <p:cNvPr id="21" name="Text 19"/>
+          <p:cNvPr id="20" name="Text 18"/>
           <p:cNvSpPr/>
           <p:nvPr/>
         </p:nvSpPr>
@@ -20429,7 +20102,7 @@
       </p:sp>
       <p:sp>
         <p:nvSpPr>
-          <p:cNvPr id="22" name="Text 20"/>
+          <p:cNvPr id="21" name="Text 19"/>
           <p:cNvSpPr/>
           <p:nvPr/>
         </p:nvSpPr>
@@ -20460,7 +20133,7 @@
                 <a:ea typeface="Calibri" pitchFamily="34" charset="-122"/>
                 <a:cs typeface="Calibri" pitchFamily="34" charset="-120"/>
               </a:rPr>
-              <a:t>feeling, suffering</a:t>
+              <a:t>disease or treatment</a:t>
             </a:r>
             <a:endParaRPr lang="en-US" sz="850" dirty="0"/>
           </a:p>
@@ -20468,7 +20141,7 @@
       </p:sp>
       <p:sp>
         <p:nvSpPr>
-          <p:cNvPr id="23" name="Shape 21"/>
+          <p:cNvPr id="22" name="Shape 20"/>
           <p:cNvSpPr/>
           <p:nvPr/>
         </p:nvSpPr>
@@ -20502,7 +20175,7 @@
       </p:sp>
       <p:sp>
         <p:nvSpPr>
-          <p:cNvPr id="24" name="Text 22"/>
+          <p:cNvPr id="23" name="Text 21"/>
           <p:cNvSpPr/>
           <p:nvPr/>
         </p:nvSpPr>
@@ -20541,7 +20214,7 @@
       </p:sp>
       <p:sp>
         <p:nvSpPr>
-          <p:cNvPr id="25" name="Text 23"/>
+          <p:cNvPr id="24" name="Text 22"/>
           <p:cNvSpPr/>
           <p:nvPr/>
         </p:nvSpPr>
@@ -20572,7 +20245,7 @@
                 <a:ea typeface="Calibri" pitchFamily="34" charset="-122"/>
                 <a:cs typeface="Calibri" pitchFamily="34" charset="-120"/>
               </a:rPr>
-              <a:t>forms a noun or adjective</a:t>
+              <a:t>state or quality of</a:t>
             </a:r>
             <a:endParaRPr lang="en-US" sz="850" dirty="0"/>
           </a:p>
@@ -20580,7 +20253,7 @@
       </p:sp>
       <p:sp>
         <p:nvSpPr>
-          <p:cNvPr id="26" name="Shape 24"/>
+          <p:cNvPr id="25" name="Shape 23"/>
           <p:cNvSpPr/>
           <p:nvPr/>
         </p:nvSpPr>
@@ -20607,7 +20280,7 @@
       </p:sp>
       <p:sp>
         <p:nvSpPr>
-          <p:cNvPr id="27" name="Text 25"/>
+          <p:cNvPr id="26" name="Text 24"/>
           <p:cNvSpPr/>
           <p:nvPr/>
         </p:nvSpPr>
@@ -20646,7 +20319,7 @@
       </p:sp>
       <p:sp>
         <p:nvSpPr>
-          <p:cNvPr id="28" name="Shape 26"/>
+          <p:cNvPr id="27" name="Shape 25"/>
           <p:cNvSpPr/>
           <p:nvPr/>
         </p:nvSpPr>
@@ -20673,7 +20346,7 @@
       </p:sp>
       <p:sp>
         <p:nvSpPr>
-          <p:cNvPr id="29" name="Text 27"/>
+          <p:cNvPr id="28" name="Text 26"/>
           <p:cNvSpPr/>
           <p:nvPr/>
         </p:nvSpPr>
@@ -20712,7 +20385,7 @@
       </p:sp>
       <p:sp>
         <p:nvSpPr>
-          <p:cNvPr id="30" name="Shape 28"/>
+          <p:cNvPr id="29" name="Shape 27"/>
           <p:cNvSpPr/>
           <p:nvPr/>
         </p:nvSpPr>
@@ -20739,7 +20412,7 @@
       </p:sp>
       <p:sp>
         <p:nvSpPr>
-          <p:cNvPr id="31" name="Text 29"/>
+          <p:cNvPr id="30" name="Text 28"/>
           <p:cNvSpPr/>
           <p:nvPr/>
         </p:nvSpPr>
@@ -20778,7 +20451,7 @@
       </p:sp>
       <p:sp>
         <p:nvSpPr>
-          <p:cNvPr id="32" name="Shape 30"/>
+          <p:cNvPr id="31" name="Shape 29"/>
           <p:cNvSpPr/>
           <p:nvPr/>
         </p:nvSpPr>
@@ -20805,7 +20478,7 @@
       </p:sp>
       <p:sp>
         <p:nvSpPr>
-          <p:cNvPr id="33" name="Text 31"/>
+          <p:cNvPr id="32" name="Text 30"/>
           <p:cNvSpPr/>
           <p:nvPr/>
         </p:nvSpPr>
@@ -21267,7 +20940,7 @@
                 <a:ea typeface="Trebuchet MS" pitchFamily="34" charset="-122"/>
                 <a:cs typeface="Trebuchet MS" pitchFamily="34" charset="-120"/>
               </a:rPr>
-              <a:t>empathy</a:t>
+              <a:t>osteopathy</a:t>
             </a:r>
             <a:endParaRPr lang="en-US" sz="2800" dirty="0"/>
           </a:p>
@@ -21406,7 +21079,7 @@
                 <a:ea typeface="Trebuchet MS" pitchFamily="34" charset="-122"/>
                 <a:cs typeface="Trebuchet MS" pitchFamily="34" charset="-120"/>
               </a:rPr>
-              <a:t>em</a:t>
+              <a:t>osteo</a:t>
             </a:r>
             <a:endParaRPr lang="en-US" sz="1300" dirty="0"/>
           </a:p>
@@ -21445,7 +21118,7 @@
                 <a:ea typeface="Calibri" pitchFamily="34" charset="-122"/>
                 <a:cs typeface="Calibri" pitchFamily="34" charset="-120"/>
               </a:rPr>
-              <a:t>in, into</a:t>
+              <a:t>bone</a:t>
             </a:r>
             <a:endParaRPr lang="en-US" sz="850" dirty="0"/>
           </a:p>
@@ -21453,46 +21126,7 @@
       </p:sp>
       <p:sp>
         <p:nvSpPr>
-          <p:cNvPr id="19" name="Text 17"/>
-          <p:cNvSpPr/>
-          <p:nvPr/>
-        </p:nvSpPr>
-        <p:spPr>
-          <a:xfrm>
-            <a:off x="2221992" y="2752344"/>
-            <a:ext cx="1828800" cy="182880"/>
-          </a:xfrm>
-          <a:prstGeom prst="rect">
-            <a:avLst/>
-          </a:prstGeom>
-          <a:noFill/>
-          <a:ln/>
-        </p:spPr>
-        <p:txBody>
-          <a:bodyPr wrap="square" lIns="0" tIns="0" rIns="0" bIns="0" rtlCol="0" anchor="t"/>
-          <a:lstStyle/>
-          <a:p>
-            <a:pPr algn="ctr" indent="0" marL="0">
-              <a:buNone/>
-            </a:pPr>
-            <a:r>
-              <a:rPr lang="en-US" sz="700" i="1" dirty="0">
-                <a:solidFill>
-                  <a:srgbClr val="94A3B8"/>
-                </a:solidFill>
-                <a:latin typeface="Calibri" pitchFamily="34" charset="0"/>
-                <a:ea typeface="Calibri" pitchFamily="34" charset="-122"/>
-                <a:cs typeface="Calibri" pitchFamily="34" charset="-120"/>
-              </a:rPr>
-              <a:t>en → em before 'p'</a:t>
-            </a:r>
-            <a:endParaRPr lang="en-US" sz="700" dirty="0"/>
-          </a:p>
-        </p:txBody>
-      </p:sp>
-      <p:sp>
-        <p:nvSpPr>
-          <p:cNvPr id="20" name="Shape 18"/>
+          <p:cNvPr id="19" name="Shape 17"/>
           <p:cNvSpPr/>
           <p:nvPr/>
         </p:nvSpPr>
@@ -21526,7 +21160,7 @@
       </p:sp>
       <p:sp>
         <p:nvSpPr>
-          <p:cNvPr id="21" name="Text 19"/>
+          <p:cNvPr id="20" name="Text 18"/>
           <p:cNvSpPr/>
           <p:nvPr/>
         </p:nvSpPr>
@@ -21565,7 +21199,7 @@
       </p:sp>
       <p:sp>
         <p:nvSpPr>
-          <p:cNvPr id="22" name="Text 20"/>
+          <p:cNvPr id="21" name="Text 19"/>
           <p:cNvSpPr/>
           <p:nvPr/>
         </p:nvSpPr>
@@ -21596,7 +21230,7 @@
                 <a:ea typeface="Calibri" pitchFamily="34" charset="-122"/>
                 <a:cs typeface="Calibri" pitchFamily="34" charset="-120"/>
               </a:rPr>
-              <a:t>feeling, suffering</a:t>
+              <a:t>disease or treatment</a:t>
             </a:r>
             <a:endParaRPr lang="en-US" sz="850" dirty="0"/>
           </a:p>
@@ -21604,7 +21238,7 @@
       </p:sp>
       <p:sp>
         <p:nvSpPr>
-          <p:cNvPr id="23" name="Shape 21"/>
+          <p:cNvPr id="22" name="Shape 20"/>
           <p:cNvSpPr/>
           <p:nvPr/>
         </p:nvSpPr>
@@ -21638,7 +21272,7 @@
       </p:sp>
       <p:sp>
         <p:nvSpPr>
-          <p:cNvPr id="24" name="Text 22"/>
+          <p:cNvPr id="23" name="Text 21"/>
           <p:cNvSpPr/>
           <p:nvPr/>
         </p:nvSpPr>
@@ -21677,7 +21311,7 @@
       </p:sp>
       <p:sp>
         <p:nvSpPr>
-          <p:cNvPr id="25" name="Text 23"/>
+          <p:cNvPr id="24" name="Text 22"/>
           <p:cNvSpPr/>
           <p:nvPr/>
         </p:nvSpPr>
@@ -21708,7 +21342,7 @@
                 <a:ea typeface="Calibri" pitchFamily="34" charset="-122"/>
                 <a:cs typeface="Calibri" pitchFamily="34" charset="-120"/>
               </a:rPr>
-              <a:t>forms a noun or adjective</a:t>
+              <a:t>state or quality of</a:t>
             </a:r>
             <a:endParaRPr lang="en-US" sz="850" dirty="0"/>
           </a:p>
@@ -21716,7 +21350,7 @@
       </p:sp>
       <p:sp>
         <p:nvSpPr>
-          <p:cNvPr id="26" name="Shape 24"/>
+          <p:cNvPr id="25" name="Shape 23"/>
           <p:cNvSpPr/>
           <p:nvPr/>
         </p:nvSpPr>
@@ -21743,7 +21377,7 @@
       </p:sp>
       <p:sp>
         <p:nvSpPr>
-          <p:cNvPr id="27" name="Text 25"/>
+          <p:cNvPr id="26" name="Text 24"/>
           <p:cNvSpPr/>
           <p:nvPr/>
         </p:nvSpPr>
@@ -21782,7 +21416,7 @@
       </p:sp>
       <p:sp>
         <p:nvSpPr>
-          <p:cNvPr id="28" name="Shape 26"/>
+          <p:cNvPr id="27" name="Shape 25"/>
           <p:cNvSpPr/>
           <p:nvPr/>
         </p:nvSpPr>
@@ -21809,14 +21443,14 @@
       </p:sp>
       <p:sp>
         <p:nvSpPr>
-          <p:cNvPr id="29" name="Shape 27"/>
-          <p:cNvSpPr/>
-          <p:nvPr/>
-        </p:nvSpPr>
-        <p:spPr>
-          <a:xfrm>
-            <a:off x="2313432" y="3364992"/>
-            <a:ext cx="1645920" cy="475488"/>
+          <p:cNvPr id="28" name="Shape 26"/>
+          <p:cNvSpPr/>
+          <p:nvPr/>
+        </p:nvSpPr>
+        <p:spPr>
+          <a:xfrm>
+            <a:off x="1978152" y="3364992"/>
+            <a:ext cx="1225296" cy="475488"/>
           </a:xfrm>
           <a:prstGeom prst="rect">
             <a:avLst>
@@ -21836,14 +21470,14 @@
       </p:sp>
       <p:sp>
         <p:nvSpPr>
-          <p:cNvPr id="30" name="Text 28"/>
-          <p:cNvSpPr/>
-          <p:nvPr/>
-        </p:nvSpPr>
-        <p:spPr>
-          <a:xfrm>
-            <a:off x="2313432" y="3364992"/>
-            <a:ext cx="1645920" cy="475488"/>
+          <p:cNvPr id="29" name="Text 27"/>
+          <p:cNvSpPr/>
+          <p:nvPr/>
+        </p:nvSpPr>
+        <p:spPr>
+          <a:xfrm>
+            <a:off x="1978152" y="3364992"/>
+            <a:ext cx="1225296" cy="475488"/>
           </a:xfrm>
           <a:prstGeom prst="rect">
             <a:avLst/>
@@ -21867,7 +21501,7 @@
                 <a:ea typeface="Trebuchet MS" pitchFamily="34" charset="-122"/>
                 <a:cs typeface="Trebuchet MS" pitchFamily="34" charset="-120"/>
               </a:rPr>
-              <a:t>em</a:t>
+              <a:t>os</a:t>
             </a:r>
             <a:endParaRPr lang="en-US" sz="1400" dirty="0"/>
           </a:p>
@@ -21875,14 +21509,14 @@
       </p:sp>
       <p:sp>
         <p:nvSpPr>
-          <p:cNvPr id="31" name="Text 29"/>
-          <p:cNvSpPr/>
-          <p:nvPr/>
-        </p:nvSpPr>
-        <p:spPr>
-          <a:xfrm>
-            <a:off x="3959352" y="3364992"/>
-            <a:ext cx="411480" cy="475488"/>
+          <p:cNvPr id="30" name="Text 28"/>
+          <p:cNvSpPr/>
+          <p:nvPr/>
+        </p:nvSpPr>
+        <p:spPr>
+          <a:xfrm>
+            <a:off x="3203448" y="3364992"/>
+            <a:ext cx="76200" cy="475488"/>
           </a:xfrm>
           <a:prstGeom prst="rect">
             <a:avLst/>
@@ -21914,14 +21548,14 @@
       </p:sp>
       <p:sp>
         <p:nvSpPr>
-          <p:cNvPr id="32" name="Shape 30"/>
-          <p:cNvSpPr/>
-          <p:nvPr/>
-        </p:nvSpPr>
-        <p:spPr>
-          <a:xfrm>
-            <a:off x="4370832" y="3364992"/>
-            <a:ext cx="1645920" cy="475488"/>
+          <p:cNvPr id="31" name="Shape 29"/>
+          <p:cNvSpPr/>
+          <p:nvPr/>
+        </p:nvSpPr>
+        <p:spPr>
+          <a:xfrm>
+            <a:off x="3279648" y="3364992"/>
+            <a:ext cx="1225296" cy="475488"/>
           </a:xfrm>
           <a:prstGeom prst="rect">
             <a:avLst>
@@ -21941,14 +21575,14 @@
       </p:sp>
       <p:sp>
         <p:nvSpPr>
-          <p:cNvPr id="33" name="Text 31"/>
-          <p:cNvSpPr/>
-          <p:nvPr/>
-        </p:nvSpPr>
-        <p:spPr>
-          <a:xfrm>
-            <a:off x="4370832" y="3364992"/>
-            <a:ext cx="1645920" cy="475488"/>
+          <p:cNvPr id="32" name="Text 30"/>
+          <p:cNvSpPr/>
+          <p:nvPr/>
+        </p:nvSpPr>
+        <p:spPr>
+          <a:xfrm>
+            <a:off x="3279648" y="3364992"/>
+            <a:ext cx="1225296" cy="475488"/>
           </a:xfrm>
           <a:prstGeom prst="rect">
             <a:avLst/>
@@ -21972,7 +21606,7 @@
                 <a:ea typeface="Trebuchet MS" pitchFamily="34" charset="-122"/>
                 <a:cs typeface="Trebuchet MS" pitchFamily="34" charset="-120"/>
               </a:rPr>
-              <a:t>pa</a:t>
+              <a:t>te</a:t>
             </a:r>
             <a:endParaRPr lang="en-US" sz="1400" dirty="0"/>
           </a:p>
@@ -21980,14 +21614,14 @@
       </p:sp>
       <p:sp>
         <p:nvSpPr>
-          <p:cNvPr id="34" name="Text 32"/>
-          <p:cNvSpPr/>
-          <p:nvPr/>
-        </p:nvSpPr>
-        <p:spPr>
-          <a:xfrm>
-            <a:off x="6016752" y="3364992"/>
-            <a:ext cx="411480" cy="475488"/>
+          <p:cNvPr id="33" name="Text 31"/>
+          <p:cNvSpPr/>
+          <p:nvPr/>
+        </p:nvSpPr>
+        <p:spPr>
+          <a:xfrm>
+            <a:off x="4504944" y="3364992"/>
+            <a:ext cx="76200" cy="475488"/>
           </a:xfrm>
           <a:prstGeom prst="rect">
             <a:avLst/>
@@ -22019,14 +21653,14 @@
       </p:sp>
       <p:sp>
         <p:nvSpPr>
-          <p:cNvPr id="35" name="Shape 33"/>
-          <p:cNvSpPr/>
-          <p:nvPr/>
-        </p:nvSpPr>
-        <p:spPr>
-          <a:xfrm>
-            <a:off x="6428232" y="3364992"/>
-            <a:ext cx="1645920" cy="475488"/>
+          <p:cNvPr id="34" name="Shape 32"/>
+          <p:cNvSpPr/>
+          <p:nvPr/>
+        </p:nvSpPr>
+        <p:spPr>
+          <a:xfrm>
+            <a:off x="4581144" y="3364992"/>
+            <a:ext cx="1225296" cy="475488"/>
           </a:xfrm>
           <a:prstGeom prst="rect">
             <a:avLst>
@@ -22046,14 +21680,14 @@
       </p:sp>
       <p:sp>
         <p:nvSpPr>
-          <p:cNvPr id="36" name="Text 34"/>
-          <p:cNvSpPr/>
-          <p:nvPr/>
-        </p:nvSpPr>
-        <p:spPr>
-          <a:xfrm>
-            <a:off x="6428232" y="3364992"/>
-            <a:ext cx="1645920" cy="475488"/>
+          <p:cNvPr id="35" name="Text 33"/>
+          <p:cNvSpPr/>
+          <p:nvPr/>
+        </p:nvSpPr>
+        <p:spPr>
+          <a:xfrm>
+            <a:off x="4581144" y="3364992"/>
+            <a:ext cx="1225296" cy="475488"/>
           </a:xfrm>
           <a:prstGeom prst="rect">
             <a:avLst/>
@@ -22077,6 +21711,216 @@
                 <a:ea typeface="Trebuchet MS" pitchFamily="34" charset="-122"/>
                 <a:cs typeface="Trebuchet MS" pitchFamily="34" charset="-120"/>
               </a:rPr>
+              <a:t>o</a:t>
+            </a:r>
+            <a:endParaRPr lang="en-US" sz="1400" dirty="0"/>
+          </a:p>
+        </p:txBody>
+      </p:sp>
+      <p:sp>
+        <p:nvSpPr>
+          <p:cNvPr id="36" name="Text 34"/>
+          <p:cNvSpPr/>
+          <p:nvPr/>
+        </p:nvSpPr>
+        <p:spPr>
+          <a:xfrm>
+            <a:off x="5806440" y="3364992"/>
+            <a:ext cx="76200" cy="475488"/>
+          </a:xfrm>
+          <a:prstGeom prst="rect">
+            <a:avLst/>
+          </a:prstGeom>
+          <a:noFill/>
+          <a:ln/>
+        </p:spPr>
+        <p:txBody>
+          <a:bodyPr wrap="square" lIns="0" tIns="0" rIns="0" bIns="0" rtlCol="0" anchor="ctr"/>
+          <a:lstStyle/>
+          <a:p>
+            <a:pPr algn="ctr" indent="0" marL="0">
+              <a:buNone/>
+            </a:pPr>
+            <a:r>
+              <a:rPr lang="en-US" sz="1600" b="1" dirty="0">
+                <a:solidFill>
+                  <a:srgbClr val="0D9488"/>
+                </a:solidFill>
+                <a:latin typeface="Trebuchet MS" pitchFamily="34" charset="0"/>
+                <a:ea typeface="Trebuchet MS" pitchFamily="34" charset="-122"/>
+                <a:cs typeface="Trebuchet MS" pitchFamily="34" charset="-120"/>
+              </a:rPr>
+              <a:t>·</a:t>
+            </a:r>
+            <a:endParaRPr lang="en-US" sz="1600" dirty="0"/>
+          </a:p>
+        </p:txBody>
+      </p:sp>
+      <p:sp>
+        <p:nvSpPr>
+          <p:cNvPr id="37" name="Shape 35"/>
+          <p:cNvSpPr/>
+          <p:nvPr/>
+        </p:nvSpPr>
+        <p:spPr>
+          <a:xfrm>
+            <a:off x="5882640" y="3364992"/>
+            <a:ext cx="1225296" cy="475488"/>
+          </a:xfrm>
+          <a:prstGeom prst="rect">
+            <a:avLst>
+              <a:gd name="adj" fmla="val 9615"/>
+            </a:avLst>
+          </a:prstGeom>
+          <a:solidFill>
+            <a:srgbClr val="FFFFFF"/>
+          </a:solidFill>
+          <a:ln w="12700">
+            <a:solidFill>
+              <a:srgbClr val="0D9488"/>
+            </a:solidFill>
+            <a:prstDash val="solid"/>
+          </a:ln>
+        </p:spPr>
+      </p:sp>
+      <p:sp>
+        <p:nvSpPr>
+          <p:cNvPr id="38" name="Text 36"/>
+          <p:cNvSpPr/>
+          <p:nvPr/>
+        </p:nvSpPr>
+        <p:spPr>
+          <a:xfrm>
+            <a:off x="5882640" y="3364992"/>
+            <a:ext cx="1225296" cy="475488"/>
+          </a:xfrm>
+          <a:prstGeom prst="rect">
+            <a:avLst/>
+          </a:prstGeom>
+          <a:noFill/>
+          <a:ln/>
+        </p:spPr>
+        <p:txBody>
+          <a:bodyPr wrap="square" lIns="0" tIns="0" rIns="0" bIns="0" rtlCol="0" anchor="ctr"/>
+          <a:lstStyle/>
+          <a:p>
+            <a:pPr algn="ctr" indent="0" marL="0">
+              <a:buNone/>
+            </a:pPr>
+            <a:r>
+              <a:rPr lang="en-US" sz="1400" b="1" dirty="0">
+                <a:solidFill>
+                  <a:srgbClr val="0D9488"/>
+                </a:solidFill>
+                <a:latin typeface="Trebuchet MS" pitchFamily="34" charset="0"/>
+                <a:ea typeface="Trebuchet MS" pitchFamily="34" charset="-122"/>
+                <a:cs typeface="Trebuchet MS" pitchFamily="34" charset="-120"/>
+              </a:rPr>
+              <a:t>pa</a:t>
+            </a:r>
+            <a:endParaRPr lang="en-US" sz="1400" dirty="0"/>
+          </a:p>
+        </p:txBody>
+      </p:sp>
+      <p:sp>
+        <p:nvSpPr>
+          <p:cNvPr id="39" name="Text 37"/>
+          <p:cNvSpPr/>
+          <p:nvPr/>
+        </p:nvSpPr>
+        <p:spPr>
+          <a:xfrm>
+            <a:off x="7107936" y="3364992"/>
+            <a:ext cx="76200" cy="475488"/>
+          </a:xfrm>
+          <a:prstGeom prst="rect">
+            <a:avLst/>
+          </a:prstGeom>
+          <a:noFill/>
+          <a:ln/>
+        </p:spPr>
+        <p:txBody>
+          <a:bodyPr wrap="square" lIns="0" tIns="0" rIns="0" bIns="0" rtlCol="0" anchor="ctr"/>
+          <a:lstStyle/>
+          <a:p>
+            <a:pPr algn="ctr" indent="0" marL="0">
+              <a:buNone/>
+            </a:pPr>
+            <a:r>
+              <a:rPr lang="en-US" sz="1600" b="1" dirty="0">
+                <a:solidFill>
+                  <a:srgbClr val="0D9488"/>
+                </a:solidFill>
+                <a:latin typeface="Trebuchet MS" pitchFamily="34" charset="0"/>
+                <a:ea typeface="Trebuchet MS" pitchFamily="34" charset="-122"/>
+                <a:cs typeface="Trebuchet MS" pitchFamily="34" charset="-120"/>
+              </a:rPr>
+              <a:t>·</a:t>
+            </a:r>
+            <a:endParaRPr lang="en-US" sz="1600" dirty="0"/>
+          </a:p>
+        </p:txBody>
+      </p:sp>
+      <p:sp>
+        <p:nvSpPr>
+          <p:cNvPr id="40" name="Shape 38"/>
+          <p:cNvSpPr/>
+          <p:nvPr/>
+        </p:nvSpPr>
+        <p:spPr>
+          <a:xfrm>
+            <a:off x="7184136" y="3364992"/>
+            <a:ext cx="1225296" cy="475488"/>
+          </a:xfrm>
+          <a:prstGeom prst="rect">
+            <a:avLst>
+              <a:gd name="adj" fmla="val 9615"/>
+            </a:avLst>
+          </a:prstGeom>
+          <a:solidFill>
+            <a:srgbClr val="FFFFFF"/>
+          </a:solidFill>
+          <a:ln w="12700">
+            <a:solidFill>
+              <a:srgbClr val="0D9488"/>
+            </a:solidFill>
+            <a:prstDash val="solid"/>
+          </a:ln>
+        </p:spPr>
+      </p:sp>
+      <p:sp>
+        <p:nvSpPr>
+          <p:cNvPr id="41" name="Text 39"/>
+          <p:cNvSpPr/>
+          <p:nvPr/>
+        </p:nvSpPr>
+        <p:spPr>
+          <a:xfrm>
+            <a:off x="7184136" y="3364992"/>
+            <a:ext cx="1225296" cy="475488"/>
+          </a:xfrm>
+          <a:prstGeom prst="rect">
+            <a:avLst/>
+          </a:prstGeom>
+          <a:noFill/>
+          <a:ln/>
+        </p:spPr>
+        <p:txBody>
+          <a:bodyPr wrap="square" lIns="0" tIns="0" rIns="0" bIns="0" rtlCol="0" anchor="ctr"/>
+          <a:lstStyle/>
+          <a:p>
+            <a:pPr algn="ctr" indent="0" marL="0">
+              <a:buNone/>
+            </a:pPr>
+            <a:r>
+              <a:rPr lang="en-US" sz="1400" b="1" dirty="0">
+                <a:solidFill>
+                  <a:srgbClr val="0D9488"/>
+                </a:solidFill>
+                <a:latin typeface="Trebuchet MS" pitchFamily="34" charset="0"/>
+                <a:ea typeface="Trebuchet MS" pitchFamily="34" charset="-122"/>
+                <a:cs typeface="Trebuchet MS" pitchFamily="34" charset="-120"/>
+              </a:rPr>
               <a:t>thy</a:t>
             </a:r>
             <a:endParaRPr lang="en-US" sz="1400" dirty="0"/>
@@ -22085,7 +21929,7 @@
       </p:sp>
       <p:sp>
         <p:nvSpPr>
-          <p:cNvPr id="37" name="Shape 35"/>
+          <p:cNvPr id="42" name="Shape 40"/>
           <p:cNvSpPr/>
           <p:nvPr/>
         </p:nvSpPr>
@@ -22112,7 +21956,7 @@
       </p:sp>
       <p:sp>
         <p:nvSpPr>
-          <p:cNvPr id="38" name="Text 36"/>
+          <p:cNvPr id="43" name="Text 41"/>
           <p:cNvSpPr/>
           <p:nvPr/>
         </p:nvSpPr>
@@ -22151,7 +21995,7 @@
       </p:sp>
       <p:sp>
         <p:nvSpPr>
-          <p:cNvPr id="39" name="Shape 37"/>
+          <p:cNvPr id="44" name="Shape 42"/>
           <p:cNvSpPr/>
           <p:nvPr/>
         </p:nvSpPr>
@@ -22178,7 +22022,7 @@
       </p:sp>
       <p:sp>
         <p:nvSpPr>
-          <p:cNvPr id="40" name="Text 38"/>
+          <p:cNvPr id="45" name="Text 43"/>
           <p:cNvSpPr/>
           <p:nvPr/>
         </p:nvSpPr>
@@ -22640,7 +22484,7 @@
                 <a:ea typeface="Trebuchet MS" pitchFamily="34" charset="-122"/>
                 <a:cs typeface="Trebuchet MS" pitchFamily="34" charset="-120"/>
               </a:rPr>
-              <a:t>empathy</a:t>
+              <a:t>osteopathy</a:t>
             </a:r>
             <a:endParaRPr lang="en-US" sz="2800" dirty="0"/>
           </a:p>
@@ -22779,7 +22623,7 @@
                 <a:ea typeface="Trebuchet MS" pitchFamily="34" charset="-122"/>
                 <a:cs typeface="Trebuchet MS" pitchFamily="34" charset="-120"/>
               </a:rPr>
-              <a:t>em</a:t>
+              <a:t>osteo</a:t>
             </a:r>
             <a:endParaRPr lang="en-US" sz="1300" dirty="0"/>
           </a:p>
@@ -22818,7 +22662,7 @@
                 <a:ea typeface="Calibri" pitchFamily="34" charset="-122"/>
                 <a:cs typeface="Calibri" pitchFamily="34" charset="-120"/>
               </a:rPr>
-              <a:t>in, into</a:t>
+              <a:t>bone</a:t>
             </a:r>
             <a:endParaRPr lang="en-US" sz="850" dirty="0"/>
           </a:p>
@@ -22826,46 +22670,7 @@
       </p:sp>
       <p:sp>
         <p:nvSpPr>
-          <p:cNvPr id="19" name="Text 17"/>
-          <p:cNvSpPr/>
-          <p:nvPr/>
-        </p:nvSpPr>
-        <p:spPr>
-          <a:xfrm>
-            <a:off x="2221992" y="2752344"/>
-            <a:ext cx="1828800" cy="182880"/>
-          </a:xfrm>
-          <a:prstGeom prst="rect">
-            <a:avLst/>
-          </a:prstGeom>
-          <a:noFill/>
-          <a:ln/>
-        </p:spPr>
-        <p:txBody>
-          <a:bodyPr wrap="square" lIns="0" tIns="0" rIns="0" bIns="0" rtlCol="0" anchor="t"/>
-          <a:lstStyle/>
-          <a:p>
-            <a:pPr algn="ctr" indent="0" marL="0">
-              <a:buNone/>
-            </a:pPr>
-            <a:r>
-              <a:rPr lang="en-US" sz="700" i="1" dirty="0">
-                <a:solidFill>
-                  <a:srgbClr val="94A3B8"/>
-                </a:solidFill>
-                <a:latin typeface="Calibri" pitchFamily="34" charset="0"/>
-                <a:ea typeface="Calibri" pitchFamily="34" charset="-122"/>
-                <a:cs typeface="Calibri" pitchFamily="34" charset="-120"/>
-              </a:rPr>
-              <a:t>en → em before 'p'</a:t>
-            </a:r>
-            <a:endParaRPr lang="en-US" sz="700" dirty="0"/>
-          </a:p>
-        </p:txBody>
-      </p:sp>
-      <p:sp>
-        <p:nvSpPr>
-          <p:cNvPr id="20" name="Shape 18"/>
+          <p:cNvPr id="19" name="Shape 17"/>
           <p:cNvSpPr/>
           <p:nvPr/>
         </p:nvSpPr>
@@ -22899,7 +22704,7 @@
       </p:sp>
       <p:sp>
         <p:nvSpPr>
-          <p:cNvPr id="21" name="Text 19"/>
+          <p:cNvPr id="20" name="Text 18"/>
           <p:cNvSpPr/>
           <p:nvPr/>
         </p:nvSpPr>
@@ -22938,7 +22743,7 @@
       </p:sp>
       <p:sp>
         <p:nvSpPr>
-          <p:cNvPr id="22" name="Text 20"/>
+          <p:cNvPr id="21" name="Text 19"/>
           <p:cNvSpPr/>
           <p:nvPr/>
         </p:nvSpPr>
@@ -22969,7 +22774,7 @@
                 <a:ea typeface="Calibri" pitchFamily="34" charset="-122"/>
                 <a:cs typeface="Calibri" pitchFamily="34" charset="-120"/>
               </a:rPr>
-              <a:t>feeling, suffering</a:t>
+              <a:t>disease or treatment</a:t>
             </a:r>
             <a:endParaRPr lang="en-US" sz="850" dirty="0"/>
           </a:p>
@@ -22977,7 +22782,7 @@
       </p:sp>
       <p:sp>
         <p:nvSpPr>
-          <p:cNvPr id="23" name="Shape 21"/>
+          <p:cNvPr id="22" name="Shape 20"/>
           <p:cNvSpPr/>
           <p:nvPr/>
         </p:nvSpPr>
@@ -23011,7 +22816,7 @@
       </p:sp>
       <p:sp>
         <p:nvSpPr>
-          <p:cNvPr id="24" name="Text 22"/>
+          <p:cNvPr id="23" name="Text 21"/>
           <p:cNvSpPr/>
           <p:nvPr/>
         </p:nvSpPr>
@@ -23050,7 +22855,7 @@
       </p:sp>
       <p:sp>
         <p:nvSpPr>
-          <p:cNvPr id="25" name="Text 23"/>
+          <p:cNvPr id="24" name="Text 22"/>
           <p:cNvSpPr/>
           <p:nvPr/>
         </p:nvSpPr>
@@ -23081,7 +22886,7 @@
                 <a:ea typeface="Calibri" pitchFamily="34" charset="-122"/>
                 <a:cs typeface="Calibri" pitchFamily="34" charset="-120"/>
               </a:rPr>
-              <a:t>forms a noun or adjective</a:t>
+              <a:t>state or quality of</a:t>
             </a:r>
             <a:endParaRPr lang="en-US" sz="850" dirty="0"/>
           </a:p>
@@ -23089,7 +22894,7 @@
       </p:sp>
       <p:sp>
         <p:nvSpPr>
-          <p:cNvPr id="26" name="Shape 24"/>
+          <p:cNvPr id="25" name="Shape 23"/>
           <p:cNvSpPr/>
           <p:nvPr/>
         </p:nvSpPr>
@@ -23116,7 +22921,7 @@
       </p:sp>
       <p:sp>
         <p:nvSpPr>
-          <p:cNvPr id="27" name="Text 25"/>
+          <p:cNvPr id="26" name="Text 24"/>
           <p:cNvSpPr/>
           <p:nvPr/>
         </p:nvSpPr>
@@ -23155,7 +22960,7 @@
       </p:sp>
       <p:sp>
         <p:nvSpPr>
-          <p:cNvPr id="28" name="Shape 26"/>
+          <p:cNvPr id="27" name="Shape 25"/>
           <p:cNvSpPr/>
           <p:nvPr/>
         </p:nvSpPr>
@@ -23182,14 +22987,14 @@
       </p:sp>
       <p:sp>
         <p:nvSpPr>
-          <p:cNvPr id="29" name="Shape 27"/>
-          <p:cNvSpPr/>
-          <p:nvPr/>
-        </p:nvSpPr>
-        <p:spPr>
-          <a:xfrm>
-            <a:off x="2313432" y="3364992"/>
-            <a:ext cx="1645920" cy="475488"/>
+          <p:cNvPr id="28" name="Shape 26"/>
+          <p:cNvSpPr/>
+          <p:nvPr/>
+        </p:nvSpPr>
+        <p:spPr>
+          <a:xfrm>
+            <a:off x="1978152" y="3364992"/>
+            <a:ext cx="1225296" cy="475488"/>
           </a:xfrm>
           <a:prstGeom prst="rect">
             <a:avLst>
@@ -23209,14 +23014,14 @@
       </p:sp>
       <p:sp>
         <p:nvSpPr>
-          <p:cNvPr id="30" name="Text 28"/>
-          <p:cNvSpPr/>
-          <p:nvPr/>
-        </p:nvSpPr>
-        <p:spPr>
-          <a:xfrm>
-            <a:off x="2313432" y="3364992"/>
-            <a:ext cx="1645920" cy="475488"/>
+          <p:cNvPr id="29" name="Text 27"/>
+          <p:cNvSpPr/>
+          <p:nvPr/>
+        </p:nvSpPr>
+        <p:spPr>
+          <a:xfrm>
+            <a:off x="1978152" y="3364992"/>
+            <a:ext cx="1225296" cy="475488"/>
           </a:xfrm>
           <a:prstGeom prst="rect">
             <a:avLst/>
@@ -23240,7 +23045,7 @@
                 <a:ea typeface="Trebuchet MS" pitchFamily="34" charset="-122"/>
                 <a:cs typeface="Trebuchet MS" pitchFamily="34" charset="-120"/>
               </a:rPr>
-              <a:t>em</a:t>
+              <a:t>os</a:t>
             </a:r>
             <a:endParaRPr lang="en-US" sz="1400" dirty="0"/>
           </a:p>
@@ -23248,14 +23053,14 @@
       </p:sp>
       <p:sp>
         <p:nvSpPr>
-          <p:cNvPr id="31" name="Text 29"/>
-          <p:cNvSpPr/>
-          <p:nvPr/>
-        </p:nvSpPr>
-        <p:spPr>
-          <a:xfrm>
-            <a:off x="3959352" y="3364992"/>
-            <a:ext cx="411480" cy="475488"/>
+          <p:cNvPr id="30" name="Text 28"/>
+          <p:cNvSpPr/>
+          <p:nvPr/>
+        </p:nvSpPr>
+        <p:spPr>
+          <a:xfrm>
+            <a:off x="3203448" y="3364992"/>
+            <a:ext cx="76200" cy="475488"/>
           </a:xfrm>
           <a:prstGeom prst="rect">
             <a:avLst/>
@@ -23287,14 +23092,14 @@
       </p:sp>
       <p:sp>
         <p:nvSpPr>
-          <p:cNvPr id="32" name="Shape 30"/>
-          <p:cNvSpPr/>
-          <p:nvPr/>
-        </p:nvSpPr>
-        <p:spPr>
-          <a:xfrm>
-            <a:off x="4370832" y="3364992"/>
-            <a:ext cx="1645920" cy="475488"/>
+          <p:cNvPr id="31" name="Shape 29"/>
+          <p:cNvSpPr/>
+          <p:nvPr/>
+        </p:nvSpPr>
+        <p:spPr>
+          <a:xfrm>
+            <a:off x="3279648" y="3364992"/>
+            <a:ext cx="1225296" cy="475488"/>
           </a:xfrm>
           <a:prstGeom prst="rect">
             <a:avLst>
@@ -23314,14 +23119,14 @@
       </p:sp>
       <p:sp>
         <p:nvSpPr>
-          <p:cNvPr id="33" name="Text 31"/>
-          <p:cNvSpPr/>
-          <p:nvPr/>
-        </p:nvSpPr>
-        <p:spPr>
-          <a:xfrm>
-            <a:off x="4370832" y="3364992"/>
-            <a:ext cx="1645920" cy="475488"/>
+          <p:cNvPr id="32" name="Text 30"/>
+          <p:cNvSpPr/>
+          <p:nvPr/>
+        </p:nvSpPr>
+        <p:spPr>
+          <a:xfrm>
+            <a:off x="3279648" y="3364992"/>
+            <a:ext cx="1225296" cy="475488"/>
           </a:xfrm>
           <a:prstGeom prst="rect">
             <a:avLst/>
@@ -23345,7 +23150,7 @@
                 <a:ea typeface="Trebuchet MS" pitchFamily="34" charset="-122"/>
                 <a:cs typeface="Trebuchet MS" pitchFamily="34" charset="-120"/>
               </a:rPr>
-              <a:t>pa</a:t>
+              <a:t>te</a:t>
             </a:r>
             <a:endParaRPr lang="en-US" sz="1400" dirty="0"/>
           </a:p>
@@ -23353,14 +23158,14 @@
       </p:sp>
       <p:sp>
         <p:nvSpPr>
-          <p:cNvPr id="34" name="Text 32"/>
-          <p:cNvSpPr/>
-          <p:nvPr/>
-        </p:nvSpPr>
-        <p:spPr>
-          <a:xfrm>
-            <a:off x="6016752" y="3364992"/>
-            <a:ext cx="411480" cy="475488"/>
+          <p:cNvPr id="33" name="Text 31"/>
+          <p:cNvSpPr/>
+          <p:nvPr/>
+        </p:nvSpPr>
+        <p:spPr>
+          <a:xfrm>
+            <a:off x="4504944" y="3364992"/>
+            <a:ext cx="76200" cy="475488"/>
           </a:xfrm>
           <a:prstGeom prst="rect">
             <a:avLst/>
@@ -23392,14 +23197,14 @@
       </p:sp>
       <p:sp>
         <p:nvSpPr>
-          <p:cNvPr id="35" name="Shape 33"/>
-          <p:cNvSpPr/>
-          <p:nvPr/>
-        </p:nvSpPr>
-        <p:spPr>
-          <a:xfrm>
-            <a:off x="6428232" y="3364992"/>
-            <a:ext cx="1645920" cy="475488"/>
+          <p:cNvPr id="34" name="Shape 32"/>
+          <p:cNvSpPr/>
+          <p:nvPr/>
+        </p:nvSpPr>
+        <p:spPr>
+          <a:xfrm>
+            <a:off x="4581144" y="3364992"/>
+            <a:ext cx="1225296" cy="475488"/>
           </a:xfrm>
           <a:prstGeom prst="rect">
             <a:avLst>
@@ -23419,14 +23224,14 @@
       </p:sp>
       <p:sp>
         <p:nvSpPr>
-          <p:cNvPr id="36" name="Text 34"/>
-          <p:cNvSpPr/>
-          <p:nvPr/>
-        </p:nvSpPr>
-        <p:spPr>
-          <a:xfrm>
-            <a:off x="6428232" y="3364992"/>
-            <a:ext cx="1645920" cy="475488"/>
+          <p:cNvPr id="35" name="Text 33"/>
+          <p:cNvSpPr/>
+          <p:nvPr/>
+        </p:nvSpPr>
+        <p:spPr>
+          <a:xfrm>
+            <a:off x="4581144" y="3364992"/>
+            <a:ext cx="1225296" cy="475488"/>
           </a:xfrm>
           <a:prstGeom prst="rect">
             <a:avLst/>
@@ -23450,6 +23255,216 @@
                 <a:ea typeface="Trebuchet MS" pitchFamily="34" charset="-122"/>
                 <a:cs typeface="Trebuchet MS" pitchFamily="34" charset="-120"/>
               </a:rPr>
+              <a:t>o</a:t>
+            </a:r>
+            <a:endParaRPr lang="en-US" sz="1400" dirty="0"/>
+          </a:p>
+        </p:txBody>
+      </p:sp>
+      <p:sp>
+        <p:nvSpPr>
+          <p:cNvPr id="36" name="Text 34"/>
+          <p:cNvSpPr/>
+          <p:nvPr/>
+        </p:nvSpPr>
+        <p:spPr>
+          <a:xfrm>
+            <a:off x="5806440" y="3364992"/>
+            <a:ext cx="76200" cy="475488"/>
+          </a:xfrm>
+          <a:prstGeom prst="rect">
+            <a:avLst/>
+          </a:prstGeom>
+          <a:noFill/>
+          <a:ln/>
+        </p:spPr>
+        <p:txBody>
+          <a:bodyPr wrap="square" lIns="0" tIns="0" rIns="0" bIns="0" rtlCol="0" anchor="ctr"/>
+          <a:lstStyle/>
+          <a:p>
+            <a:pPr algn="ctr" indent="0" marL="0">
+              <a:buNone/>
+            </a:pPr>
+            <a:r>
+              <a:rPr lang="en-US" sz="1600" b="1" dirty="0">
+                <a:solidFill>
+                  <a:srgbClr val="0D9488"/>
+                </a:solidFill>
+                <a:latin typeface="Trebuchet MS" pitchFamily="34" charset="0"/>
+                <a:ea typeface="Trebuchet MS" pitchFamily="34" charset="-122"/>
+                <a:cs typeface="Trebuchet MS" pitchFamily="34" charset="-120"/>
+              </a:rPr>
+              <a:t>·</a:t>
+            </a:r>
+            <a:endParaRPr lang="en-US" sz="1600" dirty="0"/>
+          </a:p>
+        </p:txBody>
+      </p:sp>
+      <p:sp>
+        <p:nvSpPr>
+          <p:cNvPr id="37" name="Shape 35"/>
+          <p:cNvSpPr/>
+          <p:nvPr/>
+        </p:nvSpPr>
+        <p:spPr>
+          <a:xfrm>
+            <a:off x="5882640" y="3364992"/>
+            <a:ext cx="1225296" cy="475488"/>
+          </a:xfrm>
+          <a:prstGeom prst="rect">
+            <a:avLst>
+              <a:gd name="adj" fmla="val 9615"/>
+            </a:avLst>
+          </a:prstGeom>
+          <a:solidFill>
+            <a:srgbClr val="FFFFFF"/>
+          </a:solidFill>
+          <a:ln w="12700">
+            <a:solidFill>
+              <a:srgbClr val="0D9488"/>
+            </a:solidFill>
+            <a:prstDash val="solid"/>
+          </a:ln>
+        </p:spPr>
+      </p:sp>
+      <p:sp>
+        <p:nvSpPr>
+          <p:cNvPr id="38" name="Text 36"/>
+          <p:cNvSpPr/>
+          <p:nvPr/>
+        </p:nvSpPr>
+        <p:spPr>
+          <a:xfrm>
+            <a:off x="5882640" y="3364992"/>
+            <a:ext cx="1225296" cy="475488"/>
+          </a:xfrm>
+          <a:prstGeom prst="rect">
+            <a:avLst/>
+          </a:prstGeom>
+          <a:noFill/>
+          <a:ln/>
+        </p:spPr>
+        <p:txBody>
+          <a:bodyPr wrap="square" lIns="0" tIns="0" rIns="0" bIns="0" rtlCol="0" anchor="ctr"/>
+          <a:lstStyle/>
+          <a:p>
+            <a:pPr algn="ctr" indent="0" marL="0">
+              <a:buNone/>
+            </a:pPr>
+            <a:r>
+              <a:rPr lang="en-US" sz="1400" b="1" dirty="0">
+                <a:solidFill>
+                  <a:srgbClr val="0D9488"/>
+                </a:solidFill>
+                <a:latin typeface="Trebuchet MS" pitchFamily="34" charset="0"/>
+                <a:ea typeface="Trebuchet MS" pitchFamily="34" charset="-122"/>
+                <a:cs typeface="Trebuchet MS" pitchFamily="34" charset="-120"/>
+              </a:rPr>
+              <a:t>pa</a:t>
+            </a:r>
+            <a:endParaRPr lang="en-US" sz="1400" dirty="0"/>
+          </a:p>
+        </p:txBody>
+      </p:sp>
+      <p:sp>
+        <p:nvSpPr>
+          <p:cNvPr id="39" name="Text 37"/>
+          <p:cNvSpPr/>
+          <p:nvPr/>
+        </p:nvSpPr>
+        <p:spPr>
+          <a:xfrm>
+            <a:off x="7107936" y="3364992"/>
+            <a:ext cx="76200" cy="475488"/>
+          </a:xfrm>
+          <a:prstGeom prst="rect">
+            <a:avLst/>
+          </a:prstGeom>
+          <a:noFill/>
+          <a:ln/>
+        </p:spPr>
+        <p:txBody>
+          <a:bodyPr wrap="square" lIns="0" tIns="0" rIns="0" bIns="0" rtlCol="0" anchor="ctr"/>
+          <a:lstStyle/>
+          <a:p>
+            <a:pPr algn="ctr" indent="0" marL="0">
+              <a:buNone/>
+            </a:pPr>
+            <a:r>
+              <a:rPr lang="en-US" sz="1600" b="1" dirty="0">
+                <a:solidFill>
+                  <a:srgbClr val="0D9488"/>
+                </a:solidFill>
+                <a:latin typeface="Trebuchet MS" pitchFamily="34" charset="0"/>
+                <a:ea typeface="Trebuchet MS" pitchFamily="34" charset="-122"/>
+                <a:cs typeface="Trebuchet MS" pitchFamily="34" charset="-120"/>
+              </a:rPr>
+              <a:t>·</a:t>
+            </a:r>
+            <a:endParaRPr lang="en-US" sz="1600" dirty="0"/>
+          </a:p>
+        </p:txBody>
+      </p:sp>
+      <p:sp>
+        <p:nvSpPr>
+          <p:cNvPr id="40" name="Shape 38"/>
+          <p:cNvSpPr/>
+          <p:nvPr/>
+        </p:nvSpPr>
+        <p:spPr>
+          <a:xfrm>
+            <a:off x="7184136" y="3364992"/>
+            <a:ext cx="1225296" cy="475488"/>
+          </a:xfrm>
+          <a:prstGeom prst="rect">
+            <a:avLst>
+              <a:gd name="adj" fmla="val 9615"/>
+            </a:avLst>
+          </a:prstGeom>
+          <a:solidFill>
+            <a:srgbClr val="FFFFFF"/>
+          </a:solidFill>
+          <a:ln w="12700">
+            <a:solidFill>
+              <a:srgbClr val="0D9488"/>
+            </a:solidFill>
+            <a:prstDash val="solid"/>
+          </a:ln>
+        </p:spPr>
+      </p:sp>
+      <p:sp>
+        <p:nvSpPr>
+          <p:cNvPr id="41" name="Text 39"/>
+          <p:cNvSpPr/>
+          <p:nvPr/>
+        </p:nvSpPr>
+        <p:spPr>
+          <a:xfrm>
+            <a:off x="7184136" y="3364992"/>
+            <a:ext cx="1225296" cy="475488"/>
+          </a:xfrm>
+          <a:prstGeom prst="rect">
+            <a:avLst/>
+          </a:prstGeom>
+          <a:noFill/>
+          <a:ln/>
+        </p:spPr>
+        <p:txBody>
+          <a:bodyPr wrap="square" lIns="0" tIns="0" rIns="0" bIns="0" rtlCol="0" anchor="ctr"/>
+          <a:lstStyle/>
+          <a:p>
+            <a:pPr algn="ctr" indent="0" marL="0">
+              <a:buNone/>
+            </a:pPr>
+            <a:r>
+              <a:rPr lang="en-US" sz="1400" b="1" dirty="0">
+                <a:solidFill>
+                  <a:srgbClr val="0D9488"/>
+                </a:solidFill>
+                <a:latin typeface="Trebuchet MS" pitchFamily="34" charset="0"/>
+                <a:ea typeface="Trebuchet MS" pitchFamily="34" charset="-122"/>
+                <a:cs typeface="Trebuchet MS" pitchFamily="34" charset="-120"/>
+              </a:rPr>
               <a:t>thy</a:t>
             </a:r>
             <a:endParaRPr lang="en-US" sz="1400" dirty="0"/>
@@ -23458,7 +23473,7 @@
       </p:sp>
       <p:sp>
         <p:nvSpPr>
-          <p:cNvPr id="37" name="Shape 35"/>
+          <p:cNvPr id="42" name="Shape 40"/>
           <p:cNvSpPr/>
           <p:nvPr/>
         </p:nvSpPr>
@@ -23485,7 +23500,7 @@
       </p:sp>
       <p:sp>
         <p:nvSpPr>
-          <p:cNvPr id="38" name="Text 36"/>
+          <p:cNvPr id="43" name="Text 41"/>
           <p:cNvSpPr/>
           <p:nvPr/>
         </p:nvSpPr>
@@ -23524,7 +23539,7 @@
       </p:sp>
       <p:sp>
         <p:nvSpPr>
-          <p:cNvPr id="39" name="Shape 37"/>
+          <p:cNvPr id="44" name="Shape 42"/>
           <p:cNvSpPr/>
           <p:nvPr/>
         </p:nvSpPr>
@@ -23551,14 +23566,14 @@
       </p:sp>
       <p:sp>
         <p:nvSpPr>
-          <p:cNvPr id="40" name="Shape 38"/>
-          <p:cNvSpPr/>
-          <p:nvPr/>
-        </p:nvSpPr>
-        <p:spPr>
-          <a:xfrm>
-            <a:off x="2254649" y="4169664"/>
-            <a:ext cx="685800" cy="384048"/>
+          <p:cNvPr id="45" name="Shape 43"/>
+          <p:cNvSpPr/>
+          <p:nvPr/>
+        </p:nvSpPr>
+        <p:spPr>
+          <a:xfrm>
+            <a:off x="1951330" y="4169664"/>
+            <a:ext cx="676656" cy="384048"/>
           </a:xfrm>
           <a:prstGeom prst="rect">
             <a:avLst>
@@ -23578,14 +23593,14 @@
       </p:sp>
       <p:sp>
         <p:nvSpPr>
-          <p:cNvPr id="41" name="Text 39"/>
-          <p:cNvSpPr/>
-          <p:nvPr/>
-        </p:nvSpPr>
-        <p:spPr>
-          <a:xfrm>
-            <a:off x="2254649" y="4169664"/>
-            <a:ext cx="685800" cy="384048"/>
+          <p:cNvPr id="46" name="Text 44"/>
+          <p:cNvSpPr/>
+          <p:nvPr/>
+        </p:nvSpPr>
+        <p:spPr>
+          <a:xfrm>
+            <a:off x="1951330" y="4169664"/>
+            <a:ext cx="676656" cy="384048"/>
           </a:xfrm>
           <a:prstGeom prst="rect">
             <a:avLst/>
@@ -23609,7 +23624,7 @@
                 <a:ea typeface="Trebuchet MS" pitchFamily="34" charset="-122"/>
                 <a:cs typeface="Trebuchet MS" pitchFamily="34" charset="-120"/>
               </a:rPr>
-              <a:t>e</a:t>
+              <a:t>o</a:t>
             </a:r>
             <a:endParaRPr lang="en-US" sz="900" dirty="0"/>
           </a:p>
@@ -23617,14 +23632,14 @@
       </p:sp>
       <p:sp>
         <p:nvSpPr>
-          <p:cNvPr id="42" name="Shape 40"/>
-          <p:cNvSpPr/>
-          <p:nvPr/>
-        </p:nvSpPr>
-        <p:spPr>
-          <a:xfrm>
-            <a:off x="3293146" y="4169664"/>
-            <a:ext cx="685800" cy="384048"/>
+          <p:cNvPr id="47" name="Shape 45"/>
+          <p:cNvSpPr/>
+          <p:nvPr/>
+        </p:nvSpPr>
+        <p:spPr>
+          <a:xfrm>
+            <a:off x="2677363" y="4169664"/>
+            <a:ext cx="676656" cy="384048"/>
           </a:xfrm>
           <a:prstGeom prst="rect">
             <a:avLst>
@@ -23644,14 +23659,14 @@
       </p:sp>
       <p:sp>
         <p:nvSpPr>
-          <p:cNvPr id="43" name="Text 41"/>
-          <p:cNvSpPr/>
-          <p:nvPr/>
-        </p:nvSpPr>
-        <p:spPr>
-          <a:xfrm>
-            <a:off x="3293146" y="4169664"/>
-            <a:ext cx="685800" cy="384048"/>
+          <p:cNvPr id="48" name="Text 46"/>
+          <p:cNvSpPr/>
+          <p:nvPr/>
+        </p:nvSpPr>
+        <p:spPr>
+          <a:xfrm>
+            <a:off x="2677363" y="4169664"/>
+            <a:ext cx="676656" cy="384048"/>
           </a:xfrm>
           <a:prstGeom prst="rect">
             <a:avLst/>
@@ -23675,7 +23690,7 @@
                 <a:ea typeface="Trebuchet MS" pitchFamily="34" charset="-122"/>
                 <a:cs typeface="Trebuchet MS" pitchFamily="34" charset="-120"/>
               </a:rPr>
-              <a:t>m</a:t>
+              <a:t>s</a:t>
             </a:r>
             <a:endParaRPr lang="en-US" sz="900" dirty="0"/>
           </a:p>
@@ -23683,14 +23698,14 @@
       </p:sp>
       <p:sp>
         <p:nvSpPr>
-          <p:cNvPr id="44" name="Shape 42"/>
-          <p:cNvSpPr/>
-          <p:nvPr/>
-        </p:nvSpPr>
-        <p:spPr>
-          <a:xfrm>
-            <a:off x="4331643" y="4169664"/>
-            <a:ext cx="685800" cy="384048"/>
+          <p:cNvPr id="49" name="Shape 47"/>
+          <p:cNvSpPr/>
+          <p:nvPr/>
+        </p:nvSpPr>
+        <p:spPr>
+          <a:xfrm>
+            <a:off x="3403397" y="4169664"/>
+            <a:ext cx="676656" cy="384048"/>
           </a:xfrm>
           <a:prstGeom prst="rect">
             <a:avLst>
@@ -23710,14 +23725,14 @@
       </p:sp>
       <p:sp>
         <p:nvSpPr>
-          <p:cNvPr id="45" name="Text 43"/>
-          <p:cNvSpPr/>
-          <p:nvPr/>
-        </p:nvSpPr>
-        <p:spPr>
-          <a:xfrm>
-            <a:off x="4331643" y="4169664"/>
-            <a:ext cx="685800" cy="384048"/>
+          <p:cNvPr id="50" name="Text 48"/>
+          <p:cNvSpPr/>
+          <p:nvPr/>
+        </p:nvSpPr>
+        <p:spPr>
+          <a:xfrm>
+            <a:off x="3403397" y="4169664"/>
+            <a:ext cx="676656" cy="384048"/>
           </a:xfrm>
           <a:prstGeom prst="rect">
             <a:avLst/>
@@ -23741,7 +23756,7 @@
                 <a:ea typeface="Trebuchet MS" pitchFamily="34" charset="-122"/>
                 <a:cs typeface="Trebuchet MS" pitchFamily="34" charset="-120"/>
               </a:rPr>
-              <a:t>p</a:t>
+              <a:t>t</a:t>
             </a:r>
             <a:endParaRPr lang="en-US" sz="900" dirty="0"/>
           </a:p>
@@ -23749,14 +23764,14 @@
       </p:sp>
       <p:sp>
         <p:nvSpPr>
-          <p:cNvPr id="46" name="Shape 44"/>
-          <p:cNvSpPr/>
-          <p:nvPr/>
-        </p:nvSpPr>
-        <p:spPr>
-          <a:xfrm>
-            <a:off x="5370141" y="4169664"/>
-            <a:ext cx="685800" cy="384048"/>
+          <p:cNvPr id="51" name="Shape 49"/>
+          <p:cNvSpPr/>
+          <p:nvPr/>
+        </p:nvSpPr>
+        <p:spPr>
+          <a:xfrm>
+            <a:off x="4129430" y="4169664"/>
+            <a:ext cx="676656" cy="384048"/>
           </a:xfrm>
           <a:prstGeom prst="rect">
             <a:avLst>
@@ -23776,14 +23791,14 @@
       </p:sp>
       <p:sp>
         <p:nvSpPr>
-          <p:cNvPr id="47" name="Text 45"/>
-          <p:cNvSpPr/>
-          <p:nvPr/>
-        </p:nvSpPr>
-        <p:spPr>
-          <a:xfrm>
-            <a:off x="5370141" y="4169664"/>
-            <a:ext cx="685800" cy="384048"/>
+          <p:cNvPr id="52" name="Text 50"/>
+          <p:cNvSpPr/>
+          <p:nvPr/>
+        </p:nvSpPr>
+        <p:spPr>
+          <a:xfrm>
+            <a:off x="4129430" y="4169664"/>
+            <a:ext cx="676656" cy="384048"/>
           </a:xfrm>
           <a:prstGeom prst="rect">
             <a:avLst/>
@@ -23807,7 +23822,7 @@
                 <a:ea typeface="Trebuchet MS" pitchFamily="34" charset="-122"/>
                 <a:cs typeface="Trebuchet MS" pitchFamily="34" charset="-120"/>
               </a:rPr>
-              <a:t>a</a:t>
+              <a:t>e</a:t>
             </a:r>
             <a:endParaRPr lang="en-US" sz="900" dirty="0"/>
           </a:p>
@@ -23815,14 +23830,14 @@
       </p:sp>
       <p:sp>
         <p:nvSpPr>
-          <p:cNvPr id="48" name="Shape 46"/>
-          <p:cNvSpPr/>
-          <p:nvPr/>
-        </p:nvSpPr>
-        <p:spPr>
-          <a:xfrm>
-            <a:off x="6408638" y="4169664"/>
-            <a:ext cx="685800" cy="384048"/>
+          <p:cNvPr id="53" name="Shape 51"/>
+          <p:cNvSpPr/>
+          <p:nvPr/>
+        </p:nvSpPr>
+        <p:spPr>
+          <a:xfrm>
+            <a:off x="4855464" y="4169664"/>
+            <a:ext cx="676656" cy="384048"/>
           </a:xfrm>
           <a:prstGeom prst="rect">
             <a:avLst>
@@ -23842,14 +23857,14 @@
       </p:sp>
       <p:sp>
         <p:nvSpPr>
-          <p:cNvPr id="49" name="Text 47"/>
-          <p:cNvSpPr/>
-          <p:nvPr/>
-        </p:nvSpPr>
-        <p:spPr>
-          <a:xfrm>
-            <a:off x="6408638" y="4169664"/>
-            <a:ext cx="685800" cy="384048"/>
+          <p:cNvPr id="54" name="Text 52"/>
+          <p:cNvSpPr/>
+          <p:nvPr/>
+        </p:nvSpPr>
+        <p:spPr>
+          <a:xfrm>
+            <a:off x="4855464" y="4169664"/>
+            <a:ext cx="676656" cy="384048"/>
           </a:xfrm>
           <a:prstGeom prst="rect">
             <a:avLst/>
@@ -23873,7 +23888,7 @@
                 <a:ea typeface="Trebuchet MS" pitchFamily="34" charset="-122"/>
                 <a:cs typeface="Trebuchet MS" pitchFamily="34" charset="-120"/>
               </a:rPr>
-              <a:t>th</a:t>
+              <a:t>o</a:t>
             </a:r>
             <a:endParaRPr lang="en-US" sz="900" dirty="0"/>
           </a:p>
@@ -23881,14 +23896,14 @@
       </p:sp>
       <p:sp>
         <p:nvSpPr>
-          <p:cNvPr id="50" name="Shape 48"/>
-          <p:cNvSpPr/>
-          <p:nvPr/>
-        </p:nvSpPr>
-        <p:spPr>
-          <a:xfrm>
-            <a:off x="7447135" y="4169664"/>
-            <a:ext cx="685800" cy="384048"/>
+          <p:cNvPr id="55" name="Shape 53"/>
+          <p:cNvSpPr/>
+          <p:nvPr/>
+        </p:nvSpPr>
+        <p:spPr>
+          <a:xfrm>
+            <a:off x="5581498" y="4169664"/>
+            <a:ext cx="676656" cy="384048"/>
           </a:xfrm>
           <a:prstGeom prst="rect">
             <a:avLst>
@@ -23908,14 +23923,14 @@
       </p:sp>
       <p:sp>
         <p:nvSpPr>
-          <p:cNvPr id="51" name="Text 49"/>
-          <p:cNvSpPr/>
-          <p:nvPr/>
-        </p:nvSpPr>
-        <p:spPr>
-          <a:xfrm>
-            <a:off x="7447135" y="4169664"/>
-            <a:ext cx="685800" cy="384048"/>
+          <p:cNvPr id="56" name="Text 54"/>
+          <p:cNvSpPr/>
+          <p:nvPr/>
+        </p:nvSpPr>
+        <p:spPr>
+          <a:xfrm>
+            <a:off x="5581498" y="4169664"/>
+            <a:ext cx="676656" cy="384048"/>
           </a:xfrm>
           <a:prstGeom prst="rect">
             <a:avLst/>
@@ -23939,6 +23954,204 @@
                 <a:ea typeface="Trebuchet MS" pitchFamily="34" charset="-122"/>
                 <a:cs typeface="Trebuchet MS" pitchFamily="34" charset="-120"/>
               </a:rPr>
+              <a:t>p</a:t>
+            </a:r>
+            <a:endParaRPr lang="en-US" sz="900" dirty="0"/>
+          </a:p>
+        </p:txBody>
+      </p:sp>
+      <p:sp>
+        <p:nvSpPr>
+          <p:cNvPr id="57" name="Shape 55"/>
+          <p:cNvSpPr/>
+          <p:nvPr/>
+        </p:nvSpPr>
+        <p:spPr>
+          <a:xfrm>
+            <a:off x="6307531" y="4169664"/>
+            <a:ext cx="676656" cy="384048"/>
+          </a:xfrm>
+          <a:prstGeom prst="rect">
+            <a:avLst>
+              <a:gd name="adj" fmla="val 9524"/>
+            </a:avLst>
+          </a:prstGeom>
+          <a:solidFill>
+            <a:srgbClr val="FFFFFF"/>
+          </a:solidFill>
+          <a:ln w="12700">
+            <a:solidFill>
+              <a:srgbClr val="DB2777"/>
+            </a:solidFill>
+            <a:prstDash val="solid"/>
+          </a:ln>
+        </p:spPr>
+      </p:sp>
+      <p:sp>
+        <p:nvSpPr>
+          <p:cNvPr id="58" name="Text 56"/>
+          <p:cNvSpPr/>
+          <p:nvPr/>
+        </p:nvSpPr>
+        <p:spPr>
+          <a:xfrm>
+            <a:off x="6307531" y="4169664"/>
+            <a:ext cx="676656" cy="384048"/>
+          </a:xfrm>
+          <a:prstGeom prst="rect">
+            <a:avLst/>
+          </a:prstGeom>
+          <a:noFill/>
+          <a:ln/>
+        </p:spPr>
+        <p:txBody>
+          <a:bodyPr wrap="square" lIns="0" tIns="0" rIns="0" bIns="0" rtlCol="0" anchor="ctr"/>
+          <a:lstStyle/>
+          <a:p>
+            <a:pPr algn="ctr" indent="0" marL="0">
+              <a:buNone/>
+            </a:pPr>
+            <a:r>
+              <a:rPr lang="en-US" sz="900" b="1" dirty="0">
+                <a:solidFill>
+                  <a:srgbClr val="9D174D"/>
+                </a:solidFill>
+                <a:latin typeface="Trebuchet MS" pitchFamily="34" charset="0"/>
+                <a:ea typeface="Trebuchet MS" pitchFamily="34" charset="-122"/>
+                <a:cs typeface="Trebuchet MS" pitchFamily="34" charset="-120"/>
+              </a:rPr>
+              <a:t>a</a:t>
+            </a:r>
+            <a:endParaRPr lang="en-US" sz="900" dirty="0"/>
+          </a:p>
+        </p:txBody>
+      </p:sp>
+      <p:sp>
+        <p:nvSpPr>
+          <p:cNvPr id="59" name="Shape 57"/>
+          <p:cNvSpPr/>
+          <p:nvPr/>
+        </p:nvSpPr>
+        <p:spPr>
+          <a:xfrm>
+            <a:off x="7033565" y="4169664"/>
+            <a:ext cx="676656" cy="384048"/>
+          </a:xfrm>
+          <a:prstGeom prst="rect">
+            <a:avLst>
+              <a:gd name="adj" fmla="val 9524"/>
+            </a:avLst>
+          </a:prstGeom>
+          <a:solidFill>
+            <a:srgbClr val="FFFFFF"/>
+          </a:solidFill>
+          <a:ln w="12700">
+            <a:solidFill>
+              <a:srgbClr val="DB2777"/>
+            </a:solidFill>
+            <a:prstDash val="solid"/>
+          </a:ln>
+        </p:spPr>
+      </p:sp>
+      <p:sp>
+        <p:nvSpPr>
+          <p:cNvPr id="60" name="Text 58"/>
+          <p:cNvSpPr/>
+          <p:nvPr/>
+        </p:nvSpPr>
+        <p:spPr>
+          <a:xfrm>
+            <a:off x="7033565" y="4169664"/>
+            <a:ext cx="676656" cy="384048"/>
+          </a:xfrm>
+          <a:prstGeom prst="rect">
+            <a:avLst/>
+          </a:prstGeom>
+          <a:noFill/>
+          <a:ln/>
+        </p:spPr>
+        <p:txBody>
+          <a:bodyPr wrap="square" lIns="0" tIns="0" rIns="0" bIns="0" rtlCol="0" anchor="ctr"/>
+          <a:lstStyle/>
+          <a:p>
+            <a:pPr algn="ctr" indent="0" marL="0">
+              <a:buNone/>
+            </a:pPr>
+            <a:r>
+              <a:rPr lang="en-US" sz="900" b="1" dirty="0">
+                <a:solidFill>
+                  <a:srgbClr val="9D174D"/>
+                </a:solidFill>
+                <a:latin typeface="Trebuchet MS" pitchFamily="34" charset="0"/>
+                <a:ea typeface="Trebuchet MS" pitchFamily="34" charset="-122"/>
+                <a:cs typeface="Trebuchet MS" pitchFamily="34" charset="-120"/>
+              </a:rPr>
+              <a:t>th</a:t>
+            </a:r>
+            <a:endParaRPr lang="en-US" sz="900" dirty="0"/>
+          </a:p>
+        </p:txBody>
+      </p:sp>
+      <p:sp>
+        <p:nvSpPr>
+          <p:cNvPr id="61" name="Shape 59"/>
+          <p:cNvSpPr/>
+          <p:nvPr/>
+        </p:nvSpPr>
+        <p:spPr>
+          <a:xfrm>
+            <a:off x="7759598" y="4169664"/>
+            <a:ext cx="676656" cy="384048"/>
+          </a:xfrm>
+          <a:prstGeom prst="rect">
+            <a:avLst>
+              <a:gd name="adj" fmla="val 9524"/>
+            </a:avLst>
+          </a:prstGeom>
+          <a:solidFill>
+            <a:srgbClr val="FFFFFF"/>
+          </a:solidFill>
+          <a:ln w="12700">
+            <a:solidFill>
+              <a:srgbClr val="DB2777"/>
+            </a:solidFill>
+            <a:prstDash val="solid"/>
+          </a:ln>
+        </p:spPr>
+      </p:sp>
+      <p:sp>
+        <p:nvSpPr>
+          <p:cNvPr id="62" name="Text 60"/>
+          <p:cNvSpPr/>
+          <p:nvPr/>
+        </p:nvSpPr>
+        <p:spPr>
+          <a:xfrm>
+            <a:off x="7759598" y="4169664"/>
+            <a:ext cx="676656" cy="384048"/>
+          </a:xfrm>
+          <a:prstGeom prst="rect">
+            <a:avLst/>
+          </a:prstGeom>
+          <a:noFill/>
+          <a:ln/>
+        </p:spPr>
+        <p:txBody>
+          <a:bodyPr wrap="square" lIns="0" tIns="0" rIns="0" bIns="0" rtlCol="0" anchor="ctr"/>
+          <a:lstStyle/>
+          <a:p>
+            <a:pPr algn="ctr" indent="0" marL="0">
+              <a:buNone/>
+            </a:pPr>
+            <a:r>
+              <a:rPr lang="en-US" sz="900" b="1" dirty="0">
+                <a:solidFill>
+                  <a:srgbClr val="9D174D"/>
+                </a:solidFill>
+                <a:latin typeface="Trebuchet MS" pitchFamily="34" charset="0"/>
+                <a:ea typeface="Trebuchet MS" pitchFamily="34" charset="-122"/>
+                <a:cs typeface="Trebuchet MS" pitchFamily="34" charset="-120"/>
+              </a:rPr>
               <a:t>y</a:t>
             </a:r>
             <a:endParaRPr lang="en-US" sz="900" dirty="0"/>
@@ -23947,14 +24160,14 @@
       </p:sp>
       <p:sp>
         <p:nvSpPr>
-          <p:cNvPr id="52" name="Text 50"/>
-          <p:cNvSpPr/>
-          <p:nvPr/>
-        </p:nvSpPr>
-        <p:spPr>
-          <a:xfrm>
-            <a:off x="7447135" y="4572000"/>
-            <a:ext cx="685800" cy="219456"/>
+          <p:cNvPr id="63" name="Text 61"/>
+          <p:cNvSpPr/>
+          <p:nvPr/>
+        </p:nvSpPr>
+        <p:spPr>
+          <a:xfrm>
+            <a:off x="7759598" y="4572000"/>
+            <a:ext cx="676656" cy="219456"/>
           </a:xfrm>
           <a:prstGeom prst="rect">
             <a:avLst/>
@@ -24409,7 +24622,7 @@
                 <a:ea typeface="Trebuchet MS" pitchFamily="34" charset="-122"/>
                 <a:cs typeface="Trebuchet MS" pitchFamily="34" charset="-120"/>
               </a:rPr>
-              <a:t>sympathy</a:t>
+              <a:t>homeopathy</a:t>
             </a:r>
             <a:endParaRPr lang="en-US" sz="2800" dirty="0"/>
           </a:p>
@@ -25236,7 +25449,7 @@
                 <a:ea typeface="Trebuchet MS" pitchFamily="34" charset="-122"/>
                 <a:cs typeface="Trebuchet MS" pitchFamily="34" charset="-120"/>
               </a:rPr>
-              <a:t>sympathy</a:t>
+              <a:t>homeopathy</a:t>
             </a:r>
             <a:endParaRPr lang="en-US" sz="2800" dirty="0"/>
           </a:p>
@@ -25375,7 +25588,7 @@
                 <a:ea typeface="Trebuchet MS" pitchFamily="34" charset="-122"/>
                 <a:cs typeface="Trebuchet MS" pitchFamily="34" charset="-120"/>
               </a:rPr>
-              <a:t>sym</a:t>
+              <a:t>homeo</a:t>
             </a:r>
             <a:endParaRPr lang="en-US" sz="1300" dirty="0"/>
           </a:p>
@@ -25414,7 +25627,7 @@
                 <a:ea typeface="Calibri" pitchFamily="34" charset="-122"/>
                 <a:cs typeface="Calibri" pitchFamily="34" charset="-120"/>
               </a:rPr>
-              <a:t>together, with</a:t>
+              <a:t>same, similar</a:t>
             </a:r>
             <a:endParaRPr lang="en-US" sz="850" dirty="0"/>
           </a:p>
@@ -25422,46 +25635,7 @@
       </p:sp>
       <p:sp>
         <p:nvSpPr>
-          <p:cNvPr id="19" name="Text 17"/>
-          <p:cNvSpPr/>
-          <p:nvPr/>
-        </p:nvSpPr>
-        <p:spPr>
-          <a:xfrm>
-            <a:off x="2221992" y="2752344"/>
-            <a:ext cx="1828800" cy="182880"/>
-          </a:xfrm>
-          <a:prstGeom prst="rect">
-            <a:avLst/>
-          </a:prstGeom>
-          <a:noFill/>
-          <a:ln/>
-        </p:spPr>
-        <p:txBody>
-          <a:bodyPr wrap="square" lIns="0" tIns="0" rIns="0" bIns="0" rtlCol="0" anchor="t"/>
-          <a:lstStyle/>
-          <a:p>
-            <a:pPr algn="ctr" indent="0" marL="0">
-              <a:buNone/>
-            </a:pPr>
-            <a:r>
-              <a:rPr lang="en-US" sz="700" i="1" dirty="0">
-                <a:solidFill>
-                  <a:srgbClr val="94A3B8"/>
-                </a:solidFill>
-                <a:latin typeface="Calibri" pitchFamily="34" charset="0"/>
-                <a:ea typeface="Calibri" pitchFamily="34" charset="-122"/>
-                <a:cs typeface="Calibri" pitchFamily="34" charset="-120"/>
-              </a:rPr>
-              <a:t>syn → sym before 'p'</a:t>
-            </a:r>
-            <a:endParaRPr lang="en-US" sz="700" dirty="0"/>
-          </a:p>
-        </p:txBody>
-      </p:sp>
-      <p:sp>
-        <p:nvSpPr>
-          <p:cNvPr id="20" name="Shape 18"/>
+          <p:cNvPr id="19" name="Shape 17"/>
           <p:cNvSpPr/>
           <p:nvPr/>
         </p:nvSpPr>
@@ -25495,7 +25669,7 @@
       </p:sp>
       <p:sp>
         <p:nvSpPr>
-          <p:cNvPr id="21" name="Text 19"/>
+          <p:cNvPr id="20" name="Text 18"/>
           <p:cNvSpPr/>
           <p:nvPr/>
         </p:nvSpPr>
@@ -25534,7 +25708,7 @@
       </p:sp>
       <p:sp>
         <p:nvSpPr>
-          <p:cNvPr id="22" name="Text 20"/>
+          <p:cNvPr id="21" name="Text 19"/>
           <p:cNvSpPr/>
           <p:nvPr/>
         </p:nvSpPr>
@@ -25565,7 +25739,7 @@
                 <a:ea typeface="Calibri" pitchFamily="34" charset="-122"/>
                 <a:cs typeface="Calibri" pitchFamily="34" charset="-120"/>
               </a:rPr>
-              <a:t>feeling, suffering</a:t>
+              <a:t>disease or treatment</a:t>
             </a:r>
             <a:endParaRPr lang="en-US" sz="850" dirty="0"/>
           </a:p>
@@ -25573,7 +25747,7 @@
       </p:sp>
       <p:sp>
         <p:nvSpPr>
-          <p:cNvPr id="23" name="Shape 21"/>
+          <p:cNvPr id="22" name="Shape 20"/>
           <p:cNvSpPr/>
           <p:nvPr/>
         </p:nvSpPr>
@@ -25607,7 +25781,7 @@
       </p:sp>
       <p:sp>
         <p:nvSpPr>
-          <p:cNvPr id="24" name="Text 22"/>
+          <p:cNvPr id="23" name="Text 21"/>
           <p:cNvSpPr/>
           <p:nvPr/>
         </p:nvSpPr>
@@ -25646,7 +25820,7 @@
       </p:sp>
       <p:sp>
         <p:nvSpPr>
-          <p:cNvPr id="25" name="Text 23"/>
+          <p:cNvPr id="24" name="Text 22"/>
           <p:cNvSpPr/>
           <p:nvPr/>
         </p:nvSpPr>
@@ -25677,7 +25851,7 @@
                 <a:ea typeface="Calibri" pitchFamily="34" charset="-122"/>
                 <a:cs typeface="Calibri" pitchFamily="34" charset="-120"/>
               </a:rPr>
-              <a:t>forms a noun or adjective</a:t>
+              <a:t>state or quality of</a:t>
             </a:r>
             <a:endParaRPr lang="en-US" sz="850" dirty="0"/>
           </a:p>
@@ -25685,7 +25859,7 @@
       </p:sp>
       <p:sp>
         <p:nvSpPr>
-          <p:cNvPr id="26" name="Shape 24"/>
+          <p:cNvPr id="25" name="Shape 23"/>
           <p:cNvSpPr/>
           <p:nvPr/>
         </p:nvSpPr>
@@ -25712,7 +25886,7 @@
       </p:sp>
       <p:sp>
         <p:nvSpPr>
-          <p:cNvPr id="27" name="Text 25"/>
+          <p:cNvPr id="26" name="Text 24"/>
           <p:cNvSpPr/>
           <p:nvPr/>
         </p:nvSpPr>
@@ -25751,7 +25925,7 @@
       </p:sp>
       <p:sp>
         <p:nvSpPr>
-          <p:cNvPr id="28" name="Shape 26"/>
+          <p:cNvPr id="27" name="Shape 25"/>
           <p:cNvSpPr/>
           <p:nvPr/>
         </p:nvSpPr>
@@ -25778,7 +25952,7 @@
       </p:sp>
       <p:sp>
         <p:nvSpPr>
-          <p:cNvPr id="29" name="Text 27"/>
+          <p:cNvPr id="28" name="Text 26"/>
           <p:cNvSpPr/>
           <p:nvPr/>
         </p:nvSpPr>
@@ -25817,7 +25991,7 @@
       </p:sp>
       <p:sp>
         <p:nvSpPr>
-          <p:cNvPr id="30" name="Shape 28"/>
+          <p:cNvPr id="29" name="Shape 27"/>
           <p:cNvSpPr/>
           <p:nvPr/>
         </p:nvSpPr>
@@ -25844,7 +26018,7 @@
       </p:sp>
       <p:sp>
         <p:nvSpPr>
-          <p:cNvPr id="31" name="Text 29"/>
+          <p:cNvPr id="30" name="Text 28"/>
           <p:cNvSpPr/>
           <p:nvPr/>
         </p:nvSpPr>
@@ -25883,7 +26057,7 @@
       </p:sp>
       <p:sp>
         <p:nvSpPr>
-          <p:cNvPr id="32" name="Shape 30"/>
+          <p:cNvPr id="31" name="Shape 29"/>
           <p:cNvSpPr/>
           <p:nvPr/>
         </p:nvSpPr>
@@ -25910,7 +26084,7 @@
       </p:sp>
       <p:sp>
         <p:nvSpPr>
-          <p:cNvPr id="33" name="Text 31"/>
+          <p:cNvPr id="32" name="Text 30"/>
           <p:cNvSpPr/>
           <p:nvPr/>
         </p:nvSpPr>
@@ -27091,7 +27265,7 @@
                 <a:ea typeface="Trebuchet MS" pitchFamily="34" charset="-122"/>
                 <a:cs typeface="Trebuchet MS" pitchFamily="34" charset="-120"/>
               </a:rPr>
-              <a:t>sympathy</a:t>
+              <a:t>homeopathy</a:t>
             </a:r>
             <a:endParaRPr lang="en-US" sz="2800" dirty="0"/>
           </a:p>
@@ -27230,7 +27404,7 @@
                 <a:ea typeface="Trebuchet MS" pitchFamily="34" charset="-122"/>
                 <a:cs typeface="Trebuchet MS" pitchFamily="34" charset="-120"/>
               </a:rPr>
-              <a:t>sym</a:t>
+              <a:t>homeo</a:t>
             </a:r>
             <a:endParaRPr lang="en-US" sz="1300" dirty="0"/>
           </a:p>
@@ -27269,7 +27443,7 @@
                 <a:ea typeface="Calibri" pitchFamily="34" charset="-122"/>
                 <a:cs typeface="Calibri" pitchFamily="34" charset="-120"/>
               </a:rPr>
-              <a:t>together, with</a:t>
+              <a:t>same, similar</a:t>
             </a:r>
             <a:endParaRPr lang="en-US" sz="850" dirty="0"/>
           </a:p>
@@ -27277,46 +27451,7 @@
       </p:sp>
       <p:sp>
         <p:nvSpPr>
-          <p:cNvPr id="19" name="Text 17"/>
-          <p:cNvSpPr/>
-          <p:nvPr/>
-        </p:nvSpPr>
-        <p:spPr>
-          <a:xfrm>
-            <a:off x="2221992" y="2752344"/>
-            <a:ext cx="1828800" cy="182880"/>
-          </a:xfrm>
-          <a:prstGeom prst="rect">
-            <a:avLst/>
-          </a:prstGeom>
-          <a:noFill/>
-          <a:ln/>
-        </p:spPr>
-        <p:txBody>
-          <a:bodyPr wrap="square" lIns="0" tIns="0" rIns="0" bIns="0" rtlCol="0" anchor="t"/>
-          <a:lstStyle/>
-          <a:p>
-            <a:pPr algn="ctr" indent="0" marL="0">
-              <a:buNone/>
-            </a:pPr>
-            <a:r>
-              <a:rPr lang="en-US" sz="700" i="1" dirty="0">
-                <a:solidFill>
-                  <a:srgbClr val="94A3B8"/>
-                </a:solidFill>
-                <a:latin typeface="Calibri" pitchFamily="34" charset="0"/>
-                <a:ea typeface="Calibri" pitchFamily="34" charset="-122"/>
-                <a:cs typeface="Calibri" pitchFamily="34" charset="-120"/>
-              </a:rPr>
-              <a:t>syn → sym before 'p'</a:t>
-            </a:r>
-            <a:endParaRPr lang="en-US" sz="700" dirty="0"/>
-          </a:p>
-        </p:txBody>
-      </p:sp>
-      <p:sp>
-        <p:nvSpPr>
-          <p:cNvPr id="20" name="Shape 18"/>
+          <p:cNvPr id="19" name="Shape 17"/>
           <p:cNvSpPr/>
           <p:nvPr/>
         </p:nvSpPr>
@@ -27350,7 +27485,7 @@
       </p:sp>
       <p:sp>
         <p:nvSpPr>
-          <p:cNvPr id="21" name="Text 19"/>
+          <p:cNvPr id="20" name="Text 18"/>
           <p:cNvSpPr/>
           <p:nvPr/>
         </p:nvSpPr>
@@ -27389,7 +27524,7 @@
       </p:sp>
       <p:sp>
         <p:nvSpPr>
-          <p:cNvPr id="22" name="Text 20"/>
+          <p:cNvPr id="21" name="Text 19"/>
           <p:cNvSpPr/>
           <p:nvPr/>
         </p:nvSpPr>
@@ -27420,7 +27555,7 @@
                 <a:ea typeface="Calibri" pitchFamily="34" charset="-122"/>
                 <a:cs typeface="Calibri" pitchFamily="34" charset="-120"/>
               </a:rPr>
-              <a:t>feeling, suffering</a:t>
+              <a:t>disease or treatment</a:t>
             </a:r>
             <a:endParaRPr lang="en-US" sz="850" dirty="0"/>
           </a:p>
@@ -27428,7 +27563,7 @@
       </p:sp>
       <p:sp>
         <p:nvSpPr>
-          <p:cNvPr id="23" name="Shape 21"/>
+          <p:cNvPr id="22" name="Shape 20"/>
           <p:cNvSpPr/>
           <p:nvPr/>
         </p:nvSpPr>
@@ -27462,7 +27597,7 @@
       </p:sp>
       <p:sp>
         <p:nvSpPr>
-          <p:cNvPr id="24" name="Text 22"/>
+          <p:cNvPr id="23" name="Text 21"/>
           <p:cNvSpPr/>
           <p:nvPr/>
         </p:nvSpPr>
@@ -27501,7 +27636,7 @@
       </p:sp>
       <p:sp>
         <p:nvSpPr>
-          <p:cNvPr id="25" name="Text 23"/>
+          <p:cNvPr id="24" name="Text 22"/>
           <p:cNvSpPr/>
           <p:nvPr/>
         </p:nvSpPr>
@@ -27532,7 +27667,7 @@
                 <a:ea typeface="Calibri" pitchFamily="34" charset="-122"/>
                 <a:cs typeface="Calibri" pitchFamily="34" charset="-120"/>
               </a:rPr>
-              <a:t>forms a noun or adjective</a:t>
+              <a:t>state or quality of</a:t>
             </a:r>
             <a:endParaRPr lang="en-US" sz="850" dirty="0"/>
           </a:p>
@@ -27540,7 +27675,7 @@
       </p:sp>
       <p:sp>
         <p:nvSpPr>
-          <p:cNvPr id="26" name="Shape 24"/>
+          <p:cNvPr id="25" name="Shape 23"/>
           <p:cNvSpPr/>
           <p:nvPr/>
         </p:nvSpPr>
@@ -27567,7 +27702,7 @@
       </p:sp>
       <p:sp>
         <p:nvSpPr>
-          <p:cNvPr id="27" name="Text 25"/>
+          <p:cNvPr id="26" name="Text 24"/>
           <p:cNvSpPr/>
           <p:nvPr/>
         </p:nvSpPr>
@@ -27606,7 +27741,7 @@
       </p:sp>
       <p:sp>
         <p:nvSpPr>
-          <p:cNvPr id="28" name="Shape 26"/>
+          <p:cNvPr id="27" name="Shape 25"/>
           <p:cNvSpPr/>
           <p:nvPr/>
         </p:nvSpPr>
@@ -27633,14 +27768,14 @@
       </p:sp>
       <p:sp>
         <p:nvSpPr>
-          <p:cNvPr id="29" name="Shape 27"/>
-          <p:cNvSpPr/>
-          <p:nvPr/>
-        </p:nvSpPr>
-        <p:spPr>
-          <a:xfrm>
-            <a:off x="2313432" y="3364992"/>
-            <a:ext cx="1645920" cy="475488"/>
+          <p:cNvPr id="28" name="Shape 26"/>
+          <p:cNvSpPr/>
+          <p:nvPr/>
+        </p:nvSpPr>
+        <p:spPr>
+          <a:xfrm>
+            <a:off x="1978152" y="3364992"/>
+            <a:ext cx="1225296" cy="475488"/>
           </a:xfrm>
           <a:prstGeom prst="rect">
             <a:avLst>
@@ -27660,14 +27795,14 @@
       </p:sp>
       <p:sp>
         <p:nvSpPr>
-          <p:cNvPr id="30" name="Text 28"/>
-          <p:cNvSpPr/>
-          <p:nvPr/>
-        </p:nvSpPr>
-        <p:spPr>
-          <a:xfrm>
-            <a:off x="2313432" y="3364992"/>
-            <a:ext cx="1645920" cy="475488"/>
+          <p:cNvPr id="29" name="Text 27"/>
+          <p:cNvSpPr/>
+          <p:nvPr/>
+        </p:nvSpPr>
+        <p:spPr>
+          <a:xfrm>
+            <a:off x="1978152" y="3364992"/>
+            <a:ext cx="1225296" cy="475488"/>
           </a:xfrm>
           <a:prstGeom prst="rect">
             <a:avLst/>
@@ -27691,7 +27826,7 @@
                 <a:ea typeface="Trebuchet MS" pitchFamily="34" charset="-122"/>
                 <a:cs typeface="Trebuchet MS" pitchFamily="34" charset="-120"/>
               </a:rPr>
-              <a:t>sym</a:t>
+              <a:t>ho</a:t>
             </a:r>
             <a:endParaRPr lang="en-US" sz="1400" dirty="0"/>
           </a:p>
@@ -27699,14 +27834,14 @@
       </p:sp>
       <p:sp>
         <p:nvSpPr>
-          <p:cNvPr id="31" name="Text 29"/>
-          <p:cNvSpPr/>
-          <p:nvPr/>
-        </p:nvSpPr>
-        <p:spPr>
-          <a:xfrm>
-            <a:off x="3959352" y="3364992"/>
-            <a:ext cx="411480" cy="475488"/>
+          <p:cNvPr id="30" name="Text 28"/>
+          <p:cNvSpPr/>
+          <p:nvPr/>
+        </p:nvSpPr>
+        <p:spPr>
+          <a:xfrm>
+            <a:off x="3203448" y="3364992"/>
+            <a:ext cx="76200" cy="475488"/>
           </a:xfrm>
           <a:prstGeom prst="rect">
             <a:avLst/>
@@ -27738,14 +27873,14 @@
       </p:sp>
       <p:sp>
         <p:nvSpPr>
-          <p:cNvPr id="32" name="Shape 30"/>
-          <p:cNvSpPr/>
-          <p:nvPr/>
-        </p:nvSpPr>
-        <p:spPr>
-          <a:xfrm>
-            <a:off x="4370832" y="3364992"/>
-            <a:ext cx="1645920" cy="475488"/>
+          <p:cNvPr id="31" name="Shape 29"/>
+          <p:cNvSpPr/>
+          <p:nvPr/>
+        </p:nvSpPr>
+        <p:spPr>
+          <a:xfrm>
+            <a:off x="3279648" y="3364992"/>
+            <a:ext cx="1225296" cy="475488"/>
           </a:xfrm>
           <a:prstGeom prst="rect">
             <a:avLst>
@@ -27765,14 +27900,14 @@
       </p:sp>
       <p:sp>
         <p:nvSpPr>
-          <p:cNvPr id="33" name="Text 31"/>
-          <p:cNvSpPr/>
-          <p:nvPr/>
-        </p:nvSpPr>
-        <p:spPr>
-          <a:xfrm>
-            <a:off x="4370832" y="3364992"/>
-            <a:ext cx="1645920" cy="475488"/>
+          <p:cNvPr id="32" name="Text 30"/>
+          <p:cNvSpPr/>
+          <p:nvPr/>
+        </p:nvSpPr>
+        <p:spPr>
+          <a:xfrm>
+            <a:off x="3279648" y="3364992"/>
+            <a:ext cx="1225296" cy="475488"/>
           </a:xfrm>
           <a:prstGeom prst="rect">
             <a:avLst/>
@@ -27796,7 +27931,7 @@
                 <a:ea typeface="Trebuchet MS" pitchFamily="34" charset="-122"/>
                 <a:cs typeface="Trebuchet MS" pitchFamily="34" charset="-120"/>
               </a:rPr>
-              <a:t>pa</a:t>
+              <a:t>me</a:t>
             </a:r>
             <a:endParaRPr lang="en-US" sz="1400" dirty="0"/>
           </a:p>
@@ -27804,14 +27939,14 @@
       </p:sp>
       <p:sp>
         <p:nvSpPr>
-          <p:cNvPr id="34" name="Text 32"/>
-          <p:cNvSpPr/>
-          <p:nvPr/>
-        </p:nvSpPr>
-        <p:spPr>
-          <a:xfrm>
-            <a:off x="6016752" y="3364992"/>
-            <a:ext cx="411480" cy="475488"/>
+          <p:cNvPr id="33" name="Text 31"/>
+          <p:cNvSpPr/>
+          <p:nvPr/>
+        </p:nvSpPr>
+        <p:spPr>
+          <a:xfrm>
+            <a:off x="4504944" y="3364992"/>
+            <a:ext cx="76200" cy="475488"/>
           </a:xfrm>
           <a:prstGeom prst="rect">
             <a:avLst/>
@@ -27843,14 +27978,14 @@
       </p:sp>
       <p:sp>
         <p:nvSpPr>
-          <p:cNvPr id="35" name="Shape 33"/>
-          <p:cNvSpPr/>
-          <p:nvPr/>
-        </p:nvSpPr>
-        <p:spPr>
-          <a:xfrm>
-            <a:off x="6428232" y="3364992"/>
-            <a:ext cx="1645920" cy="475488"/>
+          <p:cNvPr id="34" name="Shape 32"/>
+          <p:cNvSpPr/>
+          <p:nvPr/>
+        </p:nvSpPr>
+        <p:spPr>
+          <a:xfrm>
+            <a:off x="4581144" y="3364992"/>
+            <a:ext cx="1225296" cy="475488"/>
           </a:xfrm>
           <a:prstGeom prst="rect">
             <a:avLst>
@@ -27870,14 +28005,14 @@
       </p:sp>
       <p:sp>
         <p:nvSpPr>
-          <p:cNvPr id="36" name="Text 34"/>
-          <p:cNvSpPr/>
-          <p:nvPr/>
-        </p:nvSpPr>
-        <p:spPr>
-          <a:xfrm>
-            <a:off x="6428232" y="3364992"/>
-            <a:ext cx="1645920" cy="475488"/>
+          <p:cNvPr id="35" name="Text 33"/>
+          <p:cNvSpPr/>
+          <p:nvPr/>
+        </p:nvSpPr>
+        <p:spPr>
+          <a:xfrm>
+            <a:off x="4581144" y="3364992"/>
+            <a:ext cx="1225296" cy="475488"/>
           </a:xfrm>
           <a:prstGeom prst="rect">
             <a:avLst/>
@@ -27901,6 +28036,216 @@
                 <a:ea typeface="Trebuchet MS" pitchFamily="34" charset="-122"/>
                 <a:cs typeface="Trebuchet MS" pitchFamily="34" charset="-120"/>
               </a:rPr>
+              <a:t>o</a:t>
+            </a:r>
+            <a:endParaRPr lang="en-US" sz="1400" dirty="0"/>
+          </a:p>
+        </p:txBody>
+      </p:sp>
+      <p:sp>
+        <p:nvSpPr>
+          <p:cNvPr id="36" name="Text 34"/>
+          <p:cNvSpPr/>
+          <p:nvPr/>
+        </p:nvSpPr>
+        <p:spPr>
+          <a:xfrm>
+            <a:off x="5806440" y="3364992"/>
+            <a:ext cx="76200" cy="475488"/>
+          </a:xfrm>
+          <a:prstGeom prst="rect">
+            <a:avLst/>
+          </a:prstGeom>
+          <a:noFill/>
+          <a:ln/>
+        </p:spPr>
+        <p:txBody>
+          <a:bodyPr wrap="square" lIns="0" tIns="0" rIns="0" bIns="0" rtlCol="0" anchor="ctr"/>
+          <a:lstStyle/>
+          <a:p>
+            <a:pPr algn="ctr" indent="0" marL="0">
+              <a:buNone/>
+            </a:pPr>
+            <a:r>
+              <a:rPr lang="en-US" sz="1600" b="1" dirty="0">
+                <a:solidFill>
+                  <a:srgbClr val="0D9488"/>
+                </a:solidFill>
+                <a:latin typeface="Trebuchet MS" pitchFamily="34" charset="0"/>
+                <a:ea typeface="Trebuchet MS" pitchFamily="34" charset="-122"/>
+                <a:cs typeface="Trebuchet MS" pitchFamily="34" charset="-120"/>
+              </a:rPr>
+              <a:t>·</a:t>
+            </a:r>
+            <a:endParaRPr lang="en-US" sz="1600" dirty="0"/>
+          </a:p>
+        </p:txBody>
+      </p:sp>
+      <p:sp>
+        <p:nvSpPr>
+          <p:cNvPr id="37" name="Shape 35"/>
+          <p:cNvSpPr/>
+          <p:nvPr/>
+        </p:nvSpPr>
+        <p:spPr>
+          <a:xfrm>
+            <a:off x="5882640" y="3364992"/>
+            <a:ext cx="1225296" cy="475488"/>
+          </a:xfrm>
+          <a:prstGeom prst="rect">
+            <a:avLst>
+              <a:gd name="adj" fmla="val 9615"/>
+            </a:avLst>
+          </a:prstGeom>
+          <a:solidFill>
+            <a:srgbClr val="FFFFFF"/>
+          </a:solidFill>
+          <a:ln w="12700">
+            <a:solidFill>
+              <a:srgbClr val="0D9488"/>
+            </a:solidFill>
+            <a:prstDash val="solid"/>
+          </a:ln>
+        </p:spPr>
+      </p:sp>
+      <p:sp>
+        <p:nvSpPr>
+          <p:cNvPr id="38" name="Text 36"/>
+          <p:cNvSpPr/>
+          <p:nvPr/>
+        </p:nvSpPr>
+        <p:spPr>
+          <a:xfrm>
+            <a:off x="5882640" y="3364992"/>
+            <a:ext cx="1225296" cy="475488"/>
+          </a:xfrm>
+          <a:prstGeom prst="rect">
+            <a:avLst/>
+          </a:prstGeom>
+          <a:noFill/>
+          <a:ln/>
+        </p:spPr>
+        <p:txBody>
+          <a:bodyPr wrap="square" lIns="0" tIns="0" rIns="0" bIns="0" rtlCol="0" anchor="ctr"/>
+          <a:lstStyle/>
+          <a:p>
+            <a:pPr algn="ctr" indent="0" marL="0">
+              <a:buNone/>
+            </a:pPr>
+            <a:r>
+              <a:rPr lang="en-US" sz="1400" b="1" dirty="0">
+                <a:solidFill>
+                  <a:srgbClr val="0D9488"/>
+                </a:solidFill>
+                <a:latin typeface="Trebuchet MS" pitchFamily="34" charset="0"/>
+                <a:ea typeface="Trebuchet MS" pitchFamily="34" charset="-122"/>
+                <a:cs typeface="Trebuchet MS" pitchFamily="34" charset="-120"/>
+              </a:rPr>
+              <a:t>pa</a:t>
+            </a:r>
+            <a:endParaRPr lang="en-US" sz="1400" dirty="0"/>
+          </a:p>
+        </p:txBody>
+      </p:sp>
+      <p:sp>
+        <p:nvSpPr>
+          <p:cNvPr id="39" name="Text 37"/>
+          <p:cNvSpPr/>
+          <p:nvPr/>
+        </p:nvSpPr>
+        <p:spPr>
+          <a:xfrm>
+            <a:off x="7107936" y="3364992"/>
+            <a:ext cx="76200" cy="475488"/>
+          </a:xfrm>
+          <a:prstGeom prst="rect">
+            <a:avLst/>
+          </a:prstGeom>
+          <a:noFill/>
+          <a:ln/>
+        </p:spPr>
+        <p:txBody>
+          <a:bodyPr wrap="square" lIns="0" tIns="0" rIns="0" bIns="0" rtlCol="0" anchor="ctr"/>
+          <a:lstStyle/>
+          <a:p>
+            <a:pPr algn="ctr" indent="0" marL="0">
+              <a:buNone/>
+            </a:pPr>
+            <a:r>
+              <a:rPr lang="en-US" sz="1600" b="1" dirty="0">
+                <a:solidFill>
+                  <a:srgbClr val="0D9488"/>
+                </a:solidFill>
+                <a:latin typeface="Trebuchet MS" pitchFamily="34" charset="0"/>
+                <a:ea typeface="Trebuchet MS" pitchFamily="34" charset="-122"/>
+                <a:cs typeface="Trebuchet MS" pitchFamily="34" charset="-120"/>
+              </a:rPr>
+              <a:t>·</a:t>
+            </a:r>
+            <a:endParaRPr lang="en-US" sz="1600" dirty="0"/>
+          </a:p>
+        </p:txBody>
+      </p:sp>
+      <p:sp>
+        <p:nvSpPr>
+          <p:cNvPr id="40" name="Shape 38"/>
+          <p:cNvSpPr/>
+          <p:nvPr/>
+        </p:nvSpPr>
+        <p:spPr>
+          <a:xfrm>
+            <a:off x="7184136" y="3364992"/>
+            <a:ext cx="1225296" cy="475488"/>
+          </a:xfrm>
+          <a:prstGeom prst="rect">
+            <a:avLst>
+              <a:gd name="adj" fmla="val 9615"/>
+            </a:avLst>
+          </a:prstGeom>
+          <a:solidFill>
+            <a:srgbClr val="FFFFFF"/>
+          </a:solidFill>
+          <a:ln w="12700">
+            <a:solidFill>
+              <a:srgbClr val="0D9488"/>
+            </a:solidFill>
+            <a:prstDash val="solid"/>
+          </a:ln>
+        </p:spPr>
+      </p:sp>
+      <p:sp>
+        <p:nvSpPr>
+          <p:cNvPr id="41" name="Text 39"/>
+          <p:cNvSpPr/>
+          <p:nvPr/>
+        </p:nvSpPr>
+        <p:spPr>
+          <a:xfrm>
+            <a:off x="7184136" y="3364992"/>
+            <a:ext cx="1225296" cy="475488"/>
+          </a:xfrm>
+          <a:prstGeom prst="rect">
+            <a:avLst/>
+          </a:prstGeom>
+          <a:noFill/>
+          <a:ln/>
+        </p:spPr>
+        <p:txBody>
+          <a:bodyPr wrap="square" lIns="0" tIns="0" rIns="0" bIns="0" rtlCol="0" anchor="ctr"/>
+          <a:lstStyle/>
+          <a:p>
+            <a:pPr algn="ctr" indent="0" marL="0">
+              <a:buNone/>
+            </a:pPr>
+            <a:r>
+              <a:rPr lang="en-US" sz="1400" b="1" dirty="0">
+                <a:solidFill>
+                  <a:srgbClr val="0D9488"/>
+                </a:solidFill>
+                <a:latin typeface="Trebuchet MS" pitchFamily="34" charset="0"/>
+                <a:ea typeface="Trebuchet MS" pitchFamily="34" charset="-122"/>
+                <a:cs typeface="Trebuchet MS" pitchFamily="34" charset="-120"/>
+              </a:rPr>
               <a:t>thy</a:t>
             </a:r>
             <a:endParaRPr lang="en-US" sz="1400" dirty="0"/>
@@ -27909,7 +28254,7 @@
       </p:sp>
       <p:sp>
         <p:nvSpPr>
-          <p:cNvPr id="37" name="Shape 35"/>
+          <p:cNvPr id="42" name="Shape 40"/>
           <p:cNvSpPr/>
           <p:nvPr/>
         </p:nvSpPr>
@@ -27936,7 +28281,7 @@
       </p:sp>
       <p:sp>
         <p:nvSpPr>
-          <p:cNvPr id="38" name="Text 36"/>
+          <p:cNvPr id="43" name="Text 41"/>
           <p:cNvSpPr/>
           <p:nvPr/>
         </p:nvSpPr>
@@ -27975,7 +28320,7 @@
       </p:sp>
       <p:sp>
         <p:nvSpPr>
-          <p:cNvPr id="39" name="Shape 37"/>
+          <p:cNvPr id="44" name="Shape 42"/>
           <p:cNvSpPr/>
           <p:nvPr/>
         </p:nvSpPr>
@@ -28002,7 +28347,7 @@
       </p:sp>
       <p:sp>
         <p:nvSpPr>
-          <p:cNvPr id="40" name="Text 38"/>
+          <p:cNvPr id="45" name="Text 43"/>
           <p:cNvSpPr/>
           <p:nvPr/>
         </p:nvSpPr>
@@ -28464,7 +28809,7 @@
                 <a:ea typeface="Trebuchet MS" pitchFamily="34" charset="-122"/>
                 <a:cs typeface="Trebuchet MS" pitchFamily="34" charset="-120"/>
               </a:rPr>
-              <a:t>sympathy</a:t>
+              <a:t>homeopathy</a:t>
             </a:r>
             <a:endParaRPr lang="en-US" sz="2800" dirty="0"/>
           </a:p>
@@ -28603,7 +28948,7 @@
                 <a:ea typeface="Trebuchet MS" pitchFamily="34" charset="-122"/>
                 <a:cs typeface="Trebuchet MS" pitchFamily="34" charset="-120"/>
               </a:rPr>
-              <a:t>sym</a:t>
+              <a:t>homeo</a:t>
             </a:r>
             <a:endParaRPr lang="en-US" sz="1300" dirty="0"/>
           </a:p>
@@ -28642,7 +28987,7 @@
                 <a:ea typeface="Calibri" pitchFamily="34" charset="-122"/>
                 <a:cs typeface="Calibri" pitchFamily="34" charset="-120"/>
               </a:rPr>
-              <a:t>together, with</a:t>
+              <a:t>same, similar</a:t>
             </a:r>
             <a:endParaRPr lang="en-US" sz="850" dirty="0"/>
           </a:p>
@@ -28650,46 +28995,7 @@
       </p:sp>
       <p:sp>
         <p:nvSpPr>
-          <p:cNvPr id="19" name="Text 17"/>
-          <p:cNvSpPr/>
-          <p:nvPr/>
-        </p:nvSpPr>
-        <p:spPr>
-          <a:xfrm>
-            <a:off x="2221992" y="2752344"/>
-            <a:ext cx="1828800" cy="182880"/>
-          </a:xfrm>
-          <a:prstGeom prst="rect">
-            <a:avLst/>
-          </a:prstGeom>
-          <a:noFill/>
-          <a:ln/>
-        </p:spPr>
-        <p:txBody>
-          <a:bodyPr wrap="square" lIns="0" tIns="0" rIns="0" bIns="0" rtlCol="0" anchor="t"/>
-          <a:lstStyle/>
-          <a:p>
-            <a:pPr algn="ctr" indent="0" marL="0">
-              <a:buNone/>
-            </a:pPr>
-            <a:r>
-              <a:rPr lang="en-US" sz="700" i="1" dirty="0">
-                <a:solidFill>
-                  <a:srgbClr val="94A3B8"/>
-                </a:solidFill>
-                <a:latin typeface="Calibri" pitchFamily="34" charset="0"/>
-                <a:ea typeface="Calibri" pitchFamily="34" charset="-122"/>
-                <a:cs typeface="Calibri" pitchFamily="34" charset="-120"/>
-              </a:rPr>
-              <a:t>syn → sym before 'p'</a:t>
-            </a:r>
-            <a:endParaRPr lang="en-US" sz="700" dirty="0"/>
-          </a:p>
-        </p:txBody>
-      </p:sp>
-      <p:sp>
-        <p:nvSpPr>
-          <p:cNvPr id="20" name="Shape 18"/>
+          <p:cNvPr id="19" name="Shape 17"/>
           <p:cNvSpPr/>
           <p:nvPr/>
         </p:nvSpPr>
@@ -28723,7 +29029,7 @@
       </p:sp>
       <p:sp>
         <p:nvSpPr>
-          <p:cNvPr id="21" name="Text 19"/>
+          <p:cNvPr id="20" name="Text 18"/>
           <p:cNvSpPr/>
           <p:nvPr/>
         </p:nvSpPr>
@@ -28762,7 +29068,7 @@
       </p:sp>
       <p:sp>
         <p:nvSpPr>
-          <p:cNvPr id="22" name="Text 20"/>
+          <p:cNvPr id="21" name="Text 19"/>
           <p:cNvSpPr/>
           <p:nvPr/>
         </p:nvSpPr>
@@ -28793,7 +29099,7 @@
                 <a:ea typeface="Calibri" pitchFamily="34" charset="-122"/>
                 <a:cs typeface="Calibri" pitchFamily="34" charset="-120"/>
               </a:rPr>
-              <a:t>feeling, suffering</a:t>
+              <a:t>disease or treatment</a:t>
             </a:r>
             <a:endParaRPr lang="en-US" sz="850" dirty="0"/>
           </a:p>
@@ -28801,7 +29107,7 @@
       </p:sp>
       <p:sp>
         <p:nvSpPr>
-          <p:cNvPr id="23" name="Shape 21"/>
+          <p:cNvPr id="22" name="Shape 20"/>
           <p:cNvSpPr/>
           <p:nvPr/>
         </p:nvSpPr>
@@ -28835,7 +29141,7 @@
       </p:sp>
       <p:sp>
         <p:nvSpPr>
-          <p:cNvPr id="24" name="Text 22"/>
+          <p:cNvPr id="23" name="Text 21"/>
           <p:cNvSpPr/>
           <p:nvPr/>
         </p:nvSpPr>
@@ -28874,7 +29180,7 @@
       </p:sp>
       <p:sp>
         <p:nvSpPr>
-          <p:cNvPr id="25" name="Text 23"/>
+          <p:cNvPr id="24" name="Text 22"/>
           <p:cNvSpPr/>
           <p:nvPr/>
         </p:nvSpPr>
@@ -28905,7 +29211,7 @@
                 <a:ea typeface="Calibri" pitchFamily="34" charset="-122"/>
                 <a:cs typeface="Calibri" pitchFamily="34" charset="-120"/>
               </a:rPr>
-              <a:t>forms a noun or adjective</a:t>
+              <a:t>state or quality of</a:t>
             </a:r>
             <a:endParaRPr lang="en-US" sz="850" dirty="0"/>
           </a:p>
@@ -28913,7 +29219,7 @@
       </p:sp>
       <p:sp>
         <p:nvSpPr>
-          <p:cNvPr id="26" name="Shape 24"/>
+          <p:cNvPr id="25" name="Shape 23"/>
           <p:cNvSpPr/>
           <p:nvPr/>
         </p:nvSpPr>
@@ -28940,7 +29246,7 @@
       </p:sp>
       <p:sp>
         <p:nvSpPr>
-          <p:cNvPr id="27" name="Text 25"/>
+          <p:cNvPr id="26" name="Text 24"/>
           <p:cNvSpPr/>
           <p:nvPr/>
         </p:nvSpPr>
@@ -28979,7 +29285,7 @@
       </p:sp>
       <p:sp>
         <p:nvSpPr>
-          <p:cNvPr id="28" name="Shape 26"/>
+          <p:cNvPr id="27" name="Shape 25"/>
           <p:cNvSpPr/>
           <p:nvPr/>
         </p:nvSpPr>
@@ -29006,14 +29312,14 @@
       </p:sp>
       <p:sp>
         <p:nvSpPr>
-          <p:cNvPr id="29" name="Shape 27"/>
-          <p:cNvSpPr/>
-          <p:nvPr/>
-        </p:nvSpPr>
-        <p:spPr>
-          <a:xfrm>
-            <a:off x="2313432" y="3364992"/>
-            <a:ext cx="1645920" cy="475488"/>
+          <p:cNvPr id="28" name="Shape 26"/>
+          <p:cNvSpPr/>
+          <p:nvPr/>
+        </p:nvSpPr>
+        <p:spPr>
+          <a:xfrm>
+            <a:off x="1978152" y="3364992"/>
+            <a:ext cx="1225296" cy="475488"/>
           </a:xfrm>
           <a:prstGeom prst="rect">
             <a:avLst>
@@ -29033,14 +29339,14 @@
       </p:sp>
       <p:sp>
         <p:nvSpPr>
-          <p:cNvPr id="30" name="Text 28"/>
-          <p:cNvSpPr/>
-          <p:nvPr/>
-        </p:nvSpPr>
-        <p:spPr>
-          <a:xfrm>
-            <a:off x="2313432" y="3364992"/>
-            <a:ext cx="1645920" cy="475488"/>
+          <p:cNvPr id="29" name="Text 27"/>
+          <p:cNvSpPr/>
+          <p:nvPr/>
+        </p:nvSpPr>
+        <p:spPr>
+          <a:xfrm>
+            <a:off x="1978152" y="3364992"/>
+            <a:ext cx="1225296" cy="475488"/>
           </a:xfrm>
           <a:prstGeom prst="rect">
             <a:avLst/>
@@ -29064,7 +29370,7 @@
                 <a:ea typeface="Trebuchet MS" pitchFamily="34" charset="-122"/>
                 <a:cs typeface="Trebuchet MS" pitchFamily="34" charset="-120"/>
               </a:rPr>
-              <a:t>sym</a:t>
+              <a:t>ho</a:t>
             </a:r>
             <a:endParaRPr lang="en-US" sz="1400" dirty="0"/>
           </a:p>
@@ -29072,14 +29378,14 @@
       </p:sp>
       <p:sp>
         <p:nvSpPr>
-          <p:cNvPr id="31" name="Text 29"/>
-          <p:cNvSpPr/>
-          <p:nvPr/>
-        </p:nvSpPr>
-        <p:spPr>
-          <a:xfrm>
-            <a:off x="3959352" y="3364992"/>
-            <a:ext cx="411480" cy="475488"/>
+          <p:cNvPr id="30" name="Text 28"/>
+          <p:cNvSpPr/>
+          <p:nvPr/>
+        </p:nvSpPr>
+        <p:spPr>
+          <a:xfrm>
+            <a:off x="3203448" y="3364992"/>
+            <a:ext cx="76200" cy="475488"/>
           </a:xfrm>
           <a:prstGeom prst="rect">
             <a:avLst/>
@@ -29111,14 +29417,14 @@
       </p:sp>
       <p:sp>
         <p:nvSpPr>
-          <p:cNvPr id="32" name="Shape 30"/>
-          <p:cNvSpPr/>
-          <p:nvPr/>
-        </p:nvSpPr>
-        <p:spPr>
-          <a:xfrm>
-            <a:off x="4370832" y="3364992"/>
-            <a:ext cx="1645920" cy="475488"/>
+          <p:cNvPr id="31" name="Shape 29"/>
+          <p:cNvSpPr/>
+          <p:nvPr/>
+        </p:nvSpPr>
+        <p:spPr>
+          <a:xfrm>
+            <a:off x="3279648" y="3364992"/>
+            <a:ext cx="1225296" cy="475488"/>
           </a:xfrm>
           <a:prstGeom prst="rect">
             <a:avLst>
@@ -29138,14 +29444,14 @@
       </p:sp>
       <p:sp>
         <p:nvSpPr>
-          <p:cNvPr id="33" name="Text 31"/>
-          <p:cNvSpPr/>
-          <p:nvPr/>
-        </p:nvSpPr>
-        <p:spPr>
-          <a:xfrm>
-            <a:off x="4370832" y="3364992"/>
-            <a:ext cx="1645920" cy="475488"/>
+          <p:cNvPr id="32" name="Text 30"/>
+          <p:cNvSpPr/>
+          <p:nvPr/>
+        </p:nvSpPr>
+        <p:spPr>
+          <a:xfrm>
+            <a:off x="3279648" y="3364992"/>
+            <a:ext cx="1225296" cy="475488"/>
           </a:xfrm>
           <a:prstGeom prst="rect">
             <a:avLst/>
@@ -29169,7 +29475,7 @@
                 <a:ea typeface="Trebuchet MS" pitchFamily="34" charset="-122"/>
                 <a:cs typeface="Trebuchet MS" pitchFamily="34" charset="-120"/>
               </a:rPr>
-              <a:t>pa</a:t>
+              <a:t>me</a:t>
             </a:r>
             <a:endParaRPr lang="en-US" sz="1400" dirty="0"/>
           </a:p>
@@ -29177,14 +29483,14 @@
       </p:sp>
       <p:sp>
         <p:nvSpPr>
-          <p:cNvPr id="34" name="Text 32"/>
-          <p:cNvSpPr/>
-          <p:nvPr/>
-        </p:nvSpPr>
-        <p:spPr>
-          <a:xfrm>
-            <a:off x="6016752" y="3364992"/>
-            <a:ext cx="411480" cy="475488"/>
+          <p:cNvPr id="33" name="Text 31"/>
+          <p:cNvSpPr/>
+          <p:nvPr/>
+        </p:nvSpPr>
+        <p:spPr>
+          <a:xfrm>
+            <a:off x="4504944" y="3364992"/>
+            <a:ext cx="76200" cy="475488"/>
           </a:xfrm>
           <a:prstGeom prst="rect">
             <a:avLst/>
@@ -29216,14 +29522,14 @@
       </p:sp>
       <p:sp>
         <p:nvSpPr>
-          <p:cNvPr id="35" name="Shape 33"/>
-          <p:cNvSpPr/>
-          <p:nvPr/>
-        </p:nvSpPr>
-        <p:spPr>
-          <a:xfrm>
-            <a:off x="6428232" y="3364992"/>
-            <a:ext cx="1645920" cy="475488"/>
+          <p:cNvPr id="34" name="Shape 32"/>
+          <p:cNvSpPr/>
+          <p:nvPr/>
+        </p:nvSpPr>
+        <p:spPr>
+          <a:xfrm>
+            <a:off x="4581144" y="3364992"/>
+            <a:ext cx="1225296" cy="475488"/>
           </a:xfrm>
           <a:prstGeom prst="rect">
             <a:avLst>
@@ -29243,14 +29549,14 @@
       </p:sp>
       <p:sp>
         <p:nvSpPr>
-          <p:cNvPr id="36" name="Text 34"/>
-          <p:cNvSpPr/>
-          <p:nvPr/>
-        </p:nvSpPr>
-        <p:spPr>
-          <a:xfrm>
-            <a:off x="6428232" y="3364992"/>
-            <a:ext cx="1645920" cy="475488"/>
+          <p:cNvPr id="35" name="Text 33"/>
+          <p:cNvSpPr/>
+          <p:nvPr/>
+        </p:nvSpPr>
+        <p:spPr>
+          <a:xfrm>
+            <a:off x="4581144" y="3364992"/>
+            <a:ext cx="1225296" cy="475488"/>
           </a:xfrm>
           <a:prstGeom prst="rect">
             <a:avLst/>
@@ -29274,6 +29580,216 @@
                 <a:ea typeface="Trebuchet MS" pitchFamily="34" charset="-122"/>
                 <a:cs typeface="Trebuchet MS" pitchFamily="34" charset="-120"/>
               </a:rPr>
+              <a:t>o</a:t>
+            </a:r>
+            <a:endParaRPr lang="en-US" sz="1400" dirty="0"/>
+          </a:p>
+        </p:txBody>
+      </p:sp>
+      <p:sp>
+        <p:nvSpPr>
+          <p:cNvPr id="36" name="Text 34"/>
+          <p:cNvSpPr/>
+          <p:nvPr/>
+        </p:nvSpPr>
+        <p:spPr>
+          <a:xfrm>
+            <a:off x="5806440" y="3364992"/>
+            <a:ext cx="76200" cy="475488"/>
+          </a:xfrm>
+          <a:prstGeom prst="rect">
+            <a:avLst/>
+          </a:prstGeom>
+          <a:noFill/>
+          <a:ln/>
+        </p:spPr>
+        <p:txBody>
+          <a:bodyPr wrap="square" lIns="0" tIns="0" rIns="0" bIns="0" rtlCol="0" anchor="ctr"/>
+          <a:lstStyle/>
+          <a:p>
+            <a:pPr algn="ctr" indent="0" marL="0">
+              <a:buNone/>
+            </a:pPr>
+            <a:r>
+              <a:rPr lang="en-US" sz="1600" b="1" dirty="0">
+                <a:solidFill>
+                  <a:srgbClr val="0D9488"/>
+                </a:solidFill>
+                <a:latin typeface="Trebuchet MS" pitchFamily="34" charset="0"/>
+                <a:ea typeface="Trebuchet MS" pitchFamily="34" charset="-122"/>
+                <a:cs typeface="Trebuchet MS" pitchFamily="34" charset="-120"/>
+              </a:rPr>
+              <a:t>·</a:t>
+            </a:r>
+            <a:endParaRPr lang="en-US" sz="1600" dirty="0"/>
+          </a:p>
+        </p:txBody>
+      </p:sp>
+      <p:sp>
+        <p:nvSpPr>
+          <p:cNvPr id="37" name="Shape 35"/>
+          <p:cNvSpPr/>
+          <p:nvPr/>
+        </p:nvSpPr>
+        <p:spPr>
+          <a:xfrm>
+            <a:off x="5882640" y="3364992"/>
+            <a:ext cx="1225296" cy="475488"/>
+          </a:xfrm>
+          <a:prstGeom prst="rect">
+            <a:avLst>
+              <a:gd name="adj" fmla="val 9615"/>
+            </a:avLst>
+          </a:prstGeom>
+          <a:solidFill>
+            <a:srgbClr val="FFFFFF"/>
+          </a:solidFill>
+          <a:ln w="12700">
+            <a:solidFill>
+              <a:srgbClr val="0D9488"/>
+            </a:solidFill>
+            <a:prstDash val="solid"/>
+          </a:ln>
+        </p:spPr>
+      </p:sp>
+      <p:sp>
+        <p:nvSpPr>
+          <p:cNvPr id="38" name="Text 36"/>
+          <p:cNvSpPr/>
+          <p:nvPr/>
+        </p:nvSpPr>
+        <p:spPr>
+          <a:xfrm>
+            <a:off x="5882640" y="3364992"/>
+            <a:ext cx="1225296" cy="475488"/>
+          </a:xfrm>
+          <a:prstGeom prst="rect">
+            <a:avLst/>
+          </a:prstGeom>
+          <a:noFill/>
+          <a:ln/>
+        </p:spPr>
+        <p:txBody>
+          <a:bodyPr wrap="square" lIns="0" tIns="0" rIns="0" bIns="0" rtlCol="0" anchor="ctr"/>
+          <a:lstStyle/>
+          <a:p>
+            <a:pPr algn="ctr" indent="0" marL="0">
+              <a:buNone/>
+            </a:pPr>
+            <a:r>
+              <a:rPr lang="en-US" sz="1400" b="1" dirty="0">
+                <a:solidFill>
+                  <a:srgbClr val="0D9488"/>
+                </a:solidFill>
+                <a:latin typeface="Trebuchet MS" pitchFamily="34" charset="0"/>
+                <a:ea typeface="Trebuchet MS" pitchFamily="34" charset="-122"/>
+                <a:cs typeface="Trebuchet MS" pitchFamily="34" charset="-120"/>
+              </a:rPr>
+              <a:t>pa</a:t>
+            </a:r>
+            <a:endParaRPr lang="en-US" sz="1400" dirty="0"/>
+          </a:p>
+        </p:txBody>
+      </p:sp>
+      <p:sp>
+        <p:nvSpPr>
+          <p:cNvPr id="39" name="Text 37"/>
+          <p:cNvSpPr/>
+          <p:nvPr/>
+        </p:nvSpPr>
+        <p:spPr>
+          <a:xfrm>
+            <a:off x="7107936" y="3364992"/>
+            <a:ext cx="76200" cy="475488"/>
+          </a:xfrm>
+          <a:prstGeom prst="rect">
+            <a:avLst/>
+          </a:prstGeom>
+          <a:noFill/>
+          <a:ln/>
+        </p:spPr>
+        <p:txBody>
+          <a:bodyPr wrap="square" lIns="0" tIns="0" rIns="0" bIns="0" rtlCol="0" anchor="ctr"/>
+          <a:lstStyle/>
+          <a:p>
+            <a:pPr algn="ctr" indent="0" marL="0">
+              <a:buNone/>
+            </a:pPr>
+            <a:r>
+              <a:rPr lang="en-US" sz="1600" b="1" dirty="0">
+                <a:solidFill>
+                  <a:srgbClr val="0D9488"/>
+                </a:solidFill>
+                <a:latin typeface="Trebuchet MS" pitchFamily="34" charset="0"/>
+                <a:ea typeface="Trebuchet MS" pitchFamily="34" charset="-122"/>
+                <a:cs typeface="Trebuchet MS" pitchFamily="34" charset="-120"/>
+              </a:rPr>
+              <a:t>·</a:t>
+            </a:r>
+            <a:endParaRPr lang="en-US" sz="1600" dirty="0"/>
+          </a:p>
+        </p:txBody>
+      </p:sp>
+      <p:sp>
+        <p:nvSpPr>
+          <p:cNvPr id="40" name="Shape 38"/>
+          <p:cNvSpPr/>
+          <p:nvPr/>
+        </p:nvSpPr>
+        <p:spPr>
+          <a:xfrm>
+            <a:off x="7184136" y="3364992"/>
+            <a:ext cx="1225296" cy="475488"/>
+          </a:xfrm>
+          <a:prstGeom prst="rect">
+            <a:avLst>
+              <a:gd name="adj" fmla="val 9615"/>
+            </a:avLst>
+          </a:prstGeom>
+          <a:solidFill>
+            <a:srgbClr val="FFFFFF"/>
+          </a:solidFill>
+          <a:ln w="12700">
+            <a:solidFill>
+              <a:srgbClr val="0D9488"/>
+            </a:solidFill>
+            <a:prstDash val="solid"/>
+          </a:ln>
+        </p:spPr>
+      </p:sp>
+      <p:sp>
+        <p:nvSpPr>
+          <p:cNvPr id="41" name="Text 39"/>
+          <p:cNvSpPr/>
+          <p:nvPr/>
+        </p:nvSpPr>
+        <p:spPr>
+          <a:xfrm>
+            <a:off x="7184136" y="3364992"/>
+            <a:ext cx="1225296" cy="475488"/>
+          </a:xfrm>
+          <a:prstGeom prst="rect">
+            <a:avLst/>
+          </a:prstGeom>
+          <a:noFill/>
+          <a:ln/>
+        </p:spPr>
+        <p:txBody>
+          <a:bodyPr wrap="square" lIns="0" tIns="0" rIns="0" bIns="0" rtlCol="0" anchor="ctr"/>
+          <a:lstStyle/>
+          <a:p>
+            <a:pPr algn="ctr" indent="0" marL="0">
+              <a:buNone/>
+            </a:pPr>
+            <a:r>
+              <a:rPr lang="en-US" sz="1400" b="1" dirty="0">
+                <a:solidFill>
+                  <a:srgbClr val="0D9488"/>
+                </a:solidFill>
+                <a:latin typeface="Trebuchet MS" pitchFamily="34" charset="0"/>
+                <a:ea typeface="Trebuchet MS" pitchFamily="34" charset="-122"/>
+                <a:cs typeface="Trebuchet MS" pitchFamily="34" charset="-120"/>
+              </a:rPr>
               <a:t>thy</a:t>
             </a:r>
             <a:endParaRPr lang="en-US" sz="1400" dirty="0"/>
@@ -29282,7 +29798,7 @@
       </p:sp>
       <p:sp>
         <p:nvSpPr>
-          <p:cNvPr id="37" name="Shape 35"/>
+          <p:cNvPr id="42" name="Shape 40"/>
           <p:cNvSpPr/>
           <p:nvPr/>
         </p:nvSpPr>
@@ -29309,7 +29825,7 @@
       </p:sp>
       <p:sp>
         <p:nvSpPr>
-          <p:cNvPr id="38" name="Text 36"/>
+          <p:cNvPr id="43" name="Text 41"/>
           <p:cNvSpPr/>
           <p:nvPr/>
         </p:nvSpPr>
@@ -29348,7 +29864,7 @@
       </p:sp>
       <p:sp>
         <p:nvSpPr>
-          <p:cNvPr id="39" name="Shape 37"/>
+          <p:cNvPr id="44" name="Shape 42"/>
           <p:cNvSpPr/>
           <p:nvPr/>
         </p:nvSpPr>
@@ -29375,14 +29891,14 @@
       </p:sp>
       <p:sp>
         <p:nvSpPr>
-          <p:cNvPr id="40" name="Shape 38"/>
-          <p:cNvSpPr/>
-          <p:nvPr/>
-        </p:nvSpPr>
-        <p:spPr>
-          <a:xfrm>
-            <a:off x="2124837" y="4169664"/>
-            <a:ext cx="685800" cy="384048"/>
+          <p:cNvPr id="45" name="Shape 43"/>
+          <p:cNvSpPr/>
+          <p:nvPr/>
+        </p:nvSpPr>
+        <p:spPr>
+          <a:xfrm>
+            <a:off x="1951330" y="4169664"/>
+            <a:ext cx="676656" cy="384048"/>
           </a:xfrm>
           <a:prstGeom prst="rect">
             <a:avLst>
@@ -29402,14 +29918,14 @@
       </p:sp>
       <p:sp>
         <p:nvSpPr>
-          <p:cNvPr id="41" name="Text 39"/>
-          <p:cNvSpPr/>
-          <p:nvPr/>
-        </p:nvSpPr>
-        <p:spPr>
-          <a:xfrm>
-            <a:off x="2124837" y="4169664"/>
-            <a:ext cx="685800" cy="384048"/>
+          <p:cNvPr id="46" name="Text 44"/>
+          <p:cNvSpPr/>
+          <p:nvPr/>
+        </p:nvSpPr>
+        <p:spPr>
+          <a:xfrm>
+            <a:off x="1951330" y="4169664"/>
+            <a:ext cx="676656" cy="384048"/>
           </a:xfrm>
           <a:prstGeom prst="rect">
             <a:avLst/>
@@ -29433,7 +29949,7 @@
                 <a:ea typeface="Trebuchet MS" pitchFamily="34" charset="-122"/>
                 <a:cs typeface="Trebuchet MS" pitchFamily="34" charset="-120"/>
               </a:rPr>
-              <a:t>s</a:t>
+              <a:t>h</a:t>
             </a:r>
             <a:endParaRPr lang="en-US" sz="900" dirty="0"/>
           </a:p>
@@ -29441,14 +29957,14 @@
       </p:sp>
       <p:sp>
         <p:nvSpPr>
-          <p:cNvPr id="42" name="Shape 40"/>
-          <p:cNvSpPr/>
-          <p:nvPr/>
-        </p:nvSpPr>
-        <p:spPr>
-          <a:xfrm>
-            <a:off x="3033522" y="4169664"/>
-            <a:ext cx="685800" cy="384048"/>
+          <p:cNvPr id="47" name="Shape 45"/>
+          <p:cNvSpPr/>
+          <p:nvPr/>
+        </p:nvSpPr>
+        <p:spPr>
+          <a:xfrm>
+            <a:off x="2677363" y="4169664"/>
+            <a:ext cx="676656" cy="384048"/>
           </a:xfrm>
           <a:prstGeom prst="rect">
             <a:avLst>
@@ -29468,14 +29984,14 @@
       </p:sp>
       <p:sp>
         <p:nvSpPr>
-          <p:cNvPr id="43" name="Text 41"/>
-          <p:cNvSpPr/>
-          <p:nvPr/>
-        </p:nvSpPr>
-        <p:spPr>
-          <a:xfrm>
-            <a:off x="3033522" y="4169664"/>
-            <a:ext cx="685800" cy="384048"/>
+          <p:cNvPr id="48" name="Text 46"/>
+          <p:cNvSpPr/>
+          <p:nvPr/>
+        </p:nvSpPr>
+        <p:spPr>
+          <a:xfrm>
+            <a:off x="2677363" y="4169664"/>
+            <a:ext cx="676656" cy="384048"/>
           </a:xfrm>
           <a:prstGeom prst="rect">
             <a:avLst/>
@@ -29499,7 +30015,7 @@
                 <a:ea typeface="Trebuchet MS" pitchFamily="34" charset="-122"/>
                 <a:cs typeface="Trebuchet MS" pitchFamily="34" charset="-120"/>
               </a:rPr>
-              <a:t>y</a:t>
+              <a:t>o</a:t>
             </a:r>
             <a:endParaRPr lang="en-US" sz="900" dirty="0"/>
           </a:p>
@@ -29507,53 +30023,14 @@
       </p:sp>
       <p:sp>
         <p:nvSpPr>
-          <p:cNvPr id="44" name="Text 42"/>
-          <p:cNvSpPr/>
-          <p:nvPr/>
-        </p:nvSpPr>
-        <p:spPr>
-          <a:xfrm>
-            <a:off x="3033522" y="4572000"/>
-            <a:ext cx="685800" cy="219456"/>
-          </a:xfrm>
-          <a:prstGeom prst="rect">
-            <a:avLst/>
-          </a:prstGeom>
-          <a:noFill/>
-          <a:ln/>
-        </p:spPr>
-        <p:txBody>
-          <a:bodyPr wrap="square" lIns="0" tIns="0" rIns="0" bIns="0" rtlCol="0" anchor="t"/>
-          <a:lstStyle/>
-          <a:p>
-            <a:pPr algn="ctr" indent="0" marL="0">
-              <a:buNone/>
-            </a:pPr>
-            <a:r>
-              <a:rPr lang="en-US" sz="750" i="1" dirty="0">
-                <a:solidFill>
-                  <a:srgbClr val="94A3B8"/>
-                </a:solidFill>
-                <a:latin typeface="Calibri" pitchFamily="34" charset="0"/>
-                <a:ea typeface="Calibri" pitchFamily="34" charset="-122"/>
-                <a:cs typeface="Calibri" pitchFamily="34" charset="-120"/>
-              </a:rPr>
-              <a:t>/i/</a:t>
-            </a:r>
-            <a:endParaRPr lang="en-US" sz="750" dirty="0"/>
-          </a:p>
-        </p:txBody>
-      </p:sp>
-      <p:sp>
-        <p:nvSpPr>
-          <p:cNvPr id="45" name="Shape 43"/>
-          <p:cNvSpPr/>
-          <p:nvPr/>
-        </p:nvSpPr>
-        <p:spPr>
-          <a:xfrm>
-            <a:off x="3942207" y="4169664"/>
-            <a:ext cx="685800" cy="384048"/>
+          <p:cNvPr id="49" name="Shape 47"/>
+          <p:cNvSpPr/>
+          <p:nvPr/>
+        </p:nvSpPr>
+        <p:spPr>
+          <a:xfrm>
+            <a:off x="3403397" y="4169664"/>
+            <a:ext cx="676656" cy="384048"/>
           </a:xfrm>
           <a:prstGeom prst="rect">
             <a:avLst>
@@ -29573,14 +30050,14 @@
       </p:sp>
       <p:sp>
         <p:nvSpPr>
-          <p:cNvPr id="46" name="Text 44"/>
-          <p:cNvSpPr/>
-          <p:nvPr/>
-        </p:nvSpPr>
-        <p:spPr>
-          <a:xfrm>
-            <a:off x="3942207" y="4169664"/>
-            <a:ext cx="685800" cy="384048"/>
+          <p:cNvPr id="50" name="Text 48"/>
+          <p:cNvSpPr/>
+          <p:nvPr/>
+        </p:nvSpPr>
+        <p:spPr>
+          <a:xfrm>
+            <a:off x="3403397" y="4169664"/>
+            <a:ext cx="676656" cy="384048"/>
           </a:xfrm>
           <a:prstGeom prst="rect">
             <a:avLst/>
@@ -29612,14 +30089,14 @@
       </p:sp>
       <p:sp>
         <p:nvSpPr>
-          <p:cNvPr id="47" name="Shape 45"/>
-          <p:cNvSpPr/>
-          <p:nvPr/>
-        </p:nvSpPr>
-        <p:spPr>
-          <a:xfrm>
-            <a:off x="4850892" y="4169664"/>
-            <a:ext cx="685800" cy="384048"/>
+          <p:cNvPr id="51" name="Shape 49"/>
+          <p:cNvSpPr/>
+          <p:nvPr/>
+        </p:nvSpPr>
+        <p:spPr>
+          <a:xfrm>
+            <a:off x="4129430" y="4169664"/>
+            <a:ext cx="676656" cy="384048"/>
           </a:xfrm>
           <a:prstGeom prst="rect">
             <a:avLst>
@@ -29639,14 +30116,14 @@
       </p:sp>
       <p:sp>
         <p:nvSpPr>
-          <p:cNvPr id="48" name="Text 46"/>
-          <p:cNvSpPr/>
-          <p:nvPr/>
-        </p:nvSpPr>
-        <p:spPr>
-          <a:xfrm>
-            <a:off x="4850892" y="4169664"/>
-            <a:ext cx="685800" cy="384048"/>
+          <p:cNvPr id="52" name="Text 50"/>
+          <p:cNvSpPr/>
+          <p:nvPr/>
+        </p:nvSpPr>
+        <p:spPr>
+          <a:xfrm>
+            <a:off x="4129430" y="4169664"/>
+            <a:ext cx="676656" cy="384048"/>
           </a:xfrm>
           <a:prstGeom prst="rect">
             <a:avLst/>
@@ -29670,7 +30147,7 @@
                 <a:ea typeface="Trebuchet MS" pitchFamily="34" charset="-122"/>
                 <a:cs typeface="Trebuchet MS" pitchFamily="34" charset="-120"/>
               </a:rPr>
-              <a:t>p</a:t>
+              <a:t>e</a:t>
             </a:r>
             <a:endParaRPr lang="en-US" sz="900" dirty="0"/>
           </a:p>
@@ -29678,14 +30155,14 @@
       </p:sp>
       <p:sp>
         <p:nvSpPr>
-          <p:cNvPr id="49" name="Shape 47"/>
-          <p:cNvSpPr/>
-          <p:nvPr/>
-        </p:nvSpPr>
-        <p:spPr>
-          <a:xfrm>
-            <a:off x="5759577" y="4169664"/>
-            <a:ext cx="685800" cy="384048"/>
+          <p:cNvPr id="53" name="Shape 51"/>
+          <p:cNvSpPr/>
+          <p:nvPr/>
+        </p:nvSpPr>
+        <p:spPr>
+          <a:xfrm>
+            <a:off x="4855464" y="4169664"/>
+            <a:ext cx="676656" cy="384048"/>
           </a:xfrm>
           <a:prstGeom prst="rect">
             <a:avLst>
@@ -29705,14 +30182,14 @@
       </p:sp>
       <p:sp>
         <p:nvSpPr>
-          <p:cNvPr id="50" name="Text 48"/>
-          <p:cNvSpPr/>
-          <p:nvPr/>
-        </p:nvSpPr>
-        <p:spPr>
-          <a:xfrm>
-            <a:off x="5759577" y="4169664"/>
-            <a:ext cx="685800" cy="384048"/>
+          <p:cNvPr id="54" name="Text 52"/>
+          <p:cNvSpPr/>
+          <p:nvPr/>
+        </p:nvSpPr>
+        <p:spPr>
+          <a:xfrm>
+            <a:off x="4855464" y="4169664"/>
+            <a:ext cx="676656" cy="384048"/>
           </a:xfrm>
           <a:prstGeom prst="rect">
             <a:avLst/>
@@ -29736,7 +30213,7 @@
                 <a:ea typeface="Trebuchet MS" pitchFamily="34" charset="-122"/>
                 <a:cs typeface="Trebuchet MS" pitchFamily="34" charset="-120"/>
               </a:rPr>
-              <a:t>a</a:t>
+              <a:t>o</a:t>
             </a:r>
             <a:endParaRPr lang="en-US" sz="900" dirty="0"/>
           </a:p>
@@ -29744,14 +30221,14 @@
       </p:sp>
       <p:sp>
         <p:nvSpPr>
-          <p:cNvPr id="51" name="Shape 49"/>
-          <p:cNvSpPr/>
-          <p:nvPr/>
-        </p:nvSpPr>
-        <p:spPr>
-          <a:xfrm>
-            <a:off x="6668262" y="4169664"/>
-            <a:ext cx="685800" cy="384048"/>
+          <p:cNvPr id="55" name="Shape 53"/>
+          <p:cNvSpPr/>
+          <p:nvPr/>
+        </p:nvSpPr>
+        <p:spPr>
+          <a:xfrm>
+            <a:off x="5581498" y="4169664"/>
+            <a:ext cx="676656" cy="384048"/>
           </a:xfrm>
           <a:prstGeom prst="rect">
             <a:avLst>
@@ -29771,14 +30248,14 @@
       </p:sp>
       <p:sp>
         <p:nvSpPr>
-          <p:cNvPr id="52" name="Text 50"/>
-          <p:cNvSpPr/>
-          <p:nvPr/>
-        </p:nvSpPr>
-        <p:spPr>
-          <a:xfrm>
-            <a:off x="6668262" y="4169664"/>
-            <a:ext cx="685800" cy="384048"/>
+          <p:cNvPr id="56" name="Text 54"/>
+          <p:cNvSpPr/>
+          <p:nvPr/>
+        </p:nvSpPr>
+        <p:spPr>
+          <a:xfrm>
+            <a:off x="5581498" y="4169664"/>
+            <a:ext cx="676656" cy="384048"/>
           </a:xfrm>
           <a:prstGeom prst="rect">
             <a:avLst/>
@@ -29802,7 +30279,7 @@
                 <a:ea typeface="Trebuchet MS" pitchFamily="34" charset="-122"/>
                 <a:cs typeface="Trebuchet MS" pitchFamily="34" charset="-120"/>
               </a:rPr>
-              <a:t>th</a:t>
+              <a:t>p</a:t>
             </a:r>
             <a:endParaRPr lang="en-US" sz="900" dirty="0"/>
           </a:p>
@@ -29810,14 +30287,14 @@
       </p:sp>
       <p:sp>
         <p:nvSpPr>
-          <p:cNvPr id="53" name="Shape 51"/>
-          <p:cNvSpPr/>
-          <p:nvPr/>
-        </p:nvSpPr>
-        <p:spPr>
-          <a:xfrm>
-            <a:off x="7576947" y="4169664"/>
-            <a:ext cx="685800" cy="384048"/>
+          <p:cNvPr id="57" name="Shape 55"/>
+          <p:cNvSpPr/>
+          <p:nvPr/>
+        </p:nvSpPr>
+        <p:spPr>
+          <a:xfrm>
+            <a:off x="6307531" y="4169664"/>
+            <a:ext cx="676656" cy="384048"/>
           </a:xfrm>
           <a:prstGeom prst="rect">
             <a:avLst>
@@ -29837,14 +30314,14 @@
       </p:sp>
       <p:sp>
         <p:nvSpPr>
-          <p:cNvPr id="54" name="Text 52"/>
-          <p:cNvSpPr/>
-          <p:nvPr/>
-        </p:nvSpPr>
-        <p:spPr>
-          <a:xfrm>
-            <a:off x="7576947" y="4169664"/>
-            <a:ext cx="685800" cy="384048"/>
+          <p:cNvPr id="58" name="Text 56"/>
+          <p:cNvSpPr/>
+          <p:nvPr/>
+        </p:nvSpPr>
+        <p:spPr>
+          <a:xfrm>
+            <a:off x="6307531" y="4169664"/>
+            <a:ext cx="676656" cy="384048"/>
           </a:xfrm>
           <a:prstGeom prst="rect">
             <a:avLst/>
@@ -29868,6 +30345,138 @@
                 <a:ea typeface="Trebuchet MS" pitchFamily="34" charset="-122"/>
                 <a:cs typeface="Trebuchet MS" pitchFamily="34" charset="-120"/>
               </a:rPr>
+              <a:t>a</a:t>
+            </a:r>
+            <a:endParaRPr lang="en-US" sz="900" dirty="0"/>
+          </a:p>
+        </p:txBody>
+      </p:sp>
+      <p:sp>
+        <p:nvSpPr>
+          <p:cNvPr id="59" name="Shape 57"/>
+          <p:cNvSpPr/>
+          <p:nvPr/>
+        </p:nvSpPr>
+        <p:spPr>
+          <a:xfrm>
+            <a:off x="7033565" y="4169664"/>
+            <a:ext cx="676656" cy="384048"/>
+          </a:xfrm>
+          <a:prstGeom prst="rect">
+            <a:avLst>
+              <a:gd name="adj" fmla="val 9524"/>
+            </a:avLst>
+          </a:prstGeom>
+          <a:solidFill>
+            <a:srgbClr val="FFFFFF"/>
+          </a:solidFill>
+          <a:ln w="12700">
+            <a:solidFill>
+              <a:srgbClr val="DB2777"/>
+            </a:solidFill>
+            <a:prstDash val="solid"/>
+          </a:ln>
+        </p:spPr>
+      </p:sp>
+      <p:sp>
+        <p:nvSpPr>
+          <p:cNvPr id="60" name="Text 58"/>
+          <p:cNvSpPr/>
+          <p:nvPr/>
+        </p:nvSpPr>
+        <p:spPr>
+          <a:xfrm>
+            <a:off x="7033565" y="4169664"/>
+            <a:ext cx="676656" cy="384048"/>
+          </a:xfrm>
+          <a:prstGeom prst="rect">
+            <a:avLst/>
+          </a:prstGeom>
+          <a:noFill/>
+          <a:ln/>
+        </p:spPr>
+        <p:txBody>
+          <a:bodyPr wrap="square" lIns="0" tIns="0" rIns="0" bIns="0" rtlCol="0" anchor="ctr"/>
+          <a:lstStyle/>
+          <a:p>
+            <a:pPr algn="ctr" indent="0" marL="0">
+              <a:buNone/>
+            </a:pPr>
+            <a:r>
+              <a:rPr lang="en-US" sz="900" b="1" dirty="0">
+                <a:solidFill>
+                  <a:srgbClr val="9D174D"/>
+                </a:solidFill>
+                <a:latin typeface="Trebuchet MS" pitchFamily="34" charset="0"/>
+                <a:ea typeface="Trebuchet MS" pitchFamily="34" charset="-122"/>
+                <a:cs typeface="Trebuchet MS" pitchFamily="34" charset="-120"/>
+              </a:rPr>
+              <a:t>th</a:t>
+            </a:r>
+            <a:endParaRPr lang="en-US" sz="900" dirty="0"/>
+          </a:p>
+        </p:txBody>
+      </p:sp>
+      <p:sp>
+        <p:nvSpPr>
+          <p:cNvPr id="61" name="Shape 59"/>
+          <p:cNvSpPr/>
+          <p:nvPr/>
+        </p:nvSpPr>
+        <p:spPr>
+          <a:xfrm>
+            <a:off x="7759598" y="4169664"/>
+            <a:ext cx="676656" cy="384048"/>
+          </a:xfrm>
+          <a:prstGeom prst="rect">
+            <a:avLst>
+              <a:gd name="adj" fmla="val 9524"/>
+            </a:avLst>
+          </a:prstGeom>
+          <a:solidFill>
+            <a:srgbClr val="FFFFFF"/>
+          </a:solidFill>
+          <a:ln w="12700">
+            <a:solidFill>
+              <a:srgbClr val="DB2777"/>
+            </a:solidFill>
+            <a:prstDash val="solid"/>
+          </a:ln>
+        </p:spPr>
+      </p:sp>
+      <p:sp>
+        <p:nvSpPr>
+          <p:cNvPr id="62" name="Text 60"/>
+          <p:cNvSpPr/>
+          <p:nvPr/>
+        </p:nvSpPr>
+        <p:spPr>
+          <a:xfrm>
+            <a:off x="7759598" y="4169664"/>
+            <a:ext cx="676656" cy="384048"/>
+          </a:xfrm>
+          <a:prstGeom prst="rect">
+            <a:avLst/>
+          </a:prstGeom>
+          <a:noFill/>
+          <a:ln/>
+        </p:spPr>
+        <p:txBody>
+          <a:bodyPr wrap="square" lIns="0" tIns="0" rIns="0" bIns="0" rtlCol="0" anchor="ctr"/>
+          <a:lstStyle/>
+          <a:p>
+            <a:pPr algn="ctr" indent="0" marL="0">
+              <a:buNone/>
+            </a:pPr>
+            <a:r>
+              <a:rPr lang="en-US" sz="900" b="1" dirty="0">
+                <a:solidFill>
+                  <a:srgbClr val="9D174D"/>
+                </a:solidFill>
+                <a:latin typeface="Trebuchet MS" pitchFamily="34" charset="0"/>
+                <a:ea typeface="Trebuchet MS" pitchFamily="34" charset="-122"/>
+                <a:cs typeface="Trebuchet MS" pitchFamily="34" charset="-120"/>
+              </a:rPr>
               <a:t>y</a:t>
             </a:r>
             <a:endParaRPr lang="en-US" sz="900" dirty="0"/>
@@ -29876,14 +30485,14 @@
       </p:sp>
       <p:sp>
         <p:nvSpPr>
-          <p:cNvPr id="55" name="Text 53"/>
-          <p:cNvSpPr/>
-          <p:nvPr/>
-        </p:nvSpPr>
-        <p:spPr>
-          <a:xfrm>
-            <a:off x="7576947" y="4572000"/>
-            <a:ext cx="685800" cy="219456"/>
+          <p:cNvPr id="63" name="Text 61"/>
+          <p:cNvSpPr/>
+          <p:nvPr/>
+        </p:nvSpPr>
+        <p:spPr>
+          <a:xfrm>
+            <a:off x="7759598" y="4572000"/>
+            <a:ext cx="676656" cy="219456"/>
           </a:xfrm>
           <a:prstGeom prst="rect">
             <a:avLst/>
@@ -30338,7 +30947,7 @@
                 <a:ea typeface="Trebuchet MS" pitchFamily="34" charset="-122"/>
                 <a:cs typeface="Trebuchet MS" pitchFamily="34" charset="-120"/>
               </a:rPr>
-              <a:t>apathy</a:t>
+              <a:t>telepathy</a:t>
             </a:r>
             <a:endParaRPr lang="en-US" sz="2800" dirty="0"/>
           </a:p>
@@ -31165,7 +31774,7 @@
                 <a:ea typeface="Trebuchet MS" pitchFamily="34" charset="-122"/>
                 <a:cs typeface="Trebuchet MS" pitchFamily="34" charset="-120"/>
               </a:rPr>
-              <a:t>apathy</a:t>
+              <a:t>telepathy</a:t>
             </a:r>
             <a:endParaRPr lang="en-US" sz="2800" dirty="0"/>
           </a:p>
@@ -31304,7 +31913,7 @@
                 <a:ea typeface="Trebuchet MS" pitchFamily="34" charset="-122"/>
                 <a:cs typeface="Trebuchet MS" pitchFamily="34" charset="-120"/>
               </a:rPr>
-              <a:t>a</a:t>
+              <a:t>tele</a:t>
             </a:r>
             <a:endParaRPr lang="en-US" sz="1300" dirty="0"/>
           </a:p>
@@ -31343,7 +31952,7 @@
                 <a:ea typeface="Calibri" pitchFamily="34" charset="-122"/>
                 <a:cs typeface="Calibri" pitchFamily="34" charset="-120"/>
               </a:rPr>
-              <a:t>without, not</a:t>
+              <a:t>far, distant</a:t>
             </a:r>
             <a:endParaRPr lang="en-US" sz="850" dirty="0"/>
           </a:p>
@@ -31455,7 +32064,7 @@
                 <a:ea typeface="Calibri" pitchFamily="34" charset="-122"/>
                 <a:cs typeface="Calibri" pitchFamily="34" charset="-120"/>
               </a:rPr>
-              <a:t>feeling, suffering</a:t>
+              <a:t>feeling</a:t>
             </a:r>
             <a:endParaRPr lang="en-US" sz="850" dirty="0"/>
           </a:p>
@@ -31567,7 +32176,7 @@
                 <a:ea typeface="Calibri" pitchFamily="34" charset="-122"/>
                 <a:cs typeface="Calibri" pitchFamily="34" charset="-120"/>
               </a:rPr>
-              <a:t>forms a noun or adjective</a:t>
+              <a:t>state or quality of</a:t>
             </a:r>
             <a:endParaRPr lang="en-US" sz="850" dirty="0"/>
           </a:p>
@@ -32262,7 +32871,7 @@
                 <a:ea typeface="Trebuchet MS" pitchFamily="34" charset="-122"/>
                 <a:cs typeface="Trebuchet MS" pitchFamily="34" charset="-120"/>
               </a:rPr>
-              <a:t>apathy</a:t>
+              <a:t>telepathy</a:t>
             </a:r>
             <a:endParaRPr lang="en-US" sz="2800" dirty="0"/>
           </a:p>
@@ -32401,7 +33010,7 @@
                 <a:ea typeface="Trebuchet MS" pitchFamily="34" charset="-122"/>
                 <a:cs typeface="Trebuchet MS" pitchFamily="34" charset="-120"/>
               </a:rPr>
-              <a:t>a</a:t>
+              <a:t>tele</a:t>
             </a:r>
             <a:endParaRPr lang="en-US" sz="1300" dirty="0"/>
           </a:p>
@@ -32440,7 +33049,7 @@
                 <a:ea typeface="Calibri" pitchFamily="34" charset="-122"/>
                 <a:cs typeface="Calibri" pitchFamily="34" charset="-120"/>
               </a:rPr>
-              <a:t>without, not</a:t>
+              <a:t>far, distant</a:t>
             </a:r>
             <a:endParaRPr lang="en-US" sz="850" dirty="0"/>
           </a:p>
@@ -32552,7 +33161,7 @@
                 <a:ea typeface="Calibri" pitchFamily="34" charset="-122"/>
                 <a:cs typeface="Calibri" pitchFamily="34" charset="-120"/>
               </a:rPr>
-              <a:t>feeling, suffering</a:t>
+              <a:t>feeling</a:t>
             </a:r>
             <a:endParaRPr lang="en-US" sz="850" dirty="0"/>
           </a:p>
@@ -32664,7 +33273,7 @@
                 <a:ea typeface="Calibri" pitchFamily="34" charset="-122"/>
                 <a:cs typeface="Calibri" pitchFamily="34" charset="-120"/>
               </a:rPr>
-              <a:t>forms a noun or adjective</a:t>
+              <a:t>state or quality of</a:t>
             </a:r>
             <a:endParaRPr lang="en-US" sz="850" dirty="0"/>
           </a:p>
@@ -32771,8 +33380,8 @@
         </p:nvSpPr>
         <p:spPr>
           <a:xfrm>
-            <a:off x="2313432" y="3364992"/>
-            <a:ext cx="1645920" cy="475488"/>
+            <a:off x="1975104" y="3364992"/>
+            <a:ext cx="1554480" cy="475488"/>
           </a:xfrm>
           <a:prstGeom prst="rect">
             <a:avLst>
@@ -32798,8 +33407,8 @@
         </p:nvSpPr>
         <p:spPr>
           <a:xfrm>
-            <a:off x="2313432" y="3364992"/>
-            <a:ext cx="1645920" cy="475488"/>
+            <a:off x="1975104" y="3364992"/>
+            <a:ext cx="1554480" cy="475488"/>
           </a:xfrm>
           <a:prstGeom prst="rect">
             <a:avLst/>
@@ -32823,7 +33432,7 @@
                 <a:ea typeface="Trebuchet MS" pitchFamily="34" charset="-122"/>
                 <a:cs typeface="Trebuchet MS" pitchFamily="34" charset="-120"/>
               </a:rPr>
-              <a:t>a</a:t>
+              <a:t>te</a:t>
             </a:r>
             <a:endParaRPr lang="en-US" sz="1400" dirty="0"/>
           </a:p>
@@ -32837,8 +33446,8 @@
         </p:nvSpPr>
         <p:spPr>
           <a:xfrm>
-            <a:off x="3959352" y="3364992"/>
-            <a:ext cx="411480" cy="475488"/>
+            <a:off x="3529584" y="3364992"/>
+            <a:ext cx="73152" cy="475488"/>
           </a:xfrm>
           <a:prstGeom prst="rect">
             <a:avLst/>
@@ -32876,8 +33485,8 @@
         </p:nvSpPr>
         <p:spPr>
           <a:xfrm>
-            <a:off x="4370832" y="3364992"/>
-            <a:ext cx="1645920" cy="475488"/>
+            <a:off x="3602736" y="3364992"/>
+            <a:ext cx="1554480" cy="475488"/>
           </a:xfrm>
           <a:prstGeom prst="rect">
             <a:avLst>
@@ -32903,8 +33512,8 @@
         </p:nvSpPr>
         <p:spPr>
           <a:xfrm>
-            <a:off x="4370832" y="3364992"/>
-            <a:ext cx="1645920" cy="475488"/>
+            <a:off x="3602736" y="3364992"/>
+            <a:ext cx="1554480" cy="475488"/>
           </a:xfrm>
           <a:prstGeom prst="rect">
             <a:avLst/>
@@ -32928,7 +33537,7 @@
                 <a:ea typeface="Trebuchet MS" pitchFamily="34" charset="-122"/>
                 <a:cs typeface="Trebuchet MS" pitchFamily="34" charset="-120"/>
               </a:rPr>
-              <a:t>pa</a:t>
+              <a:t>le</a:t>
             </a:r>
             <a:endParaRPr lang="en-US" sz="1400" dirty="0"/>
           </a:p>
@@ -32942,8 +33551,8 @@
         </p:nvSpPr>
         <p:spPr>
           <a:xfrm>
-            <a:off x="6016752" y="3364992"/>
-            <a:ext cx="411480" cy="475488"/>
+            <a:off x="5157216" y="3364992"/>
+            <a:ext cx="73152" cy="475488"/>
           </a:xfrm>
           <a:prstGeom prst="rect">
             <a:avLst/>
@@ -32981,8 +33590,8 @@
         </p:nvSpPr>
         <p:spPr>
           <a:xfrm>
-            <a:off x="6428232" y="3364992"/>
-            <a:ext cx="1645920" cy="475488"/>
+            <a:off x="5230368" y="3364992"/>
+            <a:ext cx="1554480" cy="475488"/>
           </a:xfrm>
           <a:prstGeom prst="rect">
             <a:avLst>
@@ -33008,8 +33617,8 @@
         </p:nvSpPr>
         <p:spPr>
           <a:xfrm>
-            <a:off x="6428232" y="3364992"/>
-            <a:ext cx="1645920" cy="475488"/>
+            <a:off x="5230368" y="3364992"/>
+            <a:ext cx="1554480" cy="475488"/>
           </a:xfrm>
           <a:prstGeom prst="rect">
             <a:avLst/>
@@ -33033,6 +33642,111 @@
                 <a:ea typeface="Trebuchet MS" pitchFamily="34" charset="-122"/>
                 <a:cs typeface="Trebuchet MS" pitchFamily="34" charset="-120"/>
               </a:rPr>
+              <a:t>pa</a:t>
+            </a:r>
+            <a:endParaRPr lang="en-US" sz="1400" dirty="0"/>
+          </a:p>
+        </p:txBody>
+      </p:sp>
+      <p:sp>
+        <p:nvSpPr>
+          <p:cNvPr id="36" name="Text 34"/>
+          <p:cNvSpPr/>
+          <p:nvPr/>
+        </p:nvSpPr>
+        <p:spPr>
+          <a:xfrm>
+            <a:off x="6784848" y="3364992"/>
+            <a:ext cx="73152" cy="475488"/>
+          </a:xfrm>
+          <a:prstGeom prst="rect">
+            <a:avLst/>
+          </a:prstGeom>
+          <a:noFill/>
+          <a:ln/>
+        </p:spPr>
+        <p:txBody>
+          <a:bodyPr wrap="square" lIns="0" tIns="0" rIns="0" bIns="0" rtlCol="0" anchor="ctr"/>
+          <a:lstStyle/>
+          <a:p>
+            <a:pPr algn="ctr" indent="0" marL="0">
+              <a:buNone/>
+            </a:pPr>
+            <a:r>
+              <a:rPr lang="en-US" sz="1600" b="1" dirty="0">
+                <a:solidFill>
+                  <a:srgbClr val="0D9488"/>
+                </a:solidFill>
+                <a:latin typeface="Trebuchet MS" pitchFamily="34" charset="0"/>
+                <a:ea typeface="Trebuchet MS" pitchFamily="34" charset="-122"/>
+                <a:cs typeface="Trebuchet MS" pitchFamily="34" charset="-120"/>
+              </a:rPr>
+              <a:t>·</a:t>
+            </a:r>
+            <a:endParaRPr lang="en-US" sz="1600" dirty="0"/>
+          </a:p>
+        </p:txBody>
+      </p:sp>
+      <p:sp>
+        <p:nvSpPr>
+          <p:cNvPr id="37" name="Shape 35"/>
+          <p:cNvSpPr/>
+          <p:nvPr/>
+        </p:nvSpPr>
+        <p:spPr>
+          <a:xfrm>
+            <a:off x="6858000" y="3364992"/>
+            <a:ext cx="1554480" cy="475488"/>
+          </a:xfrm>
+          <a:prstGeom prst="rect">
+            <a:avLst>
+              <a:gd name="adj" fmla="val 9615"/>
+            </a:avLst>
+          </a:prstGeom>
+          <a:solidFill>
+            <a:srgbClr val="FFFFFF"/>
+          </a:solidFill>
+          <a:ln w="12700">
+            <a:solidFill>
+              <a:srgbClr val="0D9488"/>
+            </a:solidFill>
+            <a:prstDash val="solid"/>
+          </a:ln>
+        </p:spPr>
+      </p:sp>
+      <p:sp>
+        <p:nvSpPr>
+          <p:cNvPr id="38" name="Text 36"/>
+          <p:cNvSpPr/>
+          <p:nvPr/>
+        </p:nvSpPr>
+        <p:spPr>
+          <a:xfrm>
+            <a:off x="6858000" y="3364992"/>
+            <a:ext cx="1554480" cy="475488"/>
+          </a:xfrm>
+          <a:prstGeom prst="rect">
+            <a:avLst/>
+          </a:prstGeom>
+          <a:noFill/>
+          <a:ln/>
+        </p:spPr>
+        <p:txBody>
+          <a:bodyPr wrap="square" lIns="0" tIns="0" rIns="0" bIns="0" rtlCol="0" anchor="ctr"/>
+          <a:lstStyle/>
+          <a:p>
+            <a:pPr algn="ctr" indent="0" marL="0">
+              <a:buNone/>
+            </a:pPr>
+            <a:r>
+              <a:rPr lang="en-US" sz="1400" b="1" dirty="0">
+                <a:solidFill>
+                  <a:srgbClr val="0D9488"/>
+                </a:solidFill>
+                <a:latin typeface="Trebuchet MS" pitchFamily="34" charset="0"/>
+                <a:ea typeface="Trebuchet MS" pitchFamily="34" charset="-122"/>
+                <a:cs typeface="Trebuchet MS" pitchFamily="34" charset="-120"/>
+              </a:rPr>
               <a:t>thy</a:t>
             </a:r>
             <a:endParaRPr lang="en-US" sz="1400" dirty="0"/>
@@ -33041,7 +33755,7 @@
       </p:sp>
       <p:sp>
         <p:nvSpPr>
-          <p:cNvPr id="36" name="Shape 34"/>
+          <p:cNvPr id="39" name="Shape 37"/>
           <p:cNvSpPr/>
           <p:nvPr/>
         </p:nvSpPr>
@@ -33068,7 +33782,7 @@
       </p:sp>
       <p:sp>
         <p:nvSpPr>
-          <p:cNvPr id="37" name="Text 35"/>
+          <p:cNvPr id="40" name="Text 38"/>
           <p:cNvSpPr/>
           <p:nvPr/>
         </p:nvSpPr>
@@ -33107,7 +33821,7 @@
       </p:sp>
       <p:sp>
         <p:nvSpPr>
-          <p:cNvPr id="38" name="Shape 36"/>
+          <p:cNvPr id="41" name="Shape 39"/>
           <p:cNvSpPr/>
           <p:nvPr/>
         </p:nvSpPr>
@@ -33134,7 +33848,7 @@
       </p:sp>
       <p:sp>
         <p:nvSpPr>
-          <p:cNvPr id="39" name="Text 37"/>
+          <p:cNvPr id="42" name="Text 40"/>
           <p:cNvSpPr/>
           <p:nvPr/>
         </p:nvSpPr>
@@ -33596,7 +34310,7 @@
                 <a:ea typeface="Trebuchet MS" pitchFamily="34" charset="-122"/>
                 <a:cs typeface="Trebuchet MS" pitchFamily="34" charset="-120"/>
               </a:rPr>
-              <a:t>apathy</a:t>
+              <a:t>telepathy</a:t>
             </a:r>
             <a:endParaRPr lang="en-US" sz="2800" dirty="0"/>
           </a:p>
@@ -33735,7 +34449,7 @@
                 <a:ea typeface="Trebuchet MS" pitchFamily="34" charset="-122"/>
                 <a:cs typeface="Trebuchet MS" pitchFamily="34" charset="-120"/>
               </a:rPr>
-              <a:t>a</a:t>
+              <a:t>tele</a:t>
             </a:r>
             <a:endParaRPr lang="en-US" sz="1300" dirty="0"/>
           </a:p>
@@ -33774,7 +34488,7 @@
                 <a:ea typeface="Calibri" pitchFamily="34" charset="-122"/>
                 <a:cs typeface="Calibri" pitchFamily="34" charset="-120"/>
               </a:rPr>
-              <a:t>without, not</a:t>
+              <a:t>far, distant</a:t>
             </a:r>
             <a:endParaRPr lang="en-US" sz="850" dirty="0"/>
           </a:p>
@@ -33886,7 +34600,7 @@
                 <a:ea typeface="Calibri" pitchFamily="34" charset="-122"/>
                 <a:cs typeface="Calibri" pitchFamily="34" charset="-120"/>
               </a:rPr>
-              <a:t>feeling, suffering</a:t>
+              <a:t>feeling</a:t>
             </a:r>
             <a:endParaRPr lang="en-US" sz="850" dirty="0"/>
           </a:p>
@@ -33998,7 +34712,7 @@
                 <a:ea typeface="Calibri" pitchFamily="34" charset="-122"/>
                 <a:cs typeface="Calibri" pitchFamily="34" charset="-120"/>
               </a:rPr>
-              <a:t>forms a noun or adjective</a:t>
+              <a:t>state or quality of</a:t>
             </a:r>
             <a:endParaRPr lang="en-US" sz="850" dirty="0"/>
           </a:p>
@@ -34105,8 +34819,8 @@
         </p:nvSpPr>
         <p:spPr>
           <a:xfrm>
-            <a:off x="2313432" y="3364992"/>
-            <a:ext cx="1645920" cy="475488"/>
+            <a:off x="1975104" y="3364992"/>
+            <a:ext cx="1554480" cy="475488"/>
           </a:xfrm>
           <a:prstGeom prst="rect">
             <a:avLst>
@@ -34132,8 +34846,8 @@
         </p:nvSpPr>
         <p:spPr>
           <a:xfrm>
-            <a:off x="2313432" y="3364992"/>
-            <a:ext cx="1645920" cy="475488"/>
+            <a:off x="1975104" y="3364992"/>
+            <a:ext cx="1554480" cy="475488"/>
           </a:xfrm>
           <a:prstGeom prst="rect">
             <a:avLst/>
@@ -34157,7 +34871,7 @@
                 <a:ea typeface="Trebuchet MS" pitchFamily="34" charset="-122"/>
                 <a:cs typeface="Trebuchet MS" pitchFamily="34" charset="-120"/>
               </a:rPr>
-              <a:t>a</a:t>
+              <a:t>te</a:t>
             </a:r>
             <a:endParaRPr lang="en-US" sz="1400" dirty="0"/>
           </a:p>
@@ -34171,8 +34885,8 @@
         </p:nvSpPr>
         <p:spPr>
           <a:xfrm>
-            <a:off x="3959352" y="3364992"/>
-            <a:ext cx="411480" cy="475488"/>
+            <a:off x="3529584" y="3364992"/>
+            <a:ext cx="73152" cy="475488"/>
           </a:xfrm>
           <a:prstGeom prst="rect">
             <a:avLst/>
@@ -34210,8 +34924,8 @@
         </p:nvSpPr>
         <p:spPr>
           <a:xfrm>
-            <a:off x="4370832" y="3364992"/>
-            <a:ext cx="1645920" cy="475488"/>
+            <a:off x="3602736" y="3364992"/>
+            <a:ext cx="1554480" cy="475488"/>
           </a:xfrm>
           <a:prstGeom prst="rect">
             <a:avLst>
@@ -34237,8 +34951,8 @@
         </p:nvSpPr>
         <p:spPr>
           <a:xfrm>
-            <a:off x="4370832" y="3364992"/>
-            <a:ext cx="1645920" cy="475488"/>
+            <a:off x="3602736" y="3364992"/>
+            <a:ext cx="1554480" cy="475488"/>
           </a:xfrm>
           <a:prstGeom prst="rect">
             <a:avLst/>
@@ -34262,7 +34976,7 @@
                 <a:ea typeface="Trebuchet MS" pitchFamily="34" charset="-122"/>
                 <a:cs typeface="Trebuchet MS" pitchFamily="34" charset="-120"/>
               </a:rPr>
-              <a:t>pa</a:t>
+              <a:t>le</a:t>
             </a:r>
             <a:endParaRPr lang="en-US" sz="1400" dirty="0"/>
           </a:p>
@@ -34276,8 +34990,8 @@
         </p:nvSpPr>
         <p:spPr>
           <a:xfrm>
-            <a:off x="6016752" y="3364992"/>
-            <a:ext cx="411480" cy="475488"/>
+            <a:off x="5157216" y="3364992"/>
+            <a:ext cx="73152" cy="475488"/>
           </a:xfrm>
           <a:prstGeom prst="rect">
             <a:avLst/>
@@ -34315,8 +35029,8 @@
         </p:nvSpPr>
         <p:spPr>
           <a:xfrm>
-            <a:off x="6428232" y="3364992"/>
-            <a:ext cx="1645920" cy="475488"/>
+            <a:off x="5230368" y="3364992"/>
+            <a:ext cx="1554480" cy="475488"/>
           </a:xfrm>
           <a:prstGeom prst="rect">
             <a:avLst>
@@ -34342,8 +35056,8 @@
         </p:nvSpPr>
         <p:spPr>
           <a:xfrm>
-            <a:off x="6428232" y="3364992"/>
-            <a:ext cx="1645920" cy="475488"/>
+            <a:off x="5230368" y="3364992"/>
+            <a:ext cx="1554480" cy="475488"/>
           </a:xfrm>
           <a:prstGeom prst="rect">
             <a:avLst/>
@@ -34367,6 +35081,111 @@
                 <a:ea typeface="Trebuchet MS" pitchFamily="34" charset="-122"/>
                 <a:cs typeface="Trebuchet MS" pitchFamily="34" charset="-120"/>
               </a:rPr>
+              <a:t>pa</a:t>
+            </a:r>
+            <a:endParaRPr lang="en-US" sz="1400" dirty="0"/>
+          </a:p>
+        </p:txBody>
+      </p:sp>
+      <p:sp>
+        <p:nvSpPr>
+          <p:cNvPr id="36" name="Text 34"/>
+          <p:cNvSpPr/>
+          <p:nvPr/>
+        </p:nvSpPr>
+        <p:spPr>
+          <a:xfrm>
+            <a:off x="6784848" y="3364992"/>
+            <a:ext cx="73152" cy="475488"/>
+          </a:xfrm>
+          <a:prstGeom prst="rect">
+            <a:avLst/>
+          </a:prstGeom>
+          <a:noFill/>
+          <a:ln/>
+        </p:spPr>
+        <p:txBody>
+          <a:bodyPr wrap="square" lIns="0" tIns="0" rIns="0" bIns="0" rtlCol="0" anchor="ctr"/>
+          <a:lstStyle/>
+          <a:p>
+            <a:pPr algn="ctr" indent="0" marL="0">
+              <a:buNone/>
+            </a:pPr>
+            <a:r>
+              <a:rPr lang="en-US" sz="1600" b="1" dirty="0">
+                <a:solidFill>
+                  <a:srgbClr val="0D9488"/>
+                </a:solidFill>
+                <a:latin typeface="Trebuchet MS" pitchFamily="34" charset="0"/>
+                <a:ea typeface="Trebuchet MS" pitchFamily="34" charset="-122"/>
+                <a:cs typeface="Trebuchet MS" pitchFamily="34" charset="-120"/>
+              </a:rPr>
+              <a:t>·</a:t>
+            </a:r>
+            <a:endParaRPr lang="en-US" sz="1600" dirty="0"/>
+          </a:p>
+        </p:txBody>
+      </p:sp>
+      <p:sp>
+        <p:nvSpPr>
+          <p:cNvPr id="37" name="Shape 35"/>
+          <p:cNvSpPr/>
+          <p:nvPr/>
+        </p:nvSpPr>
+        <p:spPr>
+          <a:xfrm>
+            <a:off x="6858000" y="3364992"/>
+            <a:ext cx="1554480" cy="475488"/>
+          </a:xfrm>
+          <a:prstGeom prst="rect">
+            <a:avLst>
+              <a:gd name="adj" fmla="val 9615"/>
+            </a:avLst>
+          </a:prstGeom>
+          <a:solidFill>
+            <a:srgbClr val="FFFFFF"/>
+          </a:solidFill>
+          <a:ln w="12700">
+            <a:solidFill>
+              <a:srgbClr val="0D9488"/>
+            </a:solidFill>
+            <a:prstDash val="solid"/>
+          </a:ln>
+        </p:spPr>
+      </p:sp>
+      <p:sp>
+        <p:nvSpPr>
+          <p:cNvPr id="38" name="Text 36"/>
+          <p:cNvSpPr/>
+          <p:nvPr/>
+        </p:nvSpPr>
+        <p:spPr>
+          <a:xfrm>
+            <a:off x="6858000" y="3364992"/>
+            <a:ext cx="1554480" cy="475488"/>
+          </a:xfrm>
+          <a:prstGeom prst="rect">
+            <a:avLst/>
+          </a:prstGeom>
+          <a:noFill/>
+          <a:ln/>
+        </p:spPr>
+        <p:txBody>
+          <a:bodyPr wrap="square" lIns="0" tIns="0" rIns="0" bIns="0" rtlCol="0" anchor="ctr"/>
+          <a:lstStyle/>
+          <a:p>
+            <a:pPr algn="ctr" indent="0" marL="0">
+              <a:buNone/>
+            </a:pPr>
+            <a:r>
+              <a:rPr lang="en-US" sz="1400" b="1" dirty="0">
+                <a:solidFill>
+                  <a:srgbClr val="0D9488"/>
+                </a:solidFill>
+                <a:latin typeface="Trebuchet MS" pitchFamily="34" charset="0"/>
+                <a:ea typeface="Trebuchet MS" pitchFamily="34" charset="-122"/>
+                <a:cs typeface="Trebuchet MS" pitchFamily="34" charset="-120"/>
+              </a:rPr>
               <a:t>thy</a:t>
             </a:r>
             <a:endParaRPr lang="en-US" sz="1400" dirty="0"/>
@@ -34375,7 +35194,7 @@
       </p:sp>
       <p:sp>
         <p:nvSpPr>
-          <p:cNvPr id="36" name="Shape 34"/>
+          <p:cNvPr id="39" name="Shape 37"/>
           <p:cNvSpPr/>
           <p:nvPr/>
         </p:nvSpPr>
@@ -34402,7 +35221,7 @@
       </p:sp>
       <p:sp>
         <p:nvSpPr>
-          <p:cNvPr id="37" name="Text 35"/>
+          <p:cNvPr id="40" name="Text 38"/>
           <p:cNvSpPr/>
           <p:nvPr/>
         </p:nvSpPr>
@@ -34441,7 +35260,7 @@
       </p:sp>
       <p:sp>
         <p:nvSpPr>
-          <p:cNvPr id="38" name="Shape 36"/>
+          <p:cNvPr id="41" name="Shape 39"/>
           <p:cNvSpPr/>
           <p:nvPr/>
         </p:nvSpPr>
@@ -34468,13 +35287,13 @@
       </p:sp>
       <p:sp>
         <p:nvSpPr>
-          <p:cNvPr id="39" name="Shape 37"/>
-          <p:cNvSpPr/>
-          <p:nvPr/>
-        </p:nvSpPr>
-        <p:spPr>
-          <a:xfrm>
-            <a:off x="2427732" y="4169664"/>
+          <p:cNvPr id="42" name="Shape 40"/>
+          <p:cNvSpPr/>
+          <p:nvPr/>
+        </p:nvSpPr>
+        <p:spPr>
+          <a:xfrm>
+            <a:off x="2023872" y="4169664"/>
             <a:ext cx="685800" cy="384048"/>
           </a:xfrm>
           <a:prstGeom prst="rect">
@@ -34495,13 +35314,13 @@
       </p:sp>
       <p:sp>
         <p:nvSpPr>
-          <p:cNvPr id="40" name="Text 38"/>
-          <p:cNvSpPr/>
-          <p:nvPr/>
-        </p:nvSpPr>
-        <p:spPr>
-          <a:xfrm>
-            <a:off x="2427732" y="4169664"/>
+          <p:cNvPr id="43" name="Text 41"/>
+          <p:cNvSpPr/>
+          <p:nvPr/>
+        </p:nvSpPr>
+        <p:spPr>
+          <a:xfrm>
+            <a:off x="2023872" y="4169664"/>
             <a:ext cx="685800" cy="384048"/>
           </a:xfrm>
           <a:prstGeom prst="rect">
@@ -34526,7 +35345,7 @@
                 <a:ea typeface="Trebuchet MS" pitchFamily="34" charset="-122"/>
                 <a:cs typeface="Trebuchet MS" pitchFamily="34" charset="-120"/>
               </a:rPr>
-              <a:t>a</a:t>
+              <a:t>t</a:t>
             </a:r>
             <a:endParaRPr lang="en-US" sz="900" dirty="0"/>
           </a:p>
@@ -34534,13 +35353,13 @@
       </p:sp>
       <p:sp>
         <p:nvSpPr>
-          <p:cNvPr id="41" name="Shape 39"/>
-          <p:cNvSpPr/>
-          <p:nvPr/>
-        </p:nvSpPr>
-        <p:spPr>
-          <a:xfrm>
-            <a:off x="3639312" y="4169664"/>
+          <p:cNvPr id="44" name="Shape 42"/>
+          <p:cNvSpPr/>
+          <p:nvPr/>
+        </p:nvSpPr>
+        <p:spPr>
+          <a:xfrm>
+            <a:off x="2831592" y="4169664"/>
             <a:ext cx="685800" cy="384048"/>
           </a:xfrm>
           <a:prstGeom prst="rect">
@@ -34561,13 +35380,13 @@
       </p:sp>
       <p:sp>
         <p:nvSpPr>
-          <p:cNvPr id="42" name="Text 40"/>
-          <p:cNvSpPr/>
-          <p:nvPr/>
-        </p:nvSpPr>
-        <p:spPr>
-          <a:xfrm>
-            <a:off x="3639312" y="4169664"/>
+          <p:cNvPr id="45" name="Text 43"/>
+          <p:cNvSpPr/>
+          <p:nvPr/>
+        </p:nvSpPr>
+        <p:spPr>
+          <a:xfrm>
+            <a:off x="2831592" y="4169664"/>
             <a:ext cx="685800" cy="384048"/>
           </a:xfrm>
           <a:prstGeom prst="rect">
@@ -34592,7 +35411,7 @@
                 <a:ea typeface="Trebuchet MS" pitchFamily="34" charset="-122"/>
                 <a:cs typeface="Trebuchet MS" pitchFamily="34" charset="-120"/>
               </a:rPr>
-              <a:t>p</a:t>
+              <a:t>e</a:t>
             </a:r>
             <a:endParaRPr lang="en-US" sz="900" dirty="0"/>
           </a:p>
@@ -34600,13 +35419,13 @@
       </p:sp>
       <p:sp>
         <p:nvSpPr>
-          <p:cNvPr id="43" name="Shape 41"/>
-          <p:cNvSpPr/>
-          <p:nvPr/>
-        </p:nvSpPr>
-        <p:spPr>
-          <a:xfrm>
-            <a:off x="4850892" y="4169664"/>
+          <p:cNvPr id="46" name="Shape 44"/>
+          <p:cNvSpPr/>
+          <p:nvPr/>
+        </p:nvSpPr>
+        <p:spPr>
+          <a:xfrm>
+            <a:off x="3639312" y="4169664"/>
             <a:ext cx="685800" cy="384048"/>
           </a:xfrm>
           <a:prstGeom prst="rect">
@@ -34627,13 +35446,13 @@
       </p:sp>
       <p:sp>
         <p:nvSpPr>
-          <p:cNvPr id="44" name="Text 42"/>
-          <p:cNvSpPr/>
-          <p:nvPr/>
-        </p:nvSpPr>
-        <p:spPr>
-          <a:xfrm>
-            <a:off x="4850892" y="4169664"/>
+          <p:cNvPr id="47" name="Text 45"/>
+          <p:cNvSpPr/>
+          <p:nvPr/>
+        </p:nvSpPr>
+        <p:spPr>
+          <a:xfrm>
+            <a:off x="3639312" y="4169664"/>
             <a:ext cx="685800" cy="384048"/>
           </a:xfrm>
           <a:prstGeom prst="rect">
@@ -34658,7 +35477,7 @@
                 <a:ea typeface="Trebuchet MS" pitchFamily="34" charset="-122"/>
                 <a:cs typeface="Trebuchet MS" pitchFamily="34" charset="-120"/>
               </a:rPr>
-              <a:t>a</a:t>
+              <a:t>l</a:t>
             </a:r>
             <a:endParaRPr lang="en-US" sz="900" dirty="0"/>
           </a:p>
@@ -34666,13 +35485,13 @@
       </p:sp>
       <p:sp>
         <p:nvSpPr>
-          <p:cNvPr id="45" name="Shape 43"/>
-          <p:cNvSpPr/>
-          <p:nvPr/>
-        </p:nvSpPr>
-        <p:spPr>
-          <a:xfrm>
-            <a:off x="6062472" y="4169664"/>
+          <p:cNvPr id="48" name="Shape 46"/>
+          <p:cNvSpPr/>
+          <p:nvPr/>
+        </p:nvSpPr>
+        <p:spPr>
+          <a:xfrm>
+            <a:off x="4447032" y="4169664"/>
             <a:ext cx="685800" cy="384048"/>
           </a:xfrm>
           <a:prstGeom prst="rect">
@@ -34693,13 +35512,13 @@
       </p:sp>
       <p:sp>
         <p:nvSpPr>
-          <p:cNvPr id="46" name="Text 44"/>
-          <p:cNvSpPr/>
-          <p:nvPr/>
-        </p:nvSpPr>
-        <p:spPr>
-          <a:xfrm>
-            <a:off x="6062472" y="4169664"/>
+          <p:cNvPr id="49" name="Text 47"/>
+          <p:cNvSpPr/>
+          <p:nvPr/>
+        </p:nvSpPr>
+        <p:spPr>
+          <a:xfrm>
+            <a:off x="4447032" y="4169664"/>
             <a:ext cx="685800" cy="384048"/>
           </a:xfrm>
           <a:prstGeom prst="rect">
@@ -34724,7 +35543,7 @@
                 <a:ea typeface="Trebuchet MS" pitchFamily="34" charset="-122"/>
                 <a:cs typeface="Trebuchet MS" pitchFamily="34" charset="-120"/>
               </a:rPr>
-              <a:t>th</a:t>
+              <a:t>e</a:t>
             </a:r>
             <a:endParaRPr lang="en-US" sz="900" dirty="0"/>
           </a:p>
@@ -34732,13 +35551,13 @@
       </p:sp>
       <p:sp>
         <p:nvSpPr>
-          <p:cNvPr id="47" name="Shape 45"/>
-          <p:cNvSpPr/>
-          <p:nvPr/>
-        </p:nvSpPr>
-        <p:spPr>
-          <a:xfrm>
-            <a:off x="7274052" y="4169664"/>
+          <p:cNvPr id="50" name="Shape 48"/>
+          <p:cNvSpPr/>
+          <p:nvPr/>
+        </p:nvSpPr>
+        <p:spPr>
+          <a:xfrm>
+            <a:off x="5254752" y="4169664"/>
             <a:ext cx="685800" cy="384048"/>
           </a:xfrm>
           <a:prstGeom prst="rect">
@@ -34759,13 +35578,13 @@
       </p:sp>
       <p:sp>
         <p:nvSpPr>
-          <p:cNvPr id="48" name="Text 46"/>
-          <p:cNvSpPr/>
-          <p:nvPr/>
-        </p:nvSpPr>
-        <p:spPr>
-          <a:xfrm>
-            <a:off x="7274052" y="4169664"/>
+          <p:cNvPr id="51" name="Text 49"/>
+          <p:cNvSpPr/>
+          <p:nvPr/>
+        </p:nvSpPr>
+        <p:spPr>
+          <a:xfrm>
+            <a:off x="5254752" y="4169664"/>
             <a:ext cx="685800" cy="384048"/>
           </a:xfrm>
           <a:prstGeom prst="rect">
@@ -34790,6 +35609,204 @@
                 <a:ea typeface="Trebuchet MS" pitchFamily="34" charset="-122"/>
                 <a:cs typeface="Trebuchet MS" pitchFamily="34" charset="-120"/>
               </a:rPr>
+              <a:t>p</a:t>
+            </a:r>
+            <a:endParaRPr lang="en-US" sz="900" dirty="0"/>
+          </a:p>
+        </p:txBody>
+      </p:sp>
+      <p:sp>
+        <p:nvSpPr>
+          <p:cNvPr id="52" name="Shape 50"/>
+          <p:cNvSpPr/>
+          <p:nvPr/>
+        </p:nvSpPr>
+        <p:spPr>
+          <a:xfrm>
+            <a:off x="6062472" y="4169664"/>
+            <a:ext cx="685800" cy="384048"/>
+          </a:xfrm>
+          <a:prstGeom prst="rect">
+            <a:avLst>
+              <a:gd name="adj" fmla="val 9524"/>
+            </a:avLst>
+          </a:prstGeom>
+          <a:solidFill>
+            <a:srgbClr val="FFFFFF"/>
+          </a:solidFill>
+          <a:ln w="12700">
+            <a:solidFill>
+              <a:srgbClr val="DB2777"/>
+            </a:solidFill>
+            <a:prstDash val="solid"/>
+          </a:ln>
+        </p:spPr>
+      </p:sp>
+      <p:sp>
+        <p:nvSpPr>
+          <p:cNvPr id="53" name="Text 51"/>
+          <p:cNvSpPr/>
+          <p:nvPr/>
+        </p:nvSpPr>
+        <p:spPr>
+          <a:xfrm>
+            <a:off x="6062472" y="4169664"/>
+            <a:ext cx="685800" cy="384048"/>
+          </a:xfrm>
+          <a:prstGeom prst="rect">
+            <a:avLst/>
+          </a:prstGeom>
+          <a:noFill/>
+          <a:ln/>
+        </p:spPr>
+        <p:txBody>
+          <a:bodyPr wrap="square" lIns="0" tIns="0" rIns="0" bIns="0" rtlCol="0" anchor="ctr"/>
+          <a:lstStyle/>
+          <a:p>
+            <a:pPr algn="ctr" indent="0" marL="0">
+              <a:buNone/>
+            </a:pPr>
+            <a:r>
+              <a:rPr lang="en-US" sz="900" b="1" dirty="0">
+                <a:solidFill>
+                  <a:srgbClr val="9D174D"/>
+                </a:solidFill>
+                <a:latin typeface="Trebuchet MS" pitchFamily="34" charset="0"/>
+                <a:ea typeface="Trebuchet MS" pitchFamily="34" charset="-122"/>
+                <a:cs typeface="Trebuchet MS" pitchFamily="34" charset="-120"/>
+              </a:rPr>
+              <a:t>a</a:t>
+            </a:r>
+            <a:endParaRPr lang="en-US" sz="900" dirty="0"/>
+          </a:p>
+        </p:txBody>
+      </p:sp>
+      <p:sp>
+        <p:nvSpPr>
+          <p:cNvPr id="54" name="Shape 52"/>
+          <p:cNvSpPr/>
+          <p:nvPr/>
+        </p:nvSpPr>
+        <p:spPr>
+          <a:xfrm>
+            <a:off x="6870192" y="4169664"/>
+            <a:ext cx="685800" cy="384048"/>
+          </a:xfrm>
+          <a:prstGeom prst="rect">
+            <a:avLst>
+              <a:gd name="adj" fmla="val 9524"/>
+            </a:avLst>
+          </a:prstGeom>
+          <a:solidFill>
+            <a:srgbClr val="FFFFFF"/>
+          </a:solidFill>
+          <a:ln w="12700">
+            <a:solidFill>
+              <a:srgbClr val="DB2777"/>
+            </a:solidFill>
+            <a:prstDash val="solid"/>
+          </a:ln>
+        </p:spPr>
+      </p:sp>
+      <p:sp>
+        <p:nvSpPr>
+          <p:cNvPr id="55" name="Text 53"/>
+          <p:cNvSpPr/>
+          <p:nvPr/>
+        </p:nvSpPr>
+        <p:spPr>
+          <a:xfrm>
+            <a:off x="6870192" y="4169664"/>
+            <a:ext cx="685800" cy="384048"/>
+          </a:xfrm>
+          <a:prstGeom prst="rect">
+            <a:avLst/>
+          </a:prstGeom>
+          <a:noFill/>
+          <a:ln/>
+        </p:spPr>
+        <p:txBody>
+          <a:bodyPr wrap="square" lIns="0" tIns="0" rIns="0" bIns="0" rtlCol="0" anchor="ctr"/>
+          <a:lstStyle/>
+          <a:p>
+            <a:pPr algn="ctr" indent="0" marL="0">
+              <a:buNone/>
+            </a:pPr>
+            <a:r>
+              <a:rPr lang="en-US" sz="900" b="1" dirty="0">
+                <a:solidFill>
+                  <a:srgbClr val="9D174D"/>
+                </a:solidFill>
+                <a:latin typeface="Trebuchet MS" pitchFamily="34" charset="0"/>
+                <a:ea typeface="Trebuchet MS" pitchFamily="34" charset="-122"/>
+                <a:cs typeface="Trebuchet MS" pitchFamily="34" charset="-120"/>
+              </a:rPr>
+              <a:t>th</a:t>
+            </a:r>
+            <a:endParaRPr lang="en-US" sz="900" dirty="0"/>
+          </a:p>
+        </p:txBody>
+      </p:sp>
+      <p:sp>
+        <p:nvSpPr>
+          <p:cNvPr id="56" name="Shape 54"/>
+          <p:cNvSpPr/>
+          <p:nvPr/>
+        </p:nvSpPr>
+        <p:spPr>
+          <a:xfrm>
+            <a:off x="7677912" y="4169664"/>
+            <a:ext cx="685800" cy="384048"/>
+          </a:xfrm>
+          <a:prstGeom prst="rect">
+            <a:avLst>
+              <a:gd name="adj" fmla="val 9524"/>
+            </a:avLst>
+          </a:prstGeom>
+          <a:solidFill>
+            <a:srgbClr val="FFFFFF"/>
+          </a:solidFill>
+          <a:ln w="12700">
+            <a:solidFill>
+              <a:srgbClr val="DB2777"/>
+            </a:solidFill>
+            <a:prstDash val="solid"/>
+          </a:ln>
+        </p:spPr>
+      </p:sp>
+      <p:sp>
+        <p:nvSpPr>
+          <p:cNvPr id="57" name="Text 55"/>
+          <p:cNvSpPr/>
+          <p:nvPr/>
+        </p:nvSpPr>
+        <p:spPr>
+          <a:xfrm>
+            <a:off x="7677912" y="4169664"/>
+            <a:ext cx="685800" cy="384048"/>
+          </a:xfrm>
+          <a:prstGeom prst="rect">
+            <a:avLst/>
+          </a:prstGeom>
+          <a:noFill/>
+          <a:ln/>
+        </p:spPr>
+        <p:txBody>
+          <a:bodyPr wrap="square" lIns="0" tIns="0" rIns="0" bIns="0" rtlCol="0" anchor="ctr"/>
+          <a:lstStyle/>
+          <a:p>
+            <a:pPr algn="ctr" indent="0" marL="0">
+              <a:buNone/>
+            </a:pPr>
+            <a:r>
+              <a:rPr lang="en-US" sz="900" b="1" dirty="0">
+                <a:solidFill>
+                  <a:srgbClr val="9D174D"/>
+                </a:solidFill>
+                <a:latin typeface="Trebuchet MS" pitchFamily="34" charset="0"/>
+                <a:ea typeface="Trebuchet MS" pitchFamily="34" charset="-122"/>
+                <a:cs typeface="Trebuchet MS" pitchFamily="34" charset="-120"/>
+              </a:rPr>
               <a:t>y</a:t>
             </a:r>
             <a:endParaRPr lang="en-US" sz="900" dirty="0"/>
@@ -34798,13 +35815,13 @@
       </p:sp>
       <p:sp>
         <p:nvSpPr>
-          <p:cNvPr id="49" name="Text 47"/>
-          <p:cNvSpPr/>
-          <p:nvPr/>
-        </p:nvSpPr>
-        <p:spPr>
-          <a:xfrm>
-            <a:off x="7274052" y="4572000"/>
+          <p:cNvPr id="58" name="Text 56"/>
+          <p:cNvSpPr/>
+          <p:nvPr/>
+        </p:nvSpPr>
+        <p:spPr>
+          <a:xfrm>
+            <a:off x="7677912" y="4572000"/>
             <a:ext cx="685800" cy="219456"/>
           </a:xfrm>
           <a:prstGeom prst="rect">
@@ -37242,7 +38259,7 @@
                 <a:ea typeface="Trebuchet MS" pitchFamily="34" charset="-122"/>
                 <a:cs typeface="Trebuchet MS" pitchFamily="34" charset="-120"/>
               </a:rPr>
-              <a:t>so-</a:t>
+              <a:t>socio-</a:t>
             </a:r>
             <a:endParaRPr lang="en-US" sz="1300" dirty="0"/>
           </a:p>
@@ -37306,7 +38323,7 @@
                 <a:ea typeface="Trebuchet MS" pitchFamily="34" charset="-122"/>
                 <a:cs typeface="Trebuchet MS" pitchFamily="34" charset="-120"/>
               </a:rPr>
-              <a:t>so</a:t>
+              <a:t>socio</a:t>
             </a:r>
             <a:endParaRPr lang="en-US" sz="1300" dirty="0"/>
           </a:p>
@@ -37568,7 +38585,7 @@
                 <a:ea typeface="Trebuchet MS" pitchFamily="34" charset="-122"/>
                 <a:cs typeface="Trebuchet MS" pitchFamily="34" charset="-120"/>
               </a:rPr>
-              <a:t>apathy</a:t>
+              <a:t>telepathy</a:t>
             </a:r>
             <a:endParaRPr lang="en-US" sz="1200" dirty="0"/>
           </a:p>
@@ -37634,7 +38651,7 @@
                 <a:ea typeface="Trebuchet MS" pitchFamily="34" charset="-122"/>
                 <a:cs typeface="Trebuchet MS" pitchFamily="34" charset="-120"/>
               </a:rPr>
-              <a:t>telepathy</a:t>
+              <a:t>apathy</a:t>
             </a:r>
             <a:endParaRPr lang="en-US" sz="1200" dirty="0"/>
           </a:p>
@@ -37766,7 +38783,7 @@
                 <a:ea typeface="Trebuchet MS" pitchFamily="34" charset="-122"/>
                 <a:cs typeface="Trebuchet MS" pitchFamily="34" charset="-120"/>
               </a:rPr>
-              <a:t>homeopathy</a:t>
+              <a:t>osteopathy</a:t>
             </a:r>
             <a:endParaRPr lang="en-US" sz="1200" dirty="0"/>
           </a:p>
@@ -37832,7 +38849,7 @@
                 <a:ea typeface="Trebuchet MS" pitchFamily="34" charset="-122"/>
                 <a:cs typeface="Trebuchet MS" pitchFamily="34" charset="-120"/>
               </a:rPr>
-              <a:t>osteopathy</a:t>
+              <a:t>homeopathy</a:t>
             </a:r>
             <a:endParaRPr lang="en-US" sz="1200" dirty="0"/>
           </a:p>
@@ -39086,7 +40103,7 @@
                 <a:ea typeface="Calibri" pitchFamily="34" charset="-122"/>
                 <a:cs typeface="Calibri" pitchFamily="34" charset="-120"/>
               </a:rPr>
-              <a:t>1.  The suffix '-pathy' comes from Greek and relates to feeling or suffering.</a:t>
+              <a:t>1.  Telepathy refers to the idea of communicating thoughts directly from one mind to another.</a:t>
             </a:r>
             <a:endParaRPr lang="en-US" sz="1300" dirty="0"/>
           </a:p>
@@ -39225,7 +40242,7 @@
                 <a:ea typeface="Calibri" pitchFamily="34" charset="-122"/>
                 <a:cs typeface="Calibri" pitchFamily="34" charset="-120"/>
               </a:rPr>
-              <a:t>2.  The word 'empathy' means feeling nothing at all about other people's emotions.</a:t>
+              <a:t>2.  The word 'sympathy' ends in '-pathy' but has nothing to do with feelings.</a:t>
             </a:r>
             <a:endParaRPr lang="en-US" sz="1300" dirty="0"/>
           </a:p>
@@ -39364,7 +40381,7 @@
                 <a:ea typeface="Calibri" pitchFamily="34" charset="-122"/>
                 <a:cs typeface="Calibri" pitchFamily="34" charset="-120"/>
               </a:rPr>
-              <a:t>3.  Telepathy involves the idea of sending thoughts directly from one mind to another.</a:t>
+              <a:t>3.  The suffix '-pathy' comes from a Greek word meaning feeling or disease.</a:t>
             </a:r>
             <a:endParaRPr lang="en-US" sz="1300" dirty="0"/>
           </a:p>
@@ -39503,7 +40520,7 @@
                 <a:ea typeface="Calibri" pitchFamily="34" charset="-122"/>
                 <a:cs typeface="Calibri" pitchFamily="34" charset="-120"/>
               </a:rPr>
-              <a:t>4.  Words ending in '-pathy' can describe both feelings and types of medical treatment.</a:t>
+              <a:t>4.  The word 'empathy' means you do not care about how others feel.</a:t>
             </a:r>
             <a:endParaRPr lang="en-US" sz="1300" dirty="0"/>
           </a:p>
@@ -39526,11 +40543,11 @@
             </a:avLst>
           </a:prstGeom>
           <a:solidFill>
-            <a:srgbClr val="DCFCE7"/>
-          </a:solidFill>
-          <a:ln w="12700">
-            <a:solidFill>
-              <a:srgbClr val="16A34A"/>
+            <a:srgbClr val="FEE2E2"/>
+          </a:solidFill>
+          <a:ln w="12700">
+            <a:solidFill>
+              <a:srgbClr val="DC2626"/>
             </a:solidFill>
             <a:prstDash val="solid"/>
           </a:ln>
@@ -39563,13 +40580,13 @@
             <a:r>
               <a:rPr lang="en-US" sz="1100" b="1" dirty="0">
                 <a:solidFill>
-                  <a:srgbClr val="16A34A"/>
+                  <a:srgbClr val="DC2626"/>
                 </a:solidFill>
                 <a:latin typeface="Trebuchet MS" pitchFamily="34" charset="0"/>
                 <a:ea typeface="Trebuchet MS" pitchFamily="34" charset="-122"/>
                 <a:cs typeface="Trebuchet MS" pitchFamily="34" charset="-120"/>
               </a:rPr>
-              <a:t>TRUE</a:t>
+              <a:t>FALSE</a:t>
             </a:r>
             <a:endParaRPr lang="en-US" sz="1100" dirty="0"/>
           </a:p>
@@ -39642,7 +40659,7 @@
                 <a:ea typeface="Calibri" pitchFamily="34" charset="-122"/>
                 <a:cs typeface="Calibri" pitchFamily="34" charset="-120"/>
               </a:rPr>
-              <a:t>5.  The suffix '-pathy' comes from Latin and means 'to move quickly'.</a:t>
+              <a:t>5.  The suffix '-pathy' can be used to name both feelings and types of medical treatment.</a:t>
             </a:r>
             <a:endParaRPr lang="en-US" sz="1300" dirty="0"/>
           </a:p>
@@ -39665,11 +40682,11 @@
             </a:avLst>
           </a:prstGeom>
           <a:solidFill>
-            <a:srgbClr val="FEE2E2"/>
-          </a:solidFill>
-          <a:ln w="12700">
-            <a:solidFill>
-              <a:srgbClr val="DC2626"/>
+            <a:srgbClr val="DCFCE7"/>
+          </a:solidFill>
+          <a:ln w="12700">
+            <a:solidFill>
+              <a:srgbClr val="16A34A"/>
             </a:solidFill>
             <a:prstDash val="solid"/>
           </a:ln>
@@ -39702,13 +40719,13 @@
             <a:r>
               <a:rPr lang="en-US" sz="1100" b="1" dirty="0">
                 <a:solidFill>
-                  <a:srgbClr val="DC2626"/>
+                  <a:srgbClr val="16A34A"/>
                 </a:solidFill>
                 <a:latin typeface="Trebuchet MS" pitchFamily="34" charset="0"/>
                 <a:ea typeface="Trebuchet MS" pitchFamily="34" charset="-122"/>
                 <a:cs typeface="Trebuchet MS" pitchFamily="34" charset="-120"/>
               </a:rPr>
-              <a:t>FALSE</a:t>
+              <a:t>TRUE</a:t>
             </a:r>
             <a:endParaRPr lang="en-US" sz="1100" dirty="0"/>
           </a:p>
@@ -40413,7 +41430,7 @@
                 <a:ea typeface="Trebuchet MS" pitchFamily="34" charset="-122"/>
                 <a:cs typeface="Trebuchet MS" pitchFamily="34" charset="-120"/>
               </a:rPr>
-              <a:t>apathy</a:t>
+              <a:t>telepathy</a:t>
             </a:r>
             <a:endParaRPr lang="en-US" sz="1300" dirty="0"/>
           </a:p>
@@ -40479,7 +41496,7 @@
                 <a:ea typeface="Trebuchet MS" pitchFamily="34" charset="-122"/>
                 <a:cs typeface="Trebuchet MS" pitchFamily="34" charset="-120"/>
               </a:rPr>
-              <a:t>telepathy</a:t>
+              <a:t>apathy</a:t>
             </a:r>
             <a:endParaRPr lang="en-US" sz="1300" dirty="0"/>
           </a:p>
@@ -40611,7 +41628,7 @@
                 <a:ea typeface="Trebuchet MS" pitchFamily="34" charset="-122"/>
                 <a:cs typeface="Trebuchet MS" pitchFamily="34" charset="-120"/>
               </a:rPr>
-              <a:t>homeopathy</a:t>
+              <a:t>osteopathy</a:t>
             </a:r>
             <a:endParaRPr lang="en-US" sz="1300" dirty="0"/>
           </a:p>
@@ -40677,7 +41694,7 @@
                 <a:ea typeface="Trebuchet MS" pitchFamily="34" charset="-122"/>
                 <a:cs typeface="Trebuchet MS" pitchFamily="34" charset="-120"/>
               </a:rPr>
-              <a:t>osteopathy</a:t>
+              <a:t>homeopathy</a:t>
             </a:r>
             <a:endParaRPr lang="en-US" sz="1300" dirty="0"/>
           </a:p>
@@ -41921,7 +42938,7 @@
                 <a:ea typeface="Trebuchet MS" pitchFamily="34" charset="-122"/>
                 <a:cs typeface="Trebuchet MS" pitchFamily="34" charset="-120"/>
               </a:rPr>
-              <a:t>so-</a:t>
+              <a:t>socio-</a:t>
             </a:r>
             <a:endParaRPr lang="en-US" sz="1300" dirty="0"/>
           </a:p>
@@ -41985,7 +43002,7 @@
                 <a:ea typeface="Trebuchet MS" pitchFamily="34" charset="-122"/>
                 <a:cs typeface="Trebuchet MS" pitchFamily="34" charset="-120"/>
               </a:rPr>
-              <a:t>so</a:t>
+              <a:t>socio</a:t>
             </a:r>
             <a:endParaRPr lang="en-US" sz="1300" dirty="0"/>
           </a:p>
@@ -42921,7 +43938,7 @@
                 <a:ea typeface="Calibri" pitchFamily="34" charset="-122"/>
                 <a:cs typeface="Calibri" pitchFamily="34" charset="-120"/>
               </a:rPr>
-              <a:t>A feeling of not caring about anything or not being interested in what is happening around you.</a:t>
+              <a:t>The idea of sending thoughts or feelings directly to another person's mind without speaking.</a:t>
             </a:r>
             <a:endParaRPr lang="en-US" sz="1200" dirty="0"/>
           </a:p>
@@ -43060,7 +44077,7 @@
                 <a:ea typeface="Calibri" pitchFamily="34" charset="-122"/>
                 <a:cs typeface="Calibri" pitchFamily="34" charset="-120"/>
               </a:rPr>
-              <a:t>A strong feeling of dislike or not wanting anything to do with something or someone.</a:t>
+              <a:t>A strong feeling of dislike towards someone or something.</a:t>
             </a:r>
             <a:endParaRPr lang="en-US" sz="1200" dirty="0"/>
           </a:p>
@@ -43133,7 +44150,7 @@
                 <a:ea typeface="Trebuchet MS" pitchFamily="34" charset="-122"/>
                 <a:cs typeface="Trebuchet MS" pitchFamily="34" charset="-120"/>
               </a:rPr>
-              <a:t>apathy</a:t>
+              <a:t>telepathy</a:t>
             </a:r>
             <a:endParaRPr lang="en-US" sz="1200" dirty="0"/>
           </a:p>
@@ -43199,7 +44216,7 @@
                 <a:ea typeface="Calibri" pitchFamily="34" charset="-122"/>
                 <a:cs typeface="Calibri" pitchFamily="34" charset="-120"/>
               </a:rPr>
-              <a:t>The ability to understand and share how another person is feeling, as if you were in their shoes.</a:t>
+              <a:t>The ability to understand and share how someone else is feeling.</a:t>
             </a:r>
             <a:endParaRPr lang="en-US" sz="1200" dirty="0"/>
           </a:p>
@@ -43272,7 +44289,7 @@
                 <a:ea typeface="Trebuchet MS" pitchFamily="34" charset="-122"/>
                 <a:cs typeface="Trebuchet MS" pitchFamily="34" charset="-120"/>
               </a:rPr>
-              <a:t>telepathy</a:t>
+              <a:t>apathy</a:t>
             </a:r>
             <a:endParaRPr lang="en-US" sz="1200" dirty="0"/>
           </a:p>
@@ -43338,7 +44355,7 @@
                 <a:ea typeface="Calibri" pitchFamily="34" charset="-122"/>
                 <a:cs typeface="Calibri" pitchFamily="34" charset="-120"/>
               </a:rPr>
-              <a:t>A type of alternative medicine that uses very tiny amounts of natural substances to treat illness.</a:t>
+              <a:t>A way of treating body pain by carefully moving and adjusting bones and muscles.</a:t>
             </a:r>
             <a:endParaRPr lang="en-US" sz="1200" dirty="0"/>
           </a:p>
@@ -43477,7 +44494,7 @@
                 <a:ea typeface="Calibri" pitchFamily="34" charset="-122"/>
                 <a:cs typeface="Calibri" pitchFamily="34" charset="-120"/>
               </a:rPr>
-              <a:t>A way of treating pain and illness by moving and stretching the bones and muscles in the body.</a:t>
+              <a:t>A type of alternative medicine that uses very tiny amounts of natural substances to treat illness.</a:t>
             </a:r>
             <a:endParaRPr lang="en-US" sz="1200" dirty="0"/>
           </a:p>
@@ -43550,7 +44567,7 @@
                 <a:ea typeface="Trebuchet MS" pitchFamily="34" charset="-122"/>
                 <a:cs typeface="Trebuchet MS" pitchFamily="34" charset="-120"/>
               </a:rPr>
-              <a:t>homeopathy</a:t>
+              <a:t>osteopathy</a:t>
             </a:r>
             <a:endParaRPr lang="en-US" sz="1200" dirty="0"/>
           </a:p>
@@ -43616,7 +44633,7 @@
                 <a:ea typeface="Calibri" pitchFamily="34" charset="-122"/>
                 <a:cs typeface="Calibri" pitchFamily="34" charset="-120"/>
               </a:rPr>
-              <a:t>The imagined ability to send or receive thoughts from another person's mind without speaking.</a:t>
+              <a:t>A feeling of not caring about something or not being interested at all.</a:t>
             </a:r>
             <a:endParaRPr lang="en-US" sz="1200" dirty="0"/>
           </a:p>
@@ -43689,7 +44706,7 @@
                 <a:ea typeface="Trebuchet MS" pitchFamily="34" charset="-122"/>
                 <a:cs typeface="Trebuchet MS" pitchFamily="34" charset="-120"/>
               </a:rPr>
-              <a:t>osteopathy</a:t>
+              <a:t>homeopathy</a:t>
             </a:r>
             <a:endParaRPr lang="en-US" sz="1200" dirty="0"/>
           </a:p>
@@ -43755,7 +44772,7 @@
                 <a:ea typeface="Calibri" pitchFamily="34" charset="-122"/>
                 <a:cs typeface="Calibri" pitchFamily="34" charset="-120"/>
               </a:rPr>
-              <a:t>Feeling sorry for someone who is going through a hard time and wanting to comfort them.</a:t>
+              <a:t>Feeling sorry for someone who is going through a hard time.</a:t>
             </a:r>
             <a:endParaRPr lang="en-US" sz="1200" dirty="0"/>
           </a:p>
@@ -44250,7 +45267,7 @@
                 <a:ea typeface="Calibri" pitchFamily="34" charset="-122"/>
                 <a:cs typeface="Calibri" pitchFamily="34" charset="-120"/>
               </a:rPr>
-              <a:t>Our teacher showed great empathy when she noticed that Marcus was feeling upset about moving schools.</a:t>
+              <a:t>She showed great empathy when her friend was upset, sitting quietly beside her and listening carefully.</a:t>
             </a:r>
             <a:endParaRPr lang="en-US" sz="1500" dirty="0"/>
           </a:p>
@@ -44414,7 +45431,7 @@
                 <a:ea typeface="Calibri" pitchFamily="34" charset="-122"/>
                 <a:cs typeface="Calibri" pitchFamily="34" charset="-120"/>
               </a:rPr>
-              <a:t>Mia felt sympathy for her friend who had broken his arm just before the swimming carnival.</a:t>
+              <a:t>The doctor studied osteopathy so she could help patients with back and joint pain without using medicine.</a:t>
             </a:r>
             <a:endParaRPr lang="en-US" sz="1500" dirty="0"/>
           </a:p>
@@ -44578,7 +45595,7 @@
                 <a:ea typeface="Calibri" pitchFamily="34" charset="-122"/>
                 <a:cs typeface="Calibri" pitchFamily="34" charset="-120"/>
               </a:rPr>
-              <a:t>The class discussed how apathy — not caring about anything — can make it hard to learn new things.</a:t>
+              <a:t>Some people believe in telepathy, but there is no scientific proof that humans can send thoughts to each other.</a:t>
             </a:r>
             <a:endParaRPr lang="en-US" sz="1500" dirty="0"/>
           </a:p>
